--- a/蟹工船様LINE公式アカウント提案.pptx
+++ b/蟹工船様LINE公式アカウント提案.pptx
@@ -155,6 +155,15 @@
 </p:cmAuthorLst>
 </file>
 
+<file path=ppt/revisionInfo.xml><?xml version="1.0" encoding="utf-8"?>
+<p1510:revInfo xmlns:a="http://schemas.openxmlformats.org/drawingml/2006/main" xmlns:r="http://schemas.openxmlformats.org/officeDocument/2006/relationships" xmlns:p1510="http://schemas.microsoft.com/office/powerpoint/2015/10/main">
+  <p1510:revLst>
+    <p1510:client id="{6DE67A9E-F502-4F4C-ABDD-A5895BD12BF7}" v="23" dt="2026-10-15T13:28:33.025"/>
+    <p1510:client id="{C414BEAF-31FA-47A1-95AF-4BC08DB81CED}" v="1130" dt="2026-10-15T15:40:47.722"/>
+  </p1510:revLst>
+</p1510:revInfo>
+</file>
+
 <file path=ppt/handoutMasters/handoutMaster1.xml><?xml version="1.0" encoding="utf-8"?>
 <p:handoutMaster xmlns:a="http://schemas.openxmlformats.org/drawingml/2006/main" xmlns:r="http://schemas.openxmlformats.org/officeDocument/2006/relationships" xmlns:p="http://schemas.openxmlformats.org/presentationml/2006/main">
   <p:cSld>
@@ -237,7 +246,7 @@
           <a:p>
             <a:fld id="{9419EFD4-15CD-40C2-A220-512208384092}" type="datetimeFigureOut">
               <a:rPr kumimoji="1" lang="ja-JP" altLang="en-US" smtClean="0"/>
-              <a:t>2026/10/14</a:t>
+              <a:t>2026/10/15</a:t>
             </a:fld>
             <a:endParaRPr kumimoji="1" lang="ja-JP" altLang="en-US"/>
           </a:p>
@@ -403,7 +412,7 @@
             <a:fld id="{A811CA1F-CBC6-4416-AD50-3C64E4A227D9}" type="datetimeFigureOut">
               <a:rPr kumimoji="1" lang="ja-JP" altLang="en-US" smtClean="0"/>
               <a:pPr/>
-              <a:t>2026/10/14</a:t>
+              <a:t>2026/10/15</a:t>
             </a:fld>
             <a:endParaRPr kumimoji="1" lang="ja-JP" altLang="en-US"/>
           </a:p>
@@ -1021,7 +1030,7 @@
             <a:fld id="{938A80E6-8F9F-4F6D-B5CB-F870B1E21ECA}" type="datetime1">
               <a:rPr kumimoji="1" lang="ja-JP" altLang="en-US" smtClean="0"/>
               <a:pPr/>
-              <a:t>2026/10/14</a:t>
+              <a:t>2026/10/15</a:t>
             </a:fld>
             <a:endParaRPr kumimoji="1" lang="ja-JP" altLang="en-US"/>
           </a:p>
@@ -1225,7 +1234,7 @@
             <a:fld id="{2CD830B0-6D79-4FD5-A4C0-EF1475B25D88}" type="datetime1">
               <a:rPr kumimoji="1" lang="ja-JP" altLang="en-US" smtClean="0"/>
               <a:pPr/>
-              <a:t>2026/10/14</a:t>
+              <a:t>2026/10/15</a:t>
             </a:fld>
             <a:endParaRPr kumimoji="1" lang="ja-JP" altLang="en-US"/>
           </a:p>
@@ -1439,7 +1448,7 @@
             <a:fld id="{4979E9CC-AD96-4AD0-84B2-246C4B8E0998}" type="datetime1">
               <a:rPr kumimoji="1" lang="ja-JP" altLang="en-US" smtClean="0"/>
               <a:pPr/>
-              <a:t>2026/10/14</a:t>
+              <a:t>2026/10/15</a:t>
             </a:fld>
             <a:endParaRPr kumimoji="1" lang="ja-JP" altLang="en-US"/>
           </a:p>
@@ -2293,7 +2302,7 @@
             <a:fld id="{A8A47E6C-0212-4372-B82D-7ABB435F7E95}" type="datetime1">
               <a:rPr kumimoji="1" lang="ja-JP" altLang="en-US" smtClean="0"/>
               <a:pPr/>
-              <a:t>2026/10/14</a:t>
+              <a:t>2026/10/15</a:t>
             </a:fld>
             <a:endParaRPr kumimoji="1" lang="ja-JP" altLang="en-US"/>
           </a:p>
@@ -2726,7 +2735,7 @@
             <a:fld id="{ED40E438-6206-45D4-9E7D-73689BD1EE2E}" type="datetime1">
               <a:rPr kumimoji="1" lang="ja-JP" altLang="en-US" smtClean="0"/>
               <a:pPr/>
-              <a:t>2026/10/14</a:t>
+              <a:t>2026/10/15</a:t>
             </a:fld>
             <a:endParaRPr kumimoji="1" lang="ja-JP" altLang="en-US"/>
           </a:p>
@@ -2876,7 +2885,7 @@
             <a:fld id="{962BDDE3-EBF6-4FA2-AC54-0EE1201806F3}" type="datetime1">
               <a:rPr kumimoji="1" lang="ja-JP" altLang="en-US" smtClean="0"/>
               <a:pPr/>
-              <a:t>2026/10/14</a:t>
+              <a:t>2026/10/15</a:t>
             </a:fld>
             <a:endParaRPr kumimoji="1" lang="ja-JP" altLang="en-US"/>
           </a:p>
@@ -3187,7 +3196,7 @@
             <a:fld id="{D7907B9C-3321-43D5-A6AB-834DC3297F2B}" type="datetime1">
               <a:rPr kumimoji="1" lang="ja-JP" altLang="en-US" smtClean="0"/>
               <a:pPr/>
-              <a:t>2026/10/14</a:t>
+              <a:t>2026/10/15</a:t>
             </a:fld>
             <a:endParaRPr kumimoji="1" lang="ja-JP" altLang="en-US"/>
           </a:p>
@@ -3434,7 +3443,7 @@
             <a:fld id="{14709FE6-9F7F-4475-A799-F09E5B44CDB3}" type="datetime1">
               <a:rPr kumimoji="1" lang="ja-JP" altLang="en-US" smtClean="0"/>
               <a:pPr/>
-              <a:t>2026/10/14</a:t>
+              <a:t>2026/10/15</a:t>
             </a:fld>
             <a:endParaRPr kumimoji="1" lang="ja-JP" altLang="en-US"/>
           </a:p>
@@ -3859,7 +3868,7 @@
           <a:noFill/>
         </p:spPr>
         <p:txBody>
-          <a:bodyPr wrap="square" rtlCol="0">
+          <a:bodyPr wrap="square" lIns="91440" tIns="45720" rIns="91440" bIns="45720" rtlCol="0" anchor="t">
             <a:spAutoFit/>
           </a:bodyPr>
           <a:lstStyle/>
@@ -3891,28 +3900,27 @@
             <a:endParaRPr lang="en-US" altLang="ja-JP" sz="3200" dirty="0"/>
           </a:p>
           <a:p>
+            <a:pPr algn="ctr"/>
+            <a:r>
+              <a:rPr lang="ja-JP" altLang="ja-JP" sz="3200"/>
+              <a:t>LINE公式アカウント</a:t>
+            </a:r>
+            <a:endParaRPr lang="en-US" altLang="ja-JP" sz="3200">
+              <a:latin typeface="メイリオ" panose="020B0604030504040204" pitchFamily="50" charset="-128"/>
+              <a:ea typeface="メイリオ" panose="020B0604030504040204" pitchFamily="50" charset="-128"/>
+            </a:endParaRPr>
+          </a:p>
+          <a:p>
             <a:pPr algn="ctr">
               <a:lnSpc>
                 <a:spcPct val="100000"/>
               </a:lnSpc>
             </a:pPr>
             <a:r>
-              <a:rPr lang="ja-JP" altLang="ja-JP" sz="3200" dirty="0"/>
-              <a:t>LINE公式アカウント </a:t>
-            </a:r>
-            <a:endParaRPr lang="en-US" altLang="ja-JP" sz="3200" dirty="0"/>
-          </a:p>
-          <a:p>
-            <a:pPr algn="ctr">
-              <a:lnSpc>
-                <a:spcPct val="100000"/>
-              </a:lnSpc>
-            </a:pPr>
-            <a:r>
-              <a:rPr lang="ja-JP" altLang="ja-JP" sz="3200" dirty="0"/>
+              <a:rPr lang="ja-JP" altLang="ja-JP" sz="3200"/>
               <a:t>運用・特典のご提案</a:t>
             </a:r>
-            <a:endParaRPr kumimoji="1" lang="en-US" altLang="ja-JP" sz="3200" dirty="0">
+            <a:endParaRPr lang="en-US" altLang="ja-JP" sz="3200">
               <a:latin typeface="メイリオ" panose="020B0604030504040204" pitchFamily="50" charset="-128"/>
               <a:ea typeface="メイリオ" panose="020B0604030504040204" pitchFamily="50" charset="-128"/>
             </a:endParaRPr>
@@ -3936,57 +3944,57 @@
           <a:noFill/>
         </p:spPr>
         <p:txBody>
-          <a:bodyPr wrap="square" rtlCol="0">
+          <a:bodyPr wrap="square" lIns="91440" tIns="45720" rIns="91440" bIns="45720" rtlCol="0" anchor="t">
             <a:spAutoFit/>
           </a:bodyPr>
           <a:lstStyle/>
           <a:p>
             <a:pPr algn="ctr"/>
             <a:r>
-              <a:rPr kumimoji="1" lang="en-US" altLang="ja-JP" sz="1200" dirty="0">
-                <a:latin typeface="メイリオ" panose="020B0604030504040204" pitchFamily="50" charset="-128"/>
-                <a:ea typeface="メイリオ" panose="020B0604030504040204" pitchFamily="50" charset="-128"/>
+              <a:rPr kumimoji="1" lang="en-US" altLang="ja-JP" sz="1200">
+                <a:latin typeface="メイリオ"/>
+                <a:ea typeface="メイリオ"/>
               </a:rPr>
               <a:t>2026</a:t>
             </a:r>
             <a:r>
-              <a:rPr kumimoji="1" lang="ja-JP" altLang="en-US" sz="1200" dirty="0">
-                <a:latin typeface="メイリオ" panose="020B0604030504040204" pitchFamily="50" charset="-128"/>
-                <a:ea typeface="メイリオ" panose="020B0604030504040204" pitchFamily="50" charset="-128"/>
+              <a:rPr kumimoji="1" lang="ja-JP" altLang="en-US" sz="1200">
+                <a:latin typeface="メイリオ"/>
+                <a:ea typeface="メイリオ"/>
               </a:rPr>
               <a:t>年</a:t>
             </a:r>
             <a:r>
-              <a:rPr kumimoji="1" lang="en-US" altLang="ja-JP" sz="1200" dirty="0">
-                <a:latin typeface="メイリオ" panose="020B0604030504040204" pitchFamily="50" charset="-128"/>
-                <a:ea typeface="メイリオ" panose="020B0604030504040204" pitchFamily="50" charset="-128"/>
+              <a:rPr kumimoji="1" lang="en-US" altLang="ja-JP" sz="1200">
+                <a:latin typeface="メイリオ"/>
+                <a:ea typeface="メイリオ"/>
               </a:rPr>
               <a:t>10</a:t>
             </a:r>
             <a:r>
-              <a:rPr kumimoji="1" lang="ja-JP" altLang="en-US" sz="1200" dirty="0">
-                <a:latin typeface="メイリオ" panose="020B0604030504040204" pitchFamily="50" charset="-128"/>
-                <a:ea typeface="メイリオ" panose="020B0604030504040204" pitchFamily="50" charset="-128"/>
+              <a:rPr kumimoji="1" lang="ja-JP" altLang="en-US" sz="1200">
+                <a:latin typeface="メイリオ"/>
+                <a:ea typeface="メイリオ"/>
               </a:rPr>
               <a:t>月</a:t>
             </a:r>
             <a:r>
-              <a:rPr kumimoji="1" lang="en-US" altLang="ja-JP" sz="1200" dirty="0">
-                <a:latin typeface="メイリオ" panose="020B0604030504040204" pitchFamily="50" charset="-128"/>
-                <a:ea typeface="メイリオ" panose="020B0604030504040204" pitchFamily="50" charset="-128"/>
-              </a:rPr>
-              <a:t>14</a:t>
-            </a:r>
-            <a:r>
-              <a:rPr kumimoji="1" lang="ja-JP" altLang="en-US" sz="1200" dirty="0">
-                <a:latin typeface="メイリオ" panose="020B0604030504040204" pitchFamily="50" charset="-128"/>
-                <a:ea typeface="メイリオ" panose="020B0604030504040204" pitchFamily="50" charset="-128"/>
+              <a:rPr kumimoji="1" lang="en-US" altLang="ja-JP" sz="1200">
+                <a:latin typeface="メイリオ"/>
+                <a:ea typeface="メイリオ"/>
+              </a:rPr>
+              <a:t>16</a:t>
+            </a:r>
+            <a:r>
+              <a:rPr kumimoji="1" lang="ja-JP" altLang="en-US" sz="1200">
+                <a:latin typeface="メイリオ"/>
+                <a:ea typeface="メイリオ"/>
               </a:rPr>
               <a:t>日</a:t>
             </a:r>
-            <a:endParaRPr kumimoji="1" lang="en-US" altLang="ja-JP" sz="1200" dirty="0">
-              <a:latin typeface="メイリオ" panose="020B0604030504040204" pitchFamily="50" charset="-128"/>
-              <a:ea typeface="メイリオ" panose="020B0604030504040204" pitchFamily="50" charset="-128"/>
+            <a:endParaRPr lang="en-US" altLang="ja-JP" sz="1200" dirty="0">
+              <a:latin typeface="メイリオ"/>
+              <a:ea typeface="メイリオ"/>
             </a:endParaRPr>
           </a:p>
         </p:txBody>
@@ -4083,7 +4091,7 @@
         <p:spPr>
           <a:xfrm>
             <a:off x="227573" y="474392"/>
-            <a:ext cx="9284302" cy="617861"/>
+            <a:ext cx="9284302" cy="966418"/>
           </a:xfrm>
           <a:prstGeom prst="rect">
             <a:avLst/>
@@ -4091,7 +4099,7 @@
           <a:noFill/>
         </p:spPr>
         <p:txBody>
-          <a:bodyPr wrap="square">
+          <a:bodyPr wrap="square" lIns="91440" tIns="45720" rIns="91440" bIns="45720" anchor="t">
             <a:spAutoFit/>
           </a:bodyPr>
           <a:lstStyle/>
@@ -4108,55 +4116,48 @@
               </a:defRPr>
             </a:pPr>
             <a:r>
-              <a:rPr lang="ja-JP" altLang="en-US" sz="1300" b="0" i="0" u="none" strike="noStrike" baseline="0" dirty="0">
+              <a:rPr lang="ja-JP" altLang="en-US" sz="1600" b="0" i="0" u="none" strike="noStrike" baseline="0" dirty="0">
                 <a:solidFill>
                   <a:srgbClr val="000000"/>
                 </a:solidFill>
-                <a:latin typeface="メイリオ" panose="020B0604030504040204" pitchFamily="50" charset="-128"/>
-                <a:ea typeface="メイリオ" panose="020B0604030504040204" pitchFamily="50" charset="-128"/>
+                <a:latin typeface="メイリオ"/>
+                <a:ea typeface="メイリオ"/>
               </a:rPr>
               <a:t>■</a:t>
             </a:r>
             <a:r>
-              <a:rPr lang="ja-JP" altLang="en-US" sz="1300" dirty="0"/>
-              <a:t>基本コンセプト</a:t>
-            </a:r>
-            <a:r>
               <a:rPr lang="ja-JP" altLang="en-US" sz="1600" dirty="0"/>
-              <a:t>：</a:t>
-            </a:r>
-            <a:r>
-              <a:rPr lang="ja-JP" altLang="en-US" sz="1300" dirty="0"/>
-              <a:t>既存の</a:t>
-            </a:r>
-            <a:r>
-              <a:rPr lang="en-US" altLang="ja-JP" sz="1300" dirty="0"/>
+              <a:t>基本コンセプト：既存の</a:t>
+            </a:r>
+            <a:r>
+              <a:rPr lang="en-US" altLang="ja-JP" sz="1600" dirty="0"/>
               <a:t>SNS</a:t>
             </a:r>
             <a:r>
-              <a:rPr lang="ja-JP" altLang="en-US" sz="1300" dirty="0"/>
+              <a:rPr lang="ja-JP" altLang="en-US" sz="1600" dirty="0"/>
               <a:t>特典（ </a:t>
             </a:r>
             <a:r>
-              <a:rPr lang="en-US" altLang="ja-JP" sz="1300" dirty="0"/>
+              <a:rPr lang="en-US" altLang="ja-JP" sz="1600" dirty="0"/>
               <a:t>https://www.sapporokanikosen.com/freegift </a:t>
             </a:r>
             <a:r>
-              <a:rPr lang="ja-JP" altLang="en-US" sz="1300" dirty="0"/>
+              <a:rPr lang="ja-JP" altLang="en-US" sz="1600"/>
               <a:t>）の「食後のデザート系」とは別の特典として、</a:t>
             </a:r>
             <a:r>
-              <a:rPr lang="en-US" altLang="ja-JP" sz="1300" b="1" dirty="0"/>
+              <a:rPr lang="en-US" altLang="ja-JP" sz="1600" b="1"/>
               <a:t>LINE</a:t>
             </a:r>
             <a:r>
-              <a:rPr lang="ja-JP" altLang="en-US" sz="1300" b="1" dirty="0"/>
+              <a:rPr lang="ja-JP" altLang="en-US" sz="1600" b="1"/>
               <a:t>では「海鮮丼を食べる方」や「お土産を買う方」に喜んでいただける</a:t>
             </a:r>
             <a:r>
-              <a:rPr lang="ja-JP" altLang="en-US" sz="1300" dirty="0"/>
+              <a:rPr lang="ja-JP" altLang="en-US" sz="1600"/>
               <a:t>内容を考えました。</a:t>
             </a:r>
+            <a:endParaRPr lang="ja-JP" altLang="en-US" sz="1600" dirty="0"/>
           </a:p>
         </p:txBody>
       </p:sp>
@@ -4174,10 +4175,10 @@
         </p:nvSpPr>
         <p:spPr>
           <a:xfrm>
-            <a:off x="227572" y="1466101"/>
+            <a:off x="227572" y="1620358"/>
             <a:ext cx="4495800" cy="4608576"/>
           </a:xfrm>
-          <a:prstGeom prst="roundRect">
+          <a:prstGeom prst="rect">
             <a:avLst/>
           </a:prstGeom>
           <a:solidFill>
@@ -4226,10 +4227,10 @@
         </p:nvSpPr>
         <p:spPr>
           <a:xfrm>
-            <a:off x="5182627" y="1466101"/>
+            <a:off x="5182627" y="1620358"/>
             <a:ext cx="4495800" cy="4608576"/>
           </a:xfrm>
-          <a:prstGeom prst="roundRect">
+          <a:prstGeom prst="rect">
             <a:avLst/>
           </a:prstGeom>
           <a:solidFill>
@@ -4278,7 +4279,7 @@
         </p:nvSpPr>
         <p:spPr>
           <a:xfrm>
-            <a:off x="227573" y="1466101"/>
+            <a:off x="227573" y="1620358"/>
             <a:ext cx="4495800" cy="719750"/>
           </a:xfrm>
           <a:prstGeom prst="rect">
@@ -4361,7 +4362,7 @@
         </p:nvSpPr>
         <p:spPr>
           <a:xfrm>
-            <a:off x="5182627" y="1466101"/>
+            <a:off x="5182627" y="1620358"/>
             <a:ext cx="4495800" cy="719750"/>
           </a:xfrm>
           <a:prstGeom prst="rect">
@@ -4480,7 +4481,7 @@
         </p:nvSpPr>
         <p:spPr>
           <a:xfrm>
-            <a:off x="394124" y="2306167"/>
+            <a:off x="394124" y="2460424"/>
             <a:ext cx="4162697" cy="863753"/>
           </a:xfrm>
           <a:prstGeom prst="roundRect">
@@ -4538,7 +4539,7 @@
         </p:nvSpPr>
         <p:spPr>
           <a:xfrm>
-            <a:off x="5349178" y="2306167"/>
+            <a:off x="5349178" y="2460424"/>
             <a:ext cx="4162697" cy="863753"/>
           </a:xfrm>
           <a:prstGeom prst="roundRect">
@@ -4592,7 +4593,7 @@
         </p:nvSpPr>
         <p:spPr>
           <a:xfrm>
-            <a:off x="676864" y="2384100"/>
+            <a:off x="676864" y="2538357"/>
             <a:ext cx="3597215" cy="707886"/>
           </a:xfrm>
           <a:prstGeom prst="rect">
@@ -4644,7 +4645,7 @@
         </p:nvSpPr>
         <p:spPr>
           <a:xfrm>
-            <a:off x="394122" y="3542189"/>
+            <a:off x="394122" y="3696446"/>
             <a:ext cx="4162697" cy="1954381"/>
           </a:xfrm>
           <a:prstGeom prst="rect">
@@ -4744,7 +4745,7 @@
         </p:nvSpPr>
         <p:spPr>
           <a:xfrm>
-            <a:off x="5545759" y="2384100"/>
+            <a:off x="5545759" y="2538357"/>
             <a:ext cx="3769534" cy="707886"/>
           </a:xfrm>
           <a:prstGeom prst="rect">
@@ -4835,7 +4836,7 @@
         </p:nvSpPr>
         <p:spPr>
           <a:xfrm>
-            <a:off x="5349178" y="3542189"/>
+            <a:off x="5349178" y="3696446"/>
             <a:ext cx="4162697" cy="2292935"/>
           </a:xfrm>
           <a:prstGeom prst="rect">
@@ -4844,7 +4845,7 @@
           <a:noFill/>
         </p:spPr>
         <p:txBody>
-          <a:bodyPr wrap="square" rtlCol="0">
+          <a:bodyPr wrap="square" lIns="91440" tIns="45720" rIns="91440" bIns="45720" rtlCol="0" anchor="t">
             <a:spAutoFit/>
           </a:bodyPr>
           <a:lstStyle/>
@@ -4874,24 +4875,24 @@
           </a:p>
           <a:p>
             <a:r>
-              <a:rPr kumimoji="1" lang="ja-JP" altLang="en-US" sz="1100" dirty="0"/>
+              <a:rPr kumimoji="1" lang="ja-JP" altLang="en-US" sz="1100"/>
               <a:t>・</a:t>
             </a:r>
             <a:r>
-              <a:rPr lang="ja-JP" altLang="ja-JP" sz="1100" dirty="0"/>
+              <a:rPr lang="ja-JP" altLang="ja-JP" sz="1100"/>
               <a:t>ホットペッパー：1回のお会計で1万円以上使う</a:t>
             </a:r>
-            <a:endParaRPr lang="en-US" altLang="ja-JP" sz="1100" dirty="0"/>
-          </a:p>
-          <a:p>
-            <a:r>
-              <a:rPr lang="ja-JP" altLang="ja-JP" sz="1100" dirty="0"/>
-              <a:t>【まとめ買い】用</a:t>
+            <a:endParaRPr lang="ja-JP" altLang="en-US" sz="1100"/>
+          </a:p>
+          <a:p>
+            <a:r>
+              <a:rPr lang="ja-JP" altLang="ja-JP" sz="1100"/>
+              <a:t>「まとめ買い」用</a:t>
             </a:r>
             <a:br>
               <a:rPr kumimoji="1" lang="en-US" altLang="ja-JP" sz="1100" dirty="0"/>
             </a:br>
-            <a:endParaRPr kumimoji="1" lang="ja-JP" altLang="en-US" sz="1100" dirty="0"/>
+            <a:endParaRPr lang="ja-JP" altLang="en-US" sz="1100"/>
           </a:p>
           <a:p>
             <a:r>
@@ -4906,8 +4907,8 @@
           </a:p>
           <a:p>
             <a:r>
-              <a:rPr lang="ja-JP" altLang="ja-JP" sz="1100" b="1" dirty="0"/>
-              <a:t>【何度もお店に通ってもらう】用</a:t>
+              <a:rPr lang="ja-JP" altLang="ja-JP" sz="1100" b="1"/>
+              <a:t>「何度もお店に通ってもらう」用</a:t>
             </a:r>
             <a:br>
               <a:rPr kumimoji="1" lang="en-US" altLang="ja-JP" sz="1100" dirty="0"/>
@@ -4965,10 +4966,122 @@
       </p:grpSpPr>
       <p:sp>
         <p:nvSpPr>
-          <p:cNvPr id="8" name="Rounded Rectangle 13">
+          <p:cNvPr id="3" name="テキスト ボックス 2">
             <a:extLst>
               <a:ext uri="{FF2B5EF4-FFF2-40B4-BE49-F238E27FC236}">
-                <a16:creationId xmlns:a16="http://schemas.microsoft.com/office/drawing/2014/main" id="{0C82B194-D335-59B0-0039-5CE55EE3FCA0}"/>
+                <a16:creationId xmlns:a16="http://schemas.microsoft.com/office/drawing/2014/main" id="{B125DF36-CBFD-71D7-7C04-DC1A60F0AA76}"/>
+              </a:ext>
+            </a:extLst>
+          </p:cNvPr>
+          <p:cNvSpPr txBox="1"/>
+          <p:nvPr/>
+        </p:nvSpPr>
+        <p:spPr>
+          <a:xfrm>
+            <a:off x="227573" y="44659"/>
+            <a:ext cx="4302781" cy="307777"/>
+          </a:xfrm>
+          <a:prstGeom prst="rect">
+            <a:avLst/>
+          </a:prstGeom>
+          <a:noFill/>
+        </p:spPr>
+        <p:txBody>
+          <a:bodyPr wrap="none" lIns="91440" tIns="45720" rIns="91440" bIns="45720" rtlCol="0" anchor="t">
+            <a:spAutoFit/>
+          </a:bodyPr>
+          <a:lstStyle/>
+          <a:p>
+            <a:r>
+              <a:rPr kumimoji="1" lang="en-US" altLang="ja-JP" sz="1400" b="1"/>
+              <a:t>2. </a:t>
+            </a:r>
+            <a:r>
+              <a:rPr lang="en-US" altLang="ja-JP" sz="1400" b="1" dirty="0"/>
+              <a:t>LINE</a:t>
+            </a:r>
+            <a:r>
+              <a:rPr lang="ja-JP" altLang="en-US" sz="1400" b="1" dirty="0"/>
+              <a:t>ならではの配信内容と、運用体制のご提案</a:t>
+            </a:r>
+            <a:endParaRPr lang="ja-JP"/>
+          </a:p>
+        </p:txBody>
+      </p:sp>
+      <p:sp>
+        <p:nvSpPr>
+          <p:cNvPr id="111" name="テキスト ボックス 110">
+            <a:extLst>
+              <a:ext uri="{FF2B5EF4-FFF2-40B4-BE49-F238E27FC236}">
+                <a16:creationId xmlns:a16="http://schemas.microsoft.com/office/drawing/2014/main" id="{1D0671FD-7201-2844-A1E3-35279731D9FF}"/>
+              </a:ext>
+            </a:extLst>
+          </p:cNvPr>
+          <p:cNvSpPr txBox="1"/>
+          <p:nvPr/>
+        </p:nvSpPr>
+        <p:spPr>
+          <a:xfrm>
+            <a:off x="226830" y="589049"/>
+            <a:ext cx="4725427" cy="338554"/>
+          </a:xfrm>
+          <a:prstGeom prst="rect">
+            <a:avLst/>
+          </a:prstGeom>
+          <a:noFill/>
+        </p:spPr>
+        <p:txBody>
+          <a:bodyPr wrap="square" lIns="91440" tIns="45720" rIns="91440" bIns="45720" anchor="t">
+            <a:spAutoFit/>
+          </a:bodyPr>
+          <a:lstStyle/>
+          <a:p>
+            <a:pPr>
+              <a:defRPr sz="1300" b="0">
+                <a:solidFill>
+                  <a:srgbClr val="2B2B2B"/>
+                </a:solidFill>
+                <a:latin typeface="Meiryo"/>
+              </a:defRPr>
+            </a:pPr>
+            <a:r>
+              <a:rPr lang="ja-JP" sz="1600" i="0" u="none" strike="noStrike" baseline="0">
+                <a:ea typeface="+mn-lt"/>
+                <a:cs typeface="+mn-lt"/>
+              </a:rPr>
+              <a:t>■</a:t>
+            </a:r>
+            <a:r>
+              <a:rPr lang="ja-JP" sz="1600">
+                <a:ea typeface="+mn-lt"/>
+                <a:cs typeface="+mn-lt"/>
+              </a:rPr>
+              <a:t>その日の仕入れや状況に合わせた</a:t>
+            </a:r>
+            <a:r>
+              <a:rPr lang="en-US" altLang="ja-JP" sz="1600">
+                <a:ea typeface="+mn-lt"/>
+                <a:cs typeface="+mn-lt"/>
+              </a:rPr>
+              <a:t>LINE</a:t>
+            </a:r>
+            <a:r>
+              <a:rPr lang="ja-JP" sz="1600">
+                <a:ea typeface="+mn-lt"/>
+                <a:cs typeface="+mn-lt"/>
+              </a:rPr>
+              <a:t>限定配信</a:t>
+            </a:r>
+            <a:endParaRPr lang="ja-JP" sz="1600"/>
+          </a:p>
+        </p:txBody>
+      </p:sp>
+      <p:sp>
+        <p:nvSpPr>
+          <p:cNvPr id="133" name="Rounded Rectangle 13">
+            <a:extLst>
+              <a:ext uri="{FF2B5EF4-FFF2-40B4-BE49-F238E27FC236}">
+                <a16:creationId xmlns:a16="http://schemas.microsoft.com/office/drawing/2014/main" id="{1749A59A-3E37-68CC-118F-DF545593D511}"/>
               </a:ext>
             </a:extLst>
           </p:cNvPr>
@@ -4977,8 +5090,8 @@
         </p:nvSpPr>
         <p:spPr>
           <a:xfrm>
-            <a:off x="227571" y="521385"/>
-            <a:ext cx="9450855" cy="1812232"/>
+            <a:off x="5122879" y="1325236"/>
+            <a:ext cx="4192570" cy="1362420"/>
           </a:xfrm>
           <a:prstGeom prst="roundRect">
             <a:avLst/>
@@ -5013,20 +5126,16 @@
           <a:lstStyle/>
           <a:p>
             <a:pPr algn="ctr"/>
-            <a:endParaRPr lang="en-US" altLang="ja-JP" dirty="0">
-              <a:solidFill>
-                <a:schemeClr val="tx1"/>
-              </a:solidFill>
-            </a:endParaRPr>
-          </a:p>
-        </p:txBody>
-      </p:sp>
-      <p:sp>
-        <p:nvSpPr>
-          <p:cNvPr id="3" name="テキスト ボックス 2">
+            <a:endParaRPr/>
+          </a:p>
+        </p:txBody>
+      </p:sp>
+      <p:sp>
+        <p:nvSpPr>
+          <p:cNvPr id="139" name="テキスト ボックス 138">
             <a:extLst>
               <a:ext uri="{FF2B5EF4-FFF2-40B4-BE49-F238E27FC236}">
-                <a16:creationId xmlns:a16="http://schemas.microsoft.com/office/drawing/2014/main" id="{B125DF36-CBFD-71D7-7C04-DC1A60F0AA76}"/>
+                <a16:creationId xmlns:a16="http://schemas.microsoft.com/office/drawing/2014/main" id="{9962DAD4-F5C5-DE11-03AB-8D5298DE9727}"/>
               </a:ext>
             </a:extLst>
           </p:cNvPr>
@@ -5035,8 +5144,8 @@
         </p:nvSpPr>
         <p:spPr>
           <a:xfrm>
-            <a:off x="227573" y="44659"/>
-            <a:ext cx="4302781" cy="307777"/>
+            <a:off x="5379207" y="1455723"/>
+            <a:ext cx="3769534" cy="1019510"/>
           </a:xfrm>
           <a:prstGeom prst="rect">
             <a:avLst/>
@@ -5044,32 +5153,103 @@
           <a:noFill/>
         </p:spPr>
         <p:txBody>
-          <a:bodyPr wrap="none" rtlCol="0">
+          <a:bodyPr wrap="square" lIns="91440" tIns="45720" rIns="91440" bIns="45720" rtlCol="0" anchor="t">
             <a:spAutoFit/>
           </a:bodyPr>
           <a:lstStyle/>
           <a:p>
-            <a:r>
-              <a:rPr kumimoji="1" lang="en-US" altLang="ja-JP" sz="1400" b="1" dirty="0"/>
-              <a:t>1. </a:t>
-            </a:r>
-            <a:r>
-              <a:rPr lang="en-US" altLang="ja-JP" sz="1400" b="1" dirty="0"/>
-              <a:t>LINE</a:t>
-            </a:r>
-            <a:r>
-              <a:rPr lang="ja-JP" altLang="en-US" sz="1400" b="1" dirty="0"/>
-              <a:t>ならではの配信内容と、運用体制のご提案</a:t>
-            </a:r>
-          </a:p>
-        </p:txBody>
-      </p:sp>
-      <p:sp>
-        <p:nvSpPr>
-          <p:cNvPr id="111" name="テキスト ボックス 110">
+            <a:pPr>
+              <a:lnSpc>
+                <a:spcPct val="150000"/>
+              </a:lnSpc>
+            </a:pPr>
+            <a:r>
+              <a:rPr lang="ja-JP" sz="1100" b="1">
+                <a:ea typeface="+mn-lt"/>
+                <a:cs typeface="+mn-lt"/>
+              </a:rPr>
+              <a:t>② 「本日限定の特別な仕入れ」などのお知らせ</a:t>
+            </a:r>
+            <a:endParaRPr lang="ja-JP"/>
+          </a:p>
+          <a:p>
+            <a:pPr>
+              <a:lnSpc>
+                <a:spcPct val="150000"/>
+              </a:lnSpc>
+            </a:pPr>
+            <a:r>
+              <a:rPr lang="ja-JP" sz="1000">
+                <a:ea typeface="+mn-lt"/>
+                <a:cs typeface="+mn-lt"/>
+              </a:rPr>
+              <a:t>その日の入荷状況</a:t>
+            </a:r>
+            <a:r>
+              <a:rPr lang="ja-JP" altLang="en-US" sz="1000">
+                <a:ea typeface="+mn-lt"/>
+                <a:cs typeface="+mn-lt"/>
+              </a:rPr>
+              <a:t>に合わせて、本日限定</a:t>
+            </a:r>
+            <a:r>
+              <a:rPr lang="ja-JP" sz="1000">
+                <a:ea typeface="+mn-lt"/>
+                <a:cs typeface="+mn-lt"/>
+              </a:rPr>
+              <a:t>のおすすめ</a:t>
+            </a:r>
+            <a:r>
+              <a:rPr lang="ja-JP" altLang="en-US" sz="1000">
+                <a:ea typeface="+mn-lt"/>
+                <a:cs typeface="+mn-lt"/>
+              </a:rPr>
+              <a:t>商品やお得</a:t>
+            </a:r>
+            <a:r>
+              <a:rPr lang="ja-JP" sz="1000">
+                <a:ea typeface="+mn-lt"/>
+                <a:cs typeface="+mn-lt"/>
+              </a:rPr>
+              <a:t>情報を</a:t>
+            </a:r>
+            <a:r>
+              <a:rPr lang="ja-JP" altLang="en-US" sz="1000">
+                <a:ea typeface="+mn-lt"/>
+                <a:cs typeface="+mn-lt"/>
+              </a:rPr>
+              <a:t>リアルタイムで</a:t>
+            </a:r>
+            <a:r>
+              <a:rPr lang="ja-JP" sz="1000">
+                <a:ea typeface="+mn-lt"/>
+                <a:cs typeface="+mn-lt"/>
+              </a:rPr>
+              <a:t>配信し、お店に</a:t>
+            </a:r>
+            <a:r>
+              <a:rPr lang="ja-JP" altLang="en-US" sz="1000">
+                <a:ea typeface="+mn-lt"/>
+                <a:cs typeface="+mn-lt"/>
+              </a:rPr>
+              <a:t>足を運んでいただく</a:t>
+            </a:r>
+            <a:r>
+              <a:rPr lang="ja-JP" sz="1000">
+                <a:ea typeface="+mn-lt"/>
+                <a:cs typeface="+mn-lt"/>
+              </a:rPr>
+              <a:t>きっかけを作ります。</a:t>
+            </a:r>
+          </a:p>
+        </p:txBody>
+      </p:sp>
+      <p:sp>
+        <p:nvSpPr>
+          <p:cNvPr id="6" name="テキスト ボックス 5">
             <a:extLst>
               <a:ext uri="{FF2B5EF4-FFF2-40B4-BE49-F238E27FC236}">
-                <a16:creationId xmlns:a16="http://schemas.microsoft.com/office/drawing/2014/main" id="{1D0671FD-7201-2844-A1E3-35279731D9FF}"/>
+                <a16:creationId xmlns:a16="http://schemas.microsoft.com/office/drawing/2014/main" id="{C8483E90-56C0-96EF-41E2-0DD1DCADAED8}"/>
               </a:ext>
             </a:extLst>
           </p:cNvPr>
@@ -5078,8 +5258,8 @@
         </p:nvSpPr>
         <p:spPr>
           <a:xfrm>
-            <a:off x="394121" y="630866"/>
-            <a:ext cx="4725427" cy="322396"/>
+            <a:off x="229654" y="921357"/>
+            <a:ext cx="9203811" cy="292388"/>
           </a:xfrm>
           <a:prstGeom prst="rect">
             <a:avLst/>
@@ -5087,54 +5267,91 @@
           <a:noFill/>
         </p:spPr>
         <p:txBody>
-          <a:bodyPr wrap="square">
+          <a:bodyPr wrap="square" lIns="91440" tIns="45720" rIns="91440" bIns="45720" anchor="t">
             <a:spAutoFit/>
           </a:bodyPr>
           <a:lstStyle/>
           <a:p>
-            <a:pPr>
-              <a:lnSpc>
-                <a:spcPct val="120000"/>
-              </a:lnSpc>
-              <a:defRPr sz="1300" b="0">
-                <a:solidFill>
-                  <a:srgbClr val="2B2B2B"/>
-                </a:solidFill>
-                <a:latin typeface="Meiryo"/>
-              </a:defRPr>
-            </a:pPr>
-            <a:r>
-              <a:rPr lang="ja-JP" altLang="en-US" sz="1300" b="0" i="0" u="none" strike="noStrike" baseline="0" dirty="0">
-                <a:solidFill>
-                  <a:srgbClr val="000000"/>
-                </a:solidFill>
-                <a:latin typeface="メイリオ" panose="020B0604030504040204" pitchFamily="50" charset="-128"/>
-                <a:ea typeface="メイリオ" panose="020B0604030504040204" pitchFamily="50" charset="-128"/>
-              </a:rPr>
-              <a:t>■</a:t>
-            </a:r>
-            <a:r>
-              <a:rPr lang="ja-JP" altLang="en-US" dirty="0"/>
-              <a:t>海鮮業態ならではの「ライブ感」を活かした</a:t>
-            </a:r>
-            <a:r>
-              <a:rPr lang="en-US" altLang="ja-JP" dirty="0"/>
+            <a:r>
+              <a:rPr lang="ja-JP" sz="1300">
+                <a:ea typeface="+mn-lt"/>
+                <a:cs typeface="+mn-lt"/>
+              </a:rPr>
+              <a:t>ホットペッパー</a:t>
+            </a:r>
+            <a:r>
+              <a:rPr lang="ja-JP" altLang="en-US" sz="1300">
+                <a:ea typeface="+mn-lt"/>
+                <a:cs typeface="+mn-lt"/>
+              </a:rPr>
+              <a:t>等</a:t>
+            </a:r>
+            <a:r>
+              <a:rPr lang="ja-JP" sz="1300">
+                <a:ea typeface="+mn-lt"/>
+                <a:cs typeface="+mn-lt"/>
+              </a:rPr>
+              <a:t>とは重ならない</a:t>
+            </a:r>
+            <a:r>
+              <a:rPr lang="ja-JP" altLang="en-US" sz="1300">
+                <a:ea typeface="+mn-lt"/>
+                <a:cs typeface="+mn-lt"/>
+              </a:rPr>
+              <a:t>、</a:t>
+            </a:r>
+            <a:r>
+              <a:rPr lang="en-US" altLang="ja-JP" sz="1300">
+                <a:ea typeface="+mn-lt"/>
+                <a:cs typeface="+mn-lt"/>
+              </a:rPr>
               <a:t>LINE</a:t>
             </a:r>
             <a:r>
-              <a:rPr lang="ja-JP" altLang="en-US" dirty="0"/>
-              <a:t>限定配信</a:t>
-            </a:r>
-            <a:endParaRPr lang="ja-JP" altLang="en-US" sz="1300" dirty="0"/>
-          </a:p>
-        </p:txBody>
-      </p:sp>
-      <p:sp>
-        <p:nvSpPr>
-          <p:cNvPr id="115" name="Rounded Rectangle 10">
+              <a:rPr lang="ja-JP" altLang="en-US" sz="1300">
+                <a:ea typeface="+mn-lt"/>
+                <a:cs typeface="+mn-lt"/>
+              </a:rPr>
+              <a:t>ならではの</a:t>
+            </a:r>
+            <a:r>
+              <a:rPr lang="ja-JP" sz="1300" b="1">
+                <a:ea typeface="+mn-lt"/>
+                <a:cs typeface="+mn-lt"/>
+              </a:rPr>
+              <a:t>その日限定のお得情報</a:t>
+            </a:r>
+            <a:r>
+              <a:rPr lang="ja-JP" sz="1300">
+                <a:ea typeface="+mn-lt"/>
+                <a:cs typeface="+mn-lt"/>
+              </a:rPr>
+              <a:t>をお</a:t>
+            </a:r>
+            <a:r>
+              <a:rPr lang="ja-JP" altLang="en-US" sz="1300">
+                <a:ea typeface="+mn-lt"/>
+                <a:cs typeface="+mn-lt"/>
+              </a:rPr>
+              <a:t>届け</a:t>
+            </a:r>
+            <a:r>
+              <a:rPr lang="ja-JP" sz="1300">
+                <a:ea typeface="+mn-lt"/>
+                <a:cs typeface="+mn-lt"/>
+              </a:rPr>
+              <a:t>できます。</a:t>
+            </a:r>
+            <a:endParaRPr lang="ja-JP" sz="1300"/>
+          </a:p>
+        </p:txBody>
+      </p:sp>
+      <p:sp>
+        <p:nvSpPr>
+          <p:cNvPr id="10" name="Rounded Rectangle 13">
             <a:extLst>
               <a:ext uri="{FF2B5EF4-FFF2-40B4-BE49-F238E27FC236}">
-                <a16:creationId xmlns:a16="http://schemas.microsoft.com/office/drawing/2014/main" id="{D6A0F623-652F-947E-41EA-CD61B9FA1FAA}"/>
+                <a16:creationId xmlns:a16="http://schemas.microsoft.com/office/drawing/2014/main" id="{54C0CCD0-F2E3-FFEE-DE82-5FCA6AD690D6}"/>
               </a:ext>
             </a:extLst>
           </p:cNvPr>
@@ -5143,14 +5360,16 @@
         </p:nvSpPr>
         <p:spPr>
           <a:xfrm>
-            <a:off x="227571" y="2911724"/>
-            <a:ext cx="4495800" cy="3315410"/>
+            <a:off x="560674" y="1325236"/>
+            <a:ext cx="4162697" cy="1356445"/>
           </a:xfrm>
           <a:prstGeom prst="roundRect">
             <a:avLst/>
           </a:prstGeom>
           <a:solidFill>
-            <a:srgbClr val="FFFFFF"/>
+            <a:schemeClr val="bg1">
+              <a:lumMod val="95000"/>
+            </a:schemeClr>
           </a:solidFill>
           <a:ln w="12700">
             <a:solidFill>
@@ -5173,626 +5392,11 @@
           </a:fontRef>
         </p:style>
         <p:txBody>
-          <a:bodyPr rtlCol="0" anchor="ctr"/>
+          <a:bodyPr lIns="91440" tIns="45720" rIns="91440" bIns="45720" rtlCol="0" anchor="ctr"/>
           <a:lstStyle/>
           <a:p>
             <a:pPr algn="ctr"/>
-            <a:endParaRPr/>
-          </a:p>
-        </p:txBody>
-      </p:sp>
-      <p:sp>
-        <p:nvSpPr>
-          <p:cNvPr id="117" name="Rounded Rectangle 10">
-            <a:extLst>
-              <a:ext uri="{FF2B5EF4-FFF2-40B4-BE49-F238E27FC236}">
-                <a16:creationId xmlns:a16="http://schemas.microsoft.com/office/drawing/2014/main" id="{7F6452D0-13C1-5E7D-483A-353169A94A05}"/>
-              </a:ext>
-            </a:extLst>
-          </p:cNvPr>
-          <p:cNvSpPr/>
-          <p:nvPr/>
-        </p:nvSpPr>
-        <p:spPr>
-          <a:xfrm>
-            <a:off x="5182626" y="2911725"/>
-            <a:ext cx="4495800" cy="3315410"/>
-          </a:xfrm>
-          <a:prstGeom prst="roundRect">
-            <a:avLst/>
-          </a:prstGeom>
-          <a:solidFill>
-            <a:srgbClr val="FFFFFF"/>
-          </a:solidFill>
-          <a:ln w="12700">
-            <a:solidFill>
-              <a:schemeClr val="tx1"/>
-            </a:solidFill>
-          </a:ln>
-        </p:spPr>
-        <p:style>
-          <a:lnRef idx="1">
-            <a:schemeClr val="accent1"/>
-          </a:lnRef>
-          <a:fillRef idx="3">
-            <a:schemeClr val="accent1"/>
-          </a:fillRef>
-          <a:effectRef idx="2">
-            <a:schemeClr val="accent1"/>
-          </a:effectRef>
-          <a:fontRef idx="minor">
-            <a:schemeClr val="lt1"/>
-          </a:fontRef>
-        </p:style>
-        <p:txBody>
-          <a:bodyPr rtlCol="0" anchor="ctr"/>
-          <a:lstStyle/>
-          <a:p>
-            <a:pPr algn="ctr"/>
-            <a:endParaRPr/>
-          </a:p>
-        </p:txBody>
-      </p:sp>
-      <p:sp>
-        <p:nvSpPr>
-          <p:cNvPr id="127" name="Rectangle 11">
-            <a:extLst>
-              <a:ext uri="{FF2B5EF4-FFF2-40B4-BE49-F238E27FC236}">
-                <a16:creationId xmlns:a16="http://schemas.microsoft.com/office/drawing/2014/main" id="{4D93FF22-7335-CD39-A7E1-5D5E71CBA508}"/>
-              </a:ext>
-            </a:extLst>
-          </p:cNvPr>
-          <p:cNvSpPr/>
-          <p:nvPr/>
-        </p:nvSpPr>
-        <p:spPr>
-          <a:xfrm>
-            <a:off x="227572" y="2911724"/>
-            <a:ext cx="4495800" cy="719750"/>
-          </a:xfrm>
-          <a:prstGeom prst="rect">
-            <a:avLst/>
-          </a:prstGeom>
-          <a:solidFill>
-            <a:schemeClr val="tx1"/>
-          </a:solidFill>
-          <a:ln>
-            <a:solidFill>
-              <a:schemeClr val="tx1"/>
-            </a:solidFill>
-          </a:ln>
-        </p:spPr>
-        <p:style>
-          <a:lnRef idx="1">
-            <a:schemeClr val="accent1"/>
-          </a:lnRef>
-          <a:fillRef idx="3">
-            <a:schemeClr val="accent1"/>
-          </a:fillRef>
-          <a:effectRef idx="2">
-            <a:schemeClr val="accent1"/>
-          </a:effectRef>
-          <a:fontRef idx="minor">
-            <a:schemeClr val="lt1"/>
-          </a:fontRef>
-        </p:style>
-        <p:txBody>
-          <a:bodyPr rtlCol="0" anchor="ctr"/>
-          <a:lstStyle/>
-          <a:p>
-            <a:pPr>
-              <a:lnSpc>
-                <a:spcPct val="125000"/>
-              </a:lnSpc>
-              <a:defRPr sz="1400" b="1">
-                <a:solidFill>
-                  <a:srgbClr val="FFFFFF"/>
-                </a:solidFill>
-                <a:latin typeface="Meiryo"/>
-              </a:defRPr>
-            </a:pPr>
-            <a:r>
-              <a:rPr lang="ja-JP" altLang="en-US" dirty="0"/>
-              <a:t>パターン①：</a:t>
-            </a:r>
-            <a:endParaRPr lang="en-US" altLang="ja-JP" dirty="0"/>
-          </a:p>
-          <a:p>
-            <a:pPr>
-              <a:lnSpc>
-                <a:spcPct val="125000"/>
-              </a:lnSpc>
-              <a:defRPr sz="1400" b="1">
-                <a:solidFill>
-                  <a:srgbClr val="FFFFFF"/>
-                </a:solidFill>
-                <a:latin typeface="Meiryo"/>
-              </a:defRPr>
-            </a:pPr>
-            <a:r>
-              <a:rPr lang="ja-JP" altLang="en-US" dirty="0"/>
-              <a:t>お店のスタッフ様（店長様など）が配るケース</a:t>
-            </a:r>
-          </a:p>
-        </p:txBody>
-      </p:sp>
-      <p:sp>
-        <p:nvSpPr>
-          <p:cNvPr id="129" name="Rectangle 11">
-            <a:extLst>
-              <a:ext uri="{FF2B5EF4-FFF2-40B4-BE49-F238E27FC236}">
-                <a16:creationId xmlns:a16="http://schemas.microsoft.com/office/drawing/2014/main" id="{36A7B8B6-430F-5FA4-9AA7-5F6D60238971}"/>
-              </a:ext>
-            </a:extLst>
-          </p:cNvPr>
-          <p:cNvSpPr/>
-          <p:nvPr/>
-        </p:nvSpPr>
-        <p:spPr>
-          <a:xfrm>
-            <a:off x="5182626" y="2906541"/>
-            <a:ext cx="4495800" cy="719750"/>
-          </a:xfrm>
-          <a:prstGeom prst="rect">
-            <a:avLst/>
-          </a:prstGeom>
-          <a:solidFill>
-            <a:schemeClr val="tx1"/>
-          </a:solidFill>
-          <a:ln>
-            <a:solidFill>
-              <a:schemeClr val="tx1"/>
-            </a:solidFill>
-          </a:ln>
-        </p:spPr>
-        <p:style>
-          <a:lnRef idx="1">
-            <a:schemeClr val="accent1"/>
-          </a:lnRef>
-          <a:fillRef idx="3">
-            <a:schemeClr val="accent1"/>
-          </a:fillRef>
-          <a:effectRef idx="2">
-            <a:schemeClr val="accent1"/>
-          </a:effectRef>
-          <a:fontRef idx="minor">
-            <a:schemeClr val="lt1"/>
-          </a:fontRef>
-        </p:style>
-        <p:txBody>
-          <a:bodyPr rtlCol="0" anchor="ctr"/>
-          <a:lstStyle/>
-          <a:p>
-            <a:pPr>
-              <a:lnSpc>
-                <a:spcPct val="125000"/>
-              </a:lnSpc>
-              <a:defRPr sz="1400" b="1">
-                <a:solidFill>
-                  <a:srgbClr val="FFFFFF"/>
-                </a:solidFill>
-                <a:latin typeface="Meiryo"/>
-              </a:defRPr>
-            </a:pPr>
-            <a:r>
-              <a:rPr lang="ja-JP" altLang="en-US" dirty="0"/>
-              <a:t>パターン②：</a:t>
-            </a:r>
-            <a:endParaRPr lang="en-US" altLang="ja-JP" dirty="0"/>
-          </a:p>
-          <a:p>
-            <a:pPr>
-              <a:lnSpc>
-                <a:spcPct val="125000"/>
-              </a:lnSpc>
-              <a:defRPr sz="1400" b="1">
-                <a:solidFill>
-                  <a:srgbClr val="FFFFFF"/>
-                </a:solidFill>
-                <a:latin typeface="Meiryo"/>
-              </a:defRPr>
-            </a:pPr>
-            <a:r>
-              <a:rPr lang="en-US" altLang="ja-JP" dirty="0"/>
-              <a:t>Web</a:t>
-            </a:r>
-            <a:r>
-              <a:rPr lang="ja-JP" altLang="en-US" dirty="0"/>
-              <a:t>運用担当者（弊社）が配るケース</a:t>
-            </a:r>
-          </a:p>
-        </p:txBody>
-      </p:sp>
-      <p:sp>
-        <p:nvSpPr>
-          <p:cNvPr id="133" name="Rounded Rectangle 13">
-            <a:extLst>
-              <a:ext uri="{FF2B5EF4-FFF2-40B4-BE49-F238E27FC236}">
-                <a16:creationId xmlns:a16="http://schemas.microsoft.com/office/drawing/2014/main" id="{1749A59A-3E37-68CC-118F-DF545593D511}"/>
-              </a:ext>
-            </a:extLst>
-          </p:cNvPr>
-          <p:cNvSpPr/>
-          <p:nvPr/>
-        </p:nvSpPr>
-        <p:spPr>
-          <a:xfrm>
-            <a:off x="5182626" y="1235627"/>
-            <a:ext cx="4162697" cy="950224"/>
-          </a:xfrm>
-          <a:prstGeom prst="roundRect">
-            <a:avLst/>
-          </a:prstGeom>
-          <a:solidFill>
-            <a:schemeClr val="bg1"/>
-          </a:solidFill>
-          <a:ln w="12700">
-            <a:solidFill>
-              <a:schemeClr val="tx1"/>
-            </a:solidFill>
-          </a:ln>
-        </p:spPr>
-        <p:style>
-          <a:lnRef idx="1">
-            <a:schemeClr val="accent1"/>
-          </a:lnRef>
-          <a:fillRef idx="3">
-            <a:schemeClr val="accent1"/>
-          </a:fillRef>
-          <a:effectRef idx="2">
-            <a:schemeClr val="accent1"/>
-          </a:effectRef>
-          <a:fontRef idx="minor">
-            <a:schemeClr val="lt1"/>
-          </a:fontRef>
-        </p:style>
-        <p:txBody>
-          <a:bodyPr rtlCol="0" anchor="ctr"/>
-          <a:lstStyle/>
-          <a:p>
-            <a:pPr algn="ctr"/>
-            <a:endParaRPr/>
-          </a:p>
-        </p:txBody>
-      </p:sp>
-      <p:sp>
-        <p:nvSpPr>
-          <p:cNvPr id="137" name="テキスト ボックス 136">
-            <a:extLst>
-              <a:ext uri="{FF2B5EF4-FFF2-40B4-BE49-F238E27FC236}">
-                <a16:creationId xmlns:a16="http://schemas.microsoft.com/office/drawing/2014/main" id="{C1086B1B-C4C8-569E-189A-42F7A4860298}"/>
-              </a:ext>
-            </a:extLst>
-          </p:cNvPr>
-          <p:cNvSpPr txBox="1"/>
-          <p:nvPr/>
-        </p:nvSpPr>
-        <p:spPr>
-          <a:xfrm>
-            <a:off x="394122" y="3967331"/>
-            <a:ext cx="4162697" cy="1954381"/>
-          </a:xfrm>
-          <a:prstGeom prst="rect">
-            <a:avLst/>
-          </a:prstGeom>
-          <a:noFill/>
-        </p:spPr>
-        <p:txBody>
-          <a:bodyPr wrap="square" rtlCol="0">
-            <a:spAutoFit/>
-          </a:bodyPr>
-          <a:lstStyle/>
-          <a:p>
-            <a:r>
-              <a:rPr lang="ja-JP" altLang="en-US" sz="1100" dirty="0"/>
-              <a:t>●施策の狙いとメリット</a:t>
-            </a:r>
-            <a:br>
-              <a:rPr lang="en-US" altLang="ja-JP" sz="1100" dirty="0"/>
-            </a:br>
-            <a:endParaRPr lang="ja-JP" altLang="en-US" sz="1100" dirty="0"/>
-          </a:p>
-          <a:p>
-            <a:r>
-              <a:rPr lang="ja-JP" altLang="ja-JP" sz="1100" dirty="0"/>
-              <a:t>・気軽にご登録いただくための工夫：</a:t>
-            </a:r>
-            <a:endParaRPr lang="en-US" altLang="ja-JP" sz="1100" dirty="0"/>
-          </a:p>
-          <a:p>
-            <a:r>
-              <a:rPr lang="ja-JP" altLang="ja-JP" sz="1100" dirty="0"/>
-              <a:t>次回以降のクーポンだけでなく、「今すぐ目の前のお食事</a:t>
-            </a:r>
-            <a:r>
-              <a:rPr lang="ja-JP" altLang="en-US" sz="1100" dirty="0"/>
-              <a:t>が</a:t>
-            </a:r>
-            <a:r>
-              <a:rPr lang="ja-JP" altLang="ja-JP" sz="1100" dirty="0"/>
-              <a:t>お得になる」というメリットをご提供することで、より多くのお客様にご登録いただきやすくなります。</a:t>
-            </a:r>
-            <a:endParaRPr lang="en-US" altLang="ja-JP" sz="1100" dirty="0"/>
-          </a:p>
-          <a:p>
-            <a:endParaRPr kumimoji="1" lang="ja-JP" altLang="en-US" sz="1100" dirty="0"/>
-          </a:p>
-          <a:p>
-            <a:r>
-              <a:rPr kumimoji="1" lang="ja-JP" altLang="en-US" sz="1100" dirty="0"/>
-              <a:t>・既存の</a:t>
-            </a:r>
-            <a:r>
-              <a:rPr kumimoji="1" lang="en-US" altLang="ja-JP" sz="1100" dirty="0"/>
-              <a:t>SNS</a:t>
-            </a:r>
-            <a:r>
-              <a:rPr kumimoji="1" lang="ja-JP" altLang="en-US" sz="1100" dirty="0"/>
-              <a:t>特典と内容が重ならない：</a:t>
-            </a:r>
-          </a:p>
-          <a:p>
-            <a:r>
-              <a:rPr kumimoji="1" lang="ja-JP" altLang="en-US" sz="1100" dirty="0"/>
-              <a:t>既存の</a:t>
-            </a:r>
-            <a:r>
-              <a:rPr kumimoji="1" lang="en-US" altLang="ja-JP" sz="1100" dirty="0"/>
-              <a:t>SNS</a:t>
-            </a:r>
-            <a:r>
-              <a:rPr kumimoji="1" lang="ja-JP" altLang="en-US" sz="1100" dirty="0"/>
-              <a:t>特典はデザート系なので、</a:t>
-            </a:r>
-            <a:r>
-              <a:rPr kumimoji="1" lang="en-US" altLang="ja-JP" sz="1100" dirty="0"/>
-              <a:t>LINE</a:t>
-            </a:r>
-            <a:r>
-              <a:rPr kumimoji="1" lang="ja-JP" altLang="en-US" sz="1100" dirty="0"/>
-              <a:t>では海鮮丼などに追加できるトッピングにすることで、お食事を楽しみに来店されたお客様に喜んでいただけます。</a:t>
-            </a:r>
-          </a:p>
-        </p:txBody>
-      </p:sp>
-      <p:sp>
-        <p:nvSpPr>
-          <p:cNvPr id="139" name="テキスト ボックス 138">
-            <a:extLst>
-              <a:ext uri="{FF2B5EF4-FFF2-40B4-BE49-F238E27FC236}">
-                <a16:creationId xmlns:a16="http://schemas.microsoft.com/office/drawing/2014/main" id="{9962DAD4-F5C5-DE11-03AB-8D5298DE9727}"/>
-              </a:ext>
-            </a:extLst>
-          </p:cNvPr>
-          <p:cNvSpPr txBox="1"/>
-          <p:nvPr/>
-        </p:nvSpPr>
-        <p:spPr>
-          <a:xfrm>
-            <a:off x="5379207" y="1318324"/>
-            <a:ext cx="3769534" cy="784830"/>
-          </a:xfrm>
-          <a:prstGeom prst="rect">
-            <a:avLst/>
-          </a:prstGeom>
-          <a:noFill/>
-        </p:spPr>
-        <p:txBody>
-          <a:bodyPr wrap="square" rtlCol="0">
-            <a:spAutoFit/>
-          </a:bodyPr>
-          <a:lstStyle/>
-          <a:p>
-            <a:r>
-              <a:rPr lang="ja-JP" altLang="en-US" sz="1000" b="1" dirty="0"/>
-              <a:t>② 「本日の特別な仕入れ」のお知らせ</a:t>
-            </a:r>
-            <a:endParaRPr lang="ja-JP" altLang="en-US" sz="800" dirty="0"/>
-          </a:p>
-          <a:p>
-            <a:pPr>
-              <a:lnSpc>
-                <a:spcPct val="150000"/>
-              </a:lnSpc>
-            </a:pPr>
-            <a:r>
-              <a:rPr lang="ja-JP" altLang="en-US" sz="800" dirty="0"/>
-              <a:t>その日の市場の仕入れ状況や、早く売り切りたいおすすめ食材に合わせて鮮度の高いお得情報をリアルタイム配信。お客様の来店動機を作ると同時に食材ロス削減にも貢献します。</a:t>
-            </a:r>
-            <a:endParaRPr lang="ja-JP" altLang="en-US" sz="1200" dirty="0"/>
-          </a:p>
-        </p:txBody>
-      </p:sp>
-      <p:sp>
-        <p:nvSpPr>
-          <p:cNvPr id="141" name="テキスト ボックス 140">
-            <a:extLst>
-              <a:ext uri="{FF2B5EF4-FFF2-40B4-BE49-F238E27FC236}">
-                <a16:creationId xmlns:a16="http://schemas.microsoft.com/office/drawing/2014/main" id="{00FF9B34-B42A-754A-FBB3-D23799A902DB}"/>
-              </a:ext>
-            </a:extLst>
-          </p:cNvPr>
-          <p:cNvSpPr txBox="1"/>
-          <p:nvPr/>
-        </p:nvSpPr>
-        <p:spPr>
-          <a:xfrm>
-            <a:off x="5288217" y="3643708"/>
-            <a:ext cx="4162697" cy="2292935"/>
-          </a:xfrm>
-          <a:prstGeom prst="rect">
-            <a:avLst/>
-          </a:prstGeom>
-          <a:noFill/>
-        </p:spPr>
-        <p:txBody>
-          <a:bodyPr wrap="square" rtlCol="0">
-            <a:spAutoFit/>
-          </a:bodyPr>
-          <a:lstStyle/>
-          <a:p>
-            <a:r>
-              <a:rPr lang="ja-JP" altLang="en-US" sz="1100" dirty="0"/>
-              <a:t>●</a:t>
-            </a:r>
-            <a:r>
-              <a:rPr lang="ja-JP" altLang="ja-JP" sz="1100" dirty="0"/>
-              <a:t>ホットペッパーグルメ（1万円以上で5%OFF）との違い</a:t>
-            </a:r>
-            <a:br>
-              <a:rPr lang="en-US" altLang="ja-JP" sz="1100" dirty="0"/>
-            </a:br>
-            <a:endParaRPr lang="ja-JP" altLang="en-US" sz="1100" dirty="0"/>
-          </a:p>
-          <a:p>
-            <a:r>
-              <a:rPr lang="ja-JP" altLang="ja-JP" sz="1100" dirty="0"/>
-              <a:t>割引額（1万円で500円相当）は同じですが、対象となるお客様と目的が異なります。</a:t>
-            </a:r>
-            <a:endParaRPr lang="en-US" altLang="ja-JP" sz="1100" dirty="0"/>
-          </a:p>
-          <a:p>
-            <a:endParaRPr kumimoji="1" lang="en-US" altLang="ja-JP" sz="1100" dirty="0"/>
-          </a:p>
-          <a:p>
-            <a:r>
-              <a:rPr kumimoji="1" lang="ja-JP" altLang="en-US" sz="1100" dirty="0"/>
-              <a:t>・</a:t>
-            </a:r>
-            <a:r>
-              <a:rPr lang="ja-JP" altLang="ja-JP" sz="1100" dirty="0"/>
-              <a:t>ホットペッパー：1回のお会計で1万円以上使う</a:t>
-            </a:r>
-            <a:endParaRPr lang="en-US" altLang="ja-JP" sz="1100" dirty="0"/>
-          </a:p>
-          <a:p>
-            <a:r>
-              <a:rPr lang="ja-JP" altLang="ja-JP" sz="1100" dirty="0"/>
-              <a:t>【まとめ買い】用</a:t>
-            </a:r>
-            <a:br>
-              <a:rPr kumimoji="1" lang="en-US" altLang="ja-JP" sz="1100" dirty="0"/>
-            </a:br>
-            <a:endParaRPr kumimoji="1" lang="ja-JP" altLang="en-US" sz="1100" dirty="0"/>
-          </a:p>
-          <a:p>
-            <a:r>
-              <a:rPr kumimoji="1" lang="ja-JP" altLang="en-US" sz="1100" b="1" dirty="0"/>
-              <a:t>・</a:t>
-            </a:r>
-            <a:r>
-              <a:rPr lang="ja-JP" altLang="ja-JP" sz="1100" b="1" dirty="0"/>
-              <a:t>LINEスタンプ：1,000円〜数千円のお会計で、</a:t>
-            </a:r>
-            <a:endParaRPr lang="en-US" altLang="ja-JP" sz="1100" b="1" dirty="0"/>
-          </a:p>
-          <a:p>
-            <a:r>
-              <a:rPr lang="ja-JP" altLang="ja-JP" sz="1100" b="1" dirty="0"/>
-              <a:t>【何度もお店に通ってもらう】用</a:t>
-            </a:r>
-            <a:br>
-              <a:rPr kumimoji="1" lang="en-US" altLang="ja-JP" sz="1100" dirty="0"/>
-            </a:br>
-            <a:endParaRPr kumimoji="1" lang="ja-JP" altLang="en-US" sz="1100" dirty="0"/>
-          </a:p>
-          <a:p>
-            <a:r>
-              <a:rPr kumimoji="1" lang="ja-JP" altLang="en-US" sz="1100" dirty="0"/>
-              <a:t>⇒ </a:t>
-            </a:r>
-            <a:r>
-              <a:rPr lang="ja-JP" altLang="ja-JP" sz="1100" dirty="0"/>
-              <a:t>1回でのまとめ買いと、普段のお食事・お土産でのリピート来店、どちらのお客様にも喜んでいただける組み合わせです。</a:t>
-            </a:r>
-            <a:endParaRPr kumimoji="1" lang="ja-JP" altLang="en-US" sz="1100" dirty="0"/>
-          </a:p>
-        </p:txBody>
-      </p:sp>
-      <p:sp>
-        <p:nvSpPr>
-          <p:cNvPr id="6" name="テキスト ボックス 5">
-            <a:extLst>
-              <a:ext uri="{FF2B5EF4-FFF2-40B4-BE49-F238E27FC236}">
-                <a16:creationId xmlns:a16="http://schemas.microsoft.com/office/drawing/2014/main" id="{C8483E90-56C0-96EF-41E2-0DD1DCADAED8}"/>
-              </a:ext>
-            </a:extLst>
-          </p:cNvPr>
-          <p:cNvSpPr txBox="1"/>
-          <p:nvPr/>
-        </p:nvSpPr>
-        <p:spPr>
-          <a:xfrm>
-            <a:off x="474615" y="921357"/>
-            <a:ext cx="9203811" cy="246221"/>
-          </a:xfrm>
-          <a:prstGeom prst="rect">
-            <a:avLst/>
-          </a:prstGeom>
-          <a:noFill/>
-        </p:spPr>
-        <p:txBody>
-          <a:bodyPr wrap="square">
-            <a:spAutoFit/>
-          </a:bodyPr>
-          <a:lstStyle/>
-          <a:p>
-            <a:r>
-              <a:rPr lang="ja-JP" altLang="en-US" sz="1000" dirty="0"/>
-              <a:t>LINEの強みである「リアルタイム通知」を活かし、他媒体（朝10時までの来店特典など）と被らない、市場のようなワクワク感を配信します。</a:t>
-            </a:r>
-          </a:p>
-        </p:txBody>
-      </p:sp>
-      <p:sp>
-        <p:nvSpPr>
-          <p:cNvPr id="10" name="Rounded Rectangle 13">
-            <a:extLst>
-              <a:ext uri="{FF2B5EF4-FFF2-40B4-BE49-F238E27FC236}">
-                <a16:creationId xmlns:a16="http://schemas.microsoft.com/office/drawing/2014/main" id="{54C0CCD0-F2E3-FFEE-DE82-5FCA6AD690D6}"/>
-              </a:ext>
-            </a:extLst>
-          </p:cNvPr>
-          <p:cNvSpPr/>
-          <p:nvPr/>
-        </p:nvSpPr>
-        <p:spPr>
-          <a:xfrm>
-            <a:off x="560674" y="1235627"/>
-            <a:ext cx="4162697" cy="950224"/>
-          </a:xfrm>
-          <a:prstGeom prst="roundRect">
-            <a:avLst/>
-          </a:prstGeom>
-          <a:solidFill>
-            <a:schemeClr val="bg1"/>
-          </a:solidFill>
-          <a:ln w="12700">
-            <a:solidFill>
-              <a:schemeClr val="tx1"/>
-            </a:solidFill>
-          </a:ln>
-        </p:spPr>
-        <p:style>
-          <a:lnRef idx="1">
-            <a:schemeClr val="accent1"/>
-          </a:lnRef>
-          <a:fillRef idx="3">
-            <a:schemeClr val="accent1"/>
-          </a:fillRef>
-          <a:effectRef idx="2">
-            <a:schemeClr val="accent1"/>
-          </a:effectRef>
-          <a:fontRef idx="minor">
-            <a:schemeClr val="lt1"/>
-          </a:fontRef>
-        </p:style>
-        <p:txBody>
-          <a:bodyPr rtlCol="0" anchor="ctr"/>
-          <a:lstStyle/>
-          <a:p>
-            <a:pPr algn="ctr"/>
-            <a:endParaRPr/>
+            <a:endParaRPr lang="af-ZA" dirty="0"/>
           </a:p>
         </p:txBody>
       </p:sp>
@@ -5810,8 +5414,8 @@
         </p:nvSpPr>
         <p:spPr>
           <a:xfrm>
-            <a:off x="760820" y="1329543"/>
-            <a:ext cx="3769534" cy="784830"/>
+            <a:off x="760820" y="1454994"/>
+            <a:ext cx="3769534" cy="1019510"/>
           </a:xfrm>
           <a:prstGeom prst="rect">
             <a:avLst/>
@@ -5819,17 +5423,10 @@
           <a:noFill/>
         </p:spPr>
         <p:txBody>
-          <a:bodyPr wrap="square" rtlCol="0">
+          <a:bodyPr wrap="square" lIns="91440" tIns="45720" rIns="91440" bIns="45720" rtlCol="0" anchor="t">
             <a:spAutoFit/>
           </a:bodyPr>
           <a:lstStyle/>
-          <a:p>
-            <a:r>
-              <a:rPr lang="ja-JP" altLang="en-US" sz="1000" b="1" dirty="0"/>
-              <a:t>① 既存特典のゲリラアップグレード</a:t>
-            </a:r>
-            <a:endParaRPr lang="ja-JP" altLang="en-US" sz="800" dirty="0"/>
-          </a:p>
           <a:p>
             <a:pPr>
               <a:lnSpc>
@@ -5837,34 +5434,87 @@
               </a:lnSpc>
             </a:pPr>
             <a:r>
-              <a:rPr lang="ja-JP" altLang="en-US" sz="800" dirty="0"/>
+              <a:rPr lang="ja-JP" sz="1100" b="1">
+                <a:ea typeface="+mn-lt"/>
+                <a:cs typeface="+mn-lt"/>
+              </a:rPr>
+              <a:t>① いつもの特典を「今日だけ豪華にする」お知らせ</a:t>
+            </a:r>
+            <a:endParaRPr lang="ja-JP" sz="1100" b="1"/>
+          </a:p>
+          <a:p>
+            <a:pPr>
+              <a:lnSpc>
+                <a:spcPct val="150000"/>
+              </a:lnSpc>
+            </a:pPr>
+            <a:r>
+              <a:rPr lang="ja-JP" sz="1000">
+                <a:ea typeface="+mn-lt"/>
+                <a:cs typeface="+mn-lt"/>
+              </a:rPr>
               <a:t>「本日は</a:t>
             </a:r>
             <a:r>
-              <a:rPr lang="en-US" altLang="ja-JP" sz="800" dirty="0"/>
+              <a:rPr lang="en-US" altLang="ja-JP" sz="1000">
+                <a:ea typeface="+mn-lt"/>
+                <a:cs typeface="+mn-lt"/>
+              </a:rPr>
               <a:t>LINE</a:t>
             </a:r>
             <a:r>
-              <a:rPr lang="ja-JP" altLang="en-US" sz="800" dirty="0"/>
-              <a:t>友だち限定で、カニ身ちょい足しを</a:t>
-            </a:r>
-            <a:r>
-              <a:rPr lang="en-US" altLang="ja-JP" sz="800" dirty="0"/>
+              <a:rPr lang="ja-JP" sz="1000">
+                <a:ea typeface="+mn-lt"/>
+                <a:cs typeface="+mn-lt"/>
+              </a:rPr>
+              <a:t>友だち限定で、カニ身ちょ</a:t>
+            </a:r>
+            <a:r>
+              <a:rPr lang="ja-JP" sz="1000">
+                <a:solidFill>
+                  <a:srgbClr val="000000"/>
+                </a:solidFill>
+                <a:ea typeface="+mn-lt"/>
+                <a:cs typeface="+mn-lt"/>
+              </a:rPr>
+              <a:t>い</a:t>
+            </a:r>
+            <a:r>
+              <a:rPr lang="ja-JP" sz="1000">
+                <a:ea typeface="+mn-lt"/>
+                <a:cs typeface="+mn-lt"/>
+              </a:rPr>
+              <a:t>足しを</a:t>
+            </a:r>
+            <a:r>
+              <a:rPr lang="en-US" altLang="ja-JP" sz="1000">
+                <a:ea typeface="+mn-lt"/>
+                <a:cs typeface="+mn-lt"/>
+              </a:rPr>
               <a:t>【</a:t>
             </a:r>
             <a:r>
-              <a:rPr lang="ja-JP" altLang="en-US" sz="800" dirty="0"/>
+              <a:rPr lang="ja-JP" sz="1000">
+                <a:ea typeface="+mn-lt"/>
+                <a:cs typeface="+mn-lt"/>
+              </a:rPr>
               <a:t>倍量</a:t>
             </a:r>
             <a:r>
-              <a:rPr lang="en-US" altLang="ja-JP" sz="800" dirty="0"/>
+              <a:rPr lang="en-US" altLang="ja-JP" sz="1000">
+                <a:ea typeface="+mn-lt"/>
+                <a:cs typeface="+mn-lt"/>
+              </a:rPr>
               <a:t>】</a:t>
             </a:r>
             <a:r>
-              <a:rPr lang="ja-JP" altLang="en-US" sz="800" dirty="0"/>
-              <a:t>にします！」など、すでに店舗にあるトッピング食材を活かして特別感を演出。新たな食材準備なしで即実行できます。</a:t>
-            </a:r>
-            <a:endParaRPr lang="ja-JP" altLang="en-US" sz="1200" dirty="0"/>
+              <a:rPr lang="ja-JP" sz="1000">
+                <a:ea typeface="+mn-lt"/>
+                <a:cs typeface="+mn-lt"/>
+              </a:rPr>
+              <a:t>にします！」など、すでにお店にある食材を使ったお得な配信です。新しく特別な商品を用意しなくてもすぐに実施できます。</a:t>
+            </a:r>
+            <a:endParaRPr lang="ja-JP" sz="1000"/>
           </a:p>
         </p:txBody>
       </p:sp>
@@ -5882,8 +5532,8 @@
         </p:nvSpPr>
         <p:spPr>
           <a:xfrm>
-            <a:off x="227571" y="2461472"/>
-            <a:ext cx="4772754" cy="322396"/>
+            <a:off x="227571" y="3106650"/>
+            <a:ext cx="4772754" cy="375487"/>
           </a:xfrm>
           <a:prstGeom prst="rect">
             <a:avLst/>
@@ -5891,7 +5541,7 @@
           <a:noFill/>
         </p:spPr>
         <p:txBody>
-          <a:bodyPr wrap="square">
+          <a:bodyPr wrap="square" lIns="91440" tIns="45720" rIns="91440" bIns="45720" anchor="t">
             <a:spAutoFit/>
           </a:bodyPr>
           <a:lstStyle/>
@@ -5908,37 +5558,28 @@
               </a:defRPr>
             </a:pPr>
             <a:r>
-              <a:rPr lang="ja-JP" altLang="en-US" sz="1300" b="0" i="0" u="none" strike="noStrike" baseline="0" dirty="0">
-                <a:solidFill>
-                  <a:srgbClr val="000000"/>
-                </a:solidFill>
-                <a:latin typeface="メイリオ" panose="020B0604030504040204" pitchFamily="50" charset="-128"/>
-                <a:ea typeface="メイリオ" panose="020B0604030504040204" pitchFamily="50" charset="-128"/>
+              <a:rPr lang="ja-JP" sz="1600" b="0" i="0" u="none" strike="noStrike" baseline="0">
+                <a:ea typeface="+mn-lt"/>
+                <a:cs typeface="+mn-lt"/>
               </a:rPr>
               <a:t>■</a:t>
             </a:r>
             <a:r>
-              <a:rPr lang="ja-JP" altLang="en-US" dirty="0"/>
-              <a:t>クーポン・お得情報の配布方法と「</a:t>
-            </a:r>
-            <a:r>
-              <a:rPr lang="en-US" altLang="ja-JP" dirty="0"/>
-              <a:t>2</a:t>
-            </a:r>
-            <a:r>
-              <a:rPr lang="ja-JP" altLang="en-US" dirty="0"/>
-              <a:t>パターンの役割分担」</a:t>
-            </a:r>
-            <a:endParaRPr lang="ja-JP" altLang="en-US" sz="1300" dirty="0"/>
-          </a:p>
-        </p:txBody>
-      </p:sp>
-      <p:sp>
-        <p:nvSpPr>
-          <p:cNvPr id="20" name="テキスト ボックス 19">
+              <a:rPr lang="ja-JP" sz="1600">
+                <a:ea typeface="+mn-lt"/>
+                <a:cs typeface="+mn-lt"/>
+              </a:rPr>
+              <a:t>クーポン・お得情報の2つの配信方法</a:t>
+            </a:r>
+          </a:p>
+        </p:txBody>
+      </p:sp>
+      <p:sp>
+        <p:nvSpPr>
+          <p:cNvPr id="5" name="テキスト ボックス 4">
             <a:extLst>
               <a:ext uri="{FF2B5EF4-FFF2-40B4-BE49-F238E27FC236}">
-                <a16:creationId xmlns:a16="http://schemas.microsoft.com/office/drawing/2014/main" id="{B180B7BD-BD6E-6620-E1E1-8CF47694BB95}"/>
+                <a16:creationId xmlns:a16="http://schemas.microsoft.com/office/drawing/2014/main" id="{24166DB5-2D32-B67A-FFE0-C5EEDF05AAB2}"/>
               </a:ext>
             </a:extLst>
           </p:cNvPr>
@@ -5947,8 +5588,8 @@
         </p:nvSpPr>
         <p:spPr>
           <a:xfrm>
-            <a:off x="224863" y="2730013"/>
-            <a:ext cx="8923877" cy="246221"/>
+            <a:off x="224813" y="3530511"/>
+            <a:ext cx="9461597" cy="1386918"/>
           </a:xfrm>
           <a:prstGeom prst="rect">
             <a:avLst/>
@@ -5956,14 +5597,327 @@
           <a:noFill/>
         </p:spPr>
         <p:txBody>
-          <a:bodyPr wrap="square">
+          <a:bodyPr wrap="square" lIns="91440" tIns="45720" rIns="91440" bIns="45720" anchor="t">
             <a:spAutoFit/>
           </a:bodyPr>
           <a:lstStyle/>
           <a:p>
-            <a:r>
-              <a:rPr lang="ja-JP" altLang="en-US" sz="1000" dirty="0"/>
-              <a:t>友だち追加特典やスタンプ満了特典はシステムから【自動配布】されますが、日頃の配信は内容に応じて店舗様と弊社で分担するのが最もスムーズです。</a:t>
+            <a:pPr>
+              <a:lnSpc>
+                <a:spcPct val="150000"/>
+              </a:lnSpc>
+            </a:pPr>
+            <a:r>
+              <a:rPr lang="ja-JP" sz="1300">
+                <a:ea typeface="+mn-lt"/>
+                <a:cs typeface="+mn-lt"/>
+              </a:rPr>
+              <a:t>パターン①：お店のスタッフ様が配るケース</a:t>
+            </a:r>
+            <a:endParaRPr lang="ja-JP"/>
+          </a:p>
+          <a:p>
+            <a:pPr>
+              <a:lnSpc>
+                <a:spcPct val="150000"/>
+              </a:lnSpc>
+            </a:pPr>
+            <a:r>
+              <a:rPr lang="en-US" altLang="ja-JP" sz="1100">
+                <a:ea typeface="+mn-lt"/>
+                <a:cs typeface="+mn-lt"/>
+              </a:rPr>
+              <a:t>【</a:t>
+            </a:r>
+            <a:r>
+              <a:rPr lang="ja-JP" altLang="en-US" sz="1100">
+                <a:ea typeface="+mn-lt"/>
+                <a:cs typeface="+mn-lt"/>
+              </a:rPr>
+              <a:t>対象</a:t>
+            </a:r>
+            <a:r>
+              <a:rPr lang="en-US" altLang="ja-JP" sz="1100">
+                <a:ea typeface="+mn-lt"/>
+                <a:cs typeface="+mn-lt"/>
+              </a:rPr>
+              <a:t>】</a:t>
+            </a:r>
+            <a:r>
+              <a:rPr lang="ja-JP" altLang="en-US" sz="1100">
+                <a:ea typeface="+mn-lt"/>
+                <a:cs typeface="+mn-lt"/>
+              </a:rPr>
+              <a:t>現場の状況に合わせた突発的な配信</a:t>
+            </a:r>
+            <a:endParaRPr lang="ja-JP" altLang="en-US" sz="1100"/>
+          </a:p>
+          <a:p>
+            <a:pPr>
+              <a:lnSpc>
+                <a:spcPct val="150000"/>
+              </a:lnSpc>
+            </a:pPr>
+            <a:r>
+              <a:rPr lang="ja-JP" altLang="en-US" sz="1100">
+                <a:ea typeface="+mn-lt"/>
+                <a:cs typeface="+mn-lt"/>
+              </a:rPr>
+              <a:t>・「今日はカニの入荷が多いから夕方限定で安くしよう」「急な悪天候だから来店特典を出そう」</a:t>
+            </a:r>
+            <a:r>
+              <a:rPr lang="ja-JP" sz="1100">
+                <a:ea typeface="+mn-lt"/>
+                <a:cs typeface="+mn-lt"/>
+              </a:rPr>
+              <a:t>といったその日のお得情報は、</a:t>
+            </a:r>
+            <a:endParaRPr lang="ja-JP" altLang="en-US" sz="1100" dirty="0">
+              <a:ea typeface="+mn-lt"/>
+              <a:cs typeface="+mn-lt"/>
+            </a:endParaRPr>
+          </a:p>
+          <a:p>
+            <a:pPr>
+              <a:lnSpc>
+                <a:spcPct val="150000"/>
+              </a:lnSpc>
+            </a:pPr>
+            <a:r>
+              <a:rPr lang="ja-JP" altLang="en-US" sz="1100" dirty="0">
+                <a:ea typeface="+mn-lt"/>
+                <a:cs typeface="+mn-lt"/>
+              </a:rPr>
+              <a:t>　</a:t>
+            </a:r>
+            <a:r>
+              <a:rPr lang="ja-JP" sz="1100">
+                <a:ea typeface="+mn-lt"/>
+                <a:cs typeface="+mn-lt"/>
+              </a:rPr>
+              <a:t>お店から直接配信していただくとタイムリーにお知らせできます。</a:t>
+            </a:r>
+            <a:endParaRPr lang="ja-JP" sz="1100"/>
+          </a:p>
+          <a:p>
+            <a:pPr>
+              <a:lnSpc>
+                <a:spcPct val="150000"/>
+              </a:lnSpc>
+            </a:pPr>
+            <a:r>
+              <a:rPr lang="ja-JP" altLang="en-US" sz="1100">
+                <a:ea typeface="+mn-lt"/>
+                <a:cs typeface="+mn-lt"/>
+              </a:rPr>
+              <a:t>・スマホに</a:t>
+            </a:r>
+            <a:r>
+              <a:rPr lang="en-US" altLang="ja-JP" sz="1100">
+                <a:ea typeface="+mn-lt"/>
+                <a:cs typeface="+mn-lt"/>
+              </a:rPr>
+              <a:t>LINE</a:t>
+            </a:r>
+            <a:r>
+              <a:rPr lang="ja-JP" altLang="en-US" sz="1100">
+                <a:ea typeface="+mn-lt"/>
+                <a:cs typeface="+mn-lt"/>
+              </a:rPr>
+              <a:t>公式アカウントの管理アプリを入れておけば、</a:t>
+            </a:r>
+            <a:r>
+              <a:rPr lang="en-US" altLang="ja-JP" sz="1100">
+                <a:ea typeface="+mn-lt"/>
+                <a:cs typeface="+mn-lt"/>
+              </a:rPr>
+              <a:t>1〜2</a:t>
+            </a:r>
+            <a:r>
+              <a:rPr lang="ja-JP" altLang="en-US" sz="1100">
+                <a:ea typeface="+mn-lt"/>
+                <a:cs typeface="+mn-lt"/>
+              </a:rPr>
+              <a:t>分で簡単に一斉送信できます。</a:t>
+            </a:r>
+            <a:endParaRPr lang="ja-JP" sz="1100"/>
+          </a:p>
+        </p:txBody>
+      </p:sp>
+      <p:sp>
+        <p:nvSpPr>
+          <p:cNvPr id="7" name="テキスト ボックス 6">
+            <a:extLst>
+              <a:ext uri="{FF2B5EF4-FFF2-40B4-BE49-F238E27FC236}">
+                <a16:creationId xmlns:a16="http://schemas.microsoft.com/office/drawing/2014/main" id="{0127FEBF-CF06-8AD3-83F7-5B78C4880B18}"/>
+              </a:ext>
+            </a:extLst>
+          </p:cNvPr>
+          <p:cNvSpPr txBox="1"/>
+          <p:nvPr/>
+        </p:nvSpPr>
+        <p:spPr>
+          <a:xfrm>
+            <a:off x="224763" y="4916447"/>
+            <a:ext cx="9461597" cy="1133002"/>
+          </a:xfrm>
+          <a:prstGeom prst="rect">
+            <a:avLst/>
+          </a:prstGeom>
+          <a:noFill/>
+        </p:spPr>
+        <p:txBody>
+          <a:bodyPr wrap="square" lIns="91440" tIns="45720" rIns="91440" bIns="45720" anchor="t">
+            <a:spAutoFit/>
+          </a:bodyPr>
+          <a:lstStyle/>
+          <a:p>
+            <a:pPr>
+              <a:lnSpc>
+                <a:spcPct val="150000"/>
+              </a:lnSpc>
+            </a:pPr>
+            <a:r>
+              <a:rPr lang="ja-JP" sz="1300">
+                <a:ea typeface="+mn-lt"/>
+                <a:cs typeface="+mn-lt"/>
+              </a:rPr>
+              <a:t>パターン</a:t>
+            </a:r>
+            <a:r>
+              <a:rPr lang="ja-JP" altLang="en-US" sz="1300">
+                <a:ea typeface="+mn-lt"/>
+                <a:cs typeface="+mn-lt"/>
+              </a:rPr>
+              <a:t>②</a:t>
+            </a:r>
+            <a:r>
+              <a:rPr lang="ja-JP" sz="1300">
+                <a:ea typeface="+mn-lt"/>
+                <a:cs typeface="+mn-lt"/>
+              </a:rPr>
+              <a:t>：</a:t>
+            </a:r>
+            <a:r>
+              <a:rPr lang="ja-JP" altLang="en-US" sz="1300">
+                <a:ea typeface="+mn-lt"/>
+                <a:cs typeface="+mn-lt"/>
+              </a:rPr>
+              <a:t>弊社</a:t>
+            </a:r>
+            <a:r>
+              <a:rPr lang="ja-JP" sz="1300">
+                <a:ea typeface="+mn-lt"/>
+                <a:cs typeface="+mn-lt"/>
+              </a:rPr>
+              <a:t>が配るケース </a:t>
+            </a:r>
+            <a:endParaRPr lang="ja-JP"/>
+          </a:p>
+          <a:p>
+            <a:pPr>
+              <a:lnSpc>
+                <a:spcPct val="150000"/>
+              </a:lnSpc>
+            </a:pPr>
+            <a:r>
+              <a:rPr lang="en-US" altLang="ja-JP" sz="1100">
+                <a:ea typeface="+mn-lt"/>
+                <a:cs typeface="+mn-lt"/>
+              </a:rPr>
+              <a:t>【</a:t>
+            </a:r>
+            <a:r>
+              <a:rPr lang="ja-JP" sz="1100">
+                <a:ea typeface="+mn-lt"/>
+                <a:cs typeface="+mn-lt"/>
+              </a:rPr>
+              <a:t>対象</a:t>
+            </a:r>
+            <a:r>
+              <a:rPr lang="en-US" altLang="ja-JP" sz="1100">
+                <a:ea typeface="+mn-lt"/>
+                <a:cs typeface="+mn-lt"/>
+              </a:rPr>
+              <a:t>】</a:t>
+            </a:r>
+            <a:r>
+              <a:rPr lang="ja-JP" sz="1100">
+                <a:ea typeface="+mn-lt"/>
+                <a:cs typeface="+mn-lt"/>
+              </a:rPr>
+              <a:t>あらかじめ予定が決まっている計画的・定期的な配信</a:t>
+            </a:r>
+          </a:p>
+          <a:p>
+            <a:pPr>
+              <a:lnSpc>
+                <a:spcPct val="150000"/>
+              </a:lnSpc>
+            </a:pPr>
+            <a:r>
+              <a:rPr lang="ja-JP" sz="1100">
+                <a:ea typeface="+mn-lt"/>
+                <a:cs typeface="+mn-lt"/>
+              </a:rPr>
+              <a:t>・「毎月〇日の定期配信」や「年末年始・季節のキャ</a:t>
+            </a:r>
+            <a:r>
+              <a:rPr lang="ja-JP" altLang="en-US" sz="1100">
+                <a:ea typeface="+mn-lt"/>
+                <a:cs typeface="+mn-lt"/>
+              </a:rPr>
+              <a:t>ンペーン</a:t>
+            </a:r>
+            <a:r>
+              <a:rPr lang="ja-JP" sz="1100">
+                <a:ea typeface="+mn-lt"/>
+                <a:cs typeface="+mn-lt"/>
+              </a:rPr>
+              <a:t>」</a:t>
+            </a:r>
+            <a:r>
+              <a:rPr lang="ja-JP" altLang="en-US" sz="1100">
+                <a:ea typeface="+mn-lt"/>
+                <a:cs typeface="+mn-lt"/>
+              </a:rPr>
+              <a:t>など、事前にスケジュールが決ま</a:t>
+            </a:r>
+            <a:r>
+              <a:rPr lang="ja-JP" sz="1100">
+                <a:ea typeface="+mn-lt"/>
+                <a:cs typeface="+mn-lt"/>
+              </a:rPr>
+              <a:t>ってい</a:t>
+            </a:r>
+            <a:r>
+              <a:rPr lang="ja-JP" altLang="en-US" sz="1100">
+                <a:ea typeface="+mn-lt"/>
+                <a:cs typeface="+mn-lt"/>
+              </a:rPr>
+              <a:t>るものが対象</a:t>
+            </a:r>
+            <a:r>
+              <a:rPr lang="ja-JP" sz="1100">
+                <a:ea typeface="+mn-lt"/>
+                <a:cs typeface="+mn-lt"/>
+              </a:rPr>
+              <a:t>です。</a:t>
+            </a:r>
+            <a:endParaRPr lang="ja-JP" altLang="en-US" sz="1100"/>
+          </a:p>
+          <a:p>
+            <a:pPr>
+              <a:lnSpc>
+                <a:spcPct val="150000"/>
+              </a:lnSpc>
+            </a:pPr>
+            <a:r>
+              <a:rPr lang="ja-JP" sz="1100">
+                <a:ea typeface="+mn-lt"/>
+                <a:cs typeface="+mn-lt"/>
+              </a:rPr>
+              <a:t>・弊社にてバナー画像やクーポンを作成し、管理画面から日時を指定して予約配信を設定いたします。</a:t>
             </a:r>
           </a:p>
         </p:txBody>
@@ -6018,8 +5972,8 @@
         </p:nvSpPr>
         <p:spPr>
           <a:xfrm>
-            <a:off x="403412" y="512817"/>
-            <a:ext cx="9099176" cy="5232202"/>
+            <a:off x="230147" y="512817"/>
+            <a:ext cx="9415833" cy="492443"/>
           </a:xfrm>
           <a:prstGeom prst="rect">
             <a:avLst/>
@@ -6027,7 +5981,7 @@
           <a:noFill/>
         </p:spPr>
         <p:txBody>
-          <a:bodyPr wrap="square">
+          <a:bodyPr wrap="square" lIns="91440" tIns="45720" rIns="91440" bIns="45720" anchor="t">
             <a:spAutoFit/>
           </a:bodyPr>
           <a:lstStyle>
@@ -6126,549 +6080,207 @@
             </a:lvl9pPr>
           </a:lstStyle>
           <a:p>
-            <a:pPr>
-              <a:lnSpc>
-                <a:spcPct val="150000"/>
-              </a:lnSpc>
-            </a:pPr>
-            <a:r>
-              <a:rPr lang="ja-JP" altLang="en-US" sz="1600" b="0" i="0" u="none" strike="noStrike" baseline="0" dirty="0">
-                <a:solidFill>
-                  <a:srgbClr val="000000"/>
-                </a:solidFill>
-                <a:latin typeface="メイリオ" panose="020B0604030504040204" pitchFamily="50" charset="-128"/>
-                <a:ea typeface="メイリオ" panose="020B0604030504040204" pitchFamily="50" charset="-128"/>
-              </a:rPr>
-              <a:t>■</a:t>
-            </a:r>
-            <a:r>
-              <a:rPr lang="ja-JP" altLang="en-US" sz="1600" dirty="0">
-                <a:solidFill>
-                  <a:srgbClr val="000000"/>
-                </a:solidFill>
-                <a:latin typeface="メイリオ" panose="020B0604030504040204" pitchFamily="50" charset="-128"/>
-                <a:ea typeface="メイリオ" panose="020B0604030504040204" pitchFamily="50" charset="-128"/>
-              </a:rPr>
-              <a:t>診断基準と適合レベル</a:t>
-            </a:r>
-            <a:endParaRPr lang="en-US" altLang="ja-JP" sz="1600" dirty="0">
-              <a:solidFill>
-                <a:srgbClr val="000000"/>
-              </a:solidFill>
-              <a:latin typeface="メイリオ" panose="020B0604030504040204" pitchFamily="50" charset="-128"/>
-              <a:ea typeface="メイリオ" panose="020B0604030504040204" pitchFamily="50" charset="-128"/>
-            </a:endParaRPr>
-          </a:p>
-          <a:p>
-            <a:pPr>
-              <a:lnSpc>
-                <a:spcPct val="150000"/>
-              </a:lnSpc>
-            </a:pPr>
-            <a:r>
-              <a:rPr lang="en-US" altLang="ja-JP" sz="1400" b="0" i="0" u="none" strike="noStrike" baseline="0" dirty="0">
-                <a:solidFill>
-                  <a:srgbClr val="000000"/>
-                </a:solidFill>
-                <a:latin typeface="メイリオ" panose="020B0604030504040204" pitchFamily="50" charset="-128"/>
-                <a:ea typeface="メイリオ" panose="020B0604030504040204" pitchFamily="50" charset="-128"/>
-              </a:rPr>
-              <a:t>WCAG2.2</a:t>
-            </a:r>
-            <a:r>
-              <a:rPr lang="ja-JP" altLang="en-US" sz="1400" dirty="0">
-                <a:solidFill>
-                  <a:srgbClr val="000000"/>
-                </a:solidFill>
-                <a:latin typeface="メイリオ" panose="020B0604030504040204" pitchFamily="50" charset="-128"/>
-                <a:ea typeface="メイリオ" panose="020B0604030504040204" pitchFamily="50" charset="-128"/>
-              </a:rPr>
-              <a:t>　適合レベル</a:t>
-            </a:r>
-            <a:r>
-              <a:rPr lang="en-US" altLang="ja-JP" sz="1400" dirty="0">
-                <a:solidFill>
-                  <a:srgbClr val="000000"/>
-                </a:solidFill>
-                <a:latin typeface="メイリオ" panose="020B0604030504040204" pitchFamily="50" charset="-128"/>
-                <a:ea typeface="メイリオ" panose="020B0604030504040204" pitchFamily="50" charset="-128"/>
-              </a:rPr>
-              <a:t>A</a:t>
-            </a:r>
-            <a:r>
-              <a:rPr lang="ja-JP" altLang="en-US" sz="1400" dirty="0">
-                <a:solidFill>
-                  <a:srgbClr val="000000"/>
-                </a:solidFill>
-                <a:latin typeface="メイリオ" panose="020B0604030504040204" pitchFamily="50" charset="-128"/>
-                <a:ea typeface="メイリオ" panose="020B0604030504040204" pitchFamily="50" charset="-128"/>
-              </a:rPr>
-              <a:t>および</a:t>
-            </a:r>
-            <a:r>
-              <a:rPr lang="en-US" altLang="ja-JP" sz="1400" dirty="0">
-                <a:solidFill>
-                  <a:srgbClr val="000000"/>
-                </a:solidFill>
-                <a:latin typeface="メイリオ" panose="020B0604030504040204" pitchFamily="50" charset="-128"/>
-                <a:ea typeface="メイリオ" panose="020B0604030504040204" pitchFamily="50" charset="-128"/>
-              </a:rPr>
-              <a:t>AA</a:t>
-            </a:r>
-          </a:p>
-          <a:p>
-            <a:pPr>
-              <a:lnSpc>
-                <a:spcPct val="150000"/>
-              </a:lnSpc>
-            </a:pPr>
-            <a:endParaRPr lang="en-US" altLang="ja-JP" sz="1400" b="0" i="0" u="none" strike="noStrike" baseline="0" dirty="0">
-              <a:solidFill>
-                <a:srgbClr val="000000"/>
-              </a:solidFill>
-              <a:latin typeface="メイリオ" panose="020B0604030504040204" pitchFamily="50" charset="-128"/>
-              <a:ea typeface="メイリオ" panose="020B0604030504040204" pitchFamily="50" charset="-128"/>
-            </a:endParaRPr>
-          </a:p>
-          <a:p>
-            <a:pPr>
-              <a:lnSpc>
-                <a:spcPct val="150000"/>
-              </a:lnSpc>
-            </a:pPr>
-            <a:r>
-              <a:rPr lang="ja-JP" altLang="en-US" sz="1600" dirty="0">
-                <a:solidFill>
-                  <a:srgbClr val="000000"/>
-                </a:solidFill>
-                <a:latin typeface="メイリオ" panose="020B0604030504040204" pitchFamily="50" charset="-128"/>
-                <a:ea typeface="メイリオ" panose="020B0604030504040204" pitchFamily="50" charset="-128"/>
-              </a:rPr>
-              <a:t>■満たしている適合レベル</a:t>
-            </a:r>
-            <a:endParaRPr lang="en-US" altLang="ja-JP" sz="1600" dirty="0">
-              <a:solidFill>
-                <a:srgbClr val="000000"/>
-              </a:solidFill>
-              <a:latin typeface="メイリオ" panose="020B0604030504040204" pitchFamily="50" charset="-128"/>
-              <a:ea typeface="メイリオ" panose="020B0604030504040204" pitchFamily="50" charset="-128"/>
-            </a:endParaRPr>
-          </a:p>
-          <a:p>
-            <a:pPr>
-              <a:lnSpc>
-                <a:spcPct val="150000"/>
-              </a:lnSpc>
-            </a:pPr>
-            <a:r>
-              <a:rPr lang="ja-JP" altLang="en-US" sz="1400" b="0" i="0" u="none" strike="noStrike" baseline="0" dirty="0">
-                <a:solidFill>
-                  <a:srgbClr val="000000"/>
-                </a:solidFill>
-                <a:latin typeface="メイリオ" panose="020B0604030504040204" pitchFamily="50" charset="-128"/>
-                <a:ea typeface="メイリオ" panose="020B0604030504040204" pitchFamily="50" charset="-128"/>
-              </a:rPr>
-              <a:t>適合レベル</a:t>
-            </a:r>
-            <a:r>
-              <a:rPr lang="en-US" altLang="ja-JP" sz="1400" b="0" i="0" u="none" strike="noStrike" baseline="0" dirty="0">
-                <a:solidFill>
-                  <a:srgbClr val="000000"/>
-                </a:solidFill>
-                <a:latin typeface="メイリオ" panose="020B0604030504040204" pitchFamily="50" charset="-128"/>
-                <a:ea typeface="メイリオ" panose="020B0604030504040204" pitchFamily="50" charset="-128"/>
-              </a:rPr>
-              <a:t>A</a:t>
-            </a:r>
-            <a:r>
-              <a:rPr lang="ja-JP" altLang="en-US" sz="1400" b="0" i="0" u="none" strike="noStrike" baseline="0" dirty="0">
-                <a:solidFill>
-                  <a:srgbClr val="000000"/>
-                </a:solidFill>
-                <a:latin typeface="メイリオ" panose="020B0604030504040204" pitchFamily="50" charset="-128"/>
-                <a:ea typeface="メイリオ" panose="020B0604030504040204" pitchFamily="50" charset="-128"/>
-              </a:rPr>
-              <a:t>に一部準拠</a:t>
-            </a:r>
-            <a:endParaRPr lang="en-US" altLang="ja-JP" sz="1400" b="0" i="0" u="none" strike="noStrike" baseline="0" dirty="0">
-              <a:solidFill>
-                <a:srgbClr val="000000"/>
-              </a:solidFill>
-              <a:latin typeface="メイリオ" panose="020B0604030504040204" pitchFamily="50" charset="-128"/>
-              <a:ea typeface="メイリオ" panose="020B0604030504040204" pitchFamily="50" charset="-128"/>
-            </a:endParaRPr>
-          </a:p>
-          <a:p>
-            <a:pPr>
-              <a:lnSpc>
-                <a:spcPct val="150000"/>
-              </a:lnSpc>
-            </a:pPr>
-            <a:endParaRPr lang="en-US" altLang="ja-JP" sz="1400" b="0" i="0" u="none" strike="noStrike" baseline="0" dirty="0">
-              <a:solidFill>
-                <a:srgbClr val="000000"/>
-              </a:solidFill>
-              <a:latin typeface="メイリオ" panose="020B0604030504040204" pitchFamily="50" charset="-128"/>
-              <a:ea typeface="メイリオ" panose="020B0604030504040204" pitchFamily="50" charset="-128"/>
-            </a:endParaRPr>
-          </a:p>
-          <a:p>
-            <a:pPr>
-              <a:lnSpc>
-                <a:spcPct val="150000"/>
-              </a:lnSpc>
-            </a:pPr>
-            <a:r>
-              <a:rPr lang="ja-JP" altLang="en-US" sz="1600" dirty="0">
-                <a:solidFill>
-                  <a:srgbClr val="000000"/>
-                </a:solidFill>
-                <a:latin typeface="メイリオ" panose="020B0604030504040204" pitchFamily="50" charset="-128"/>
-                <a:ea typeface="メイリオ" panose="020B0604030504040204" pitchFamily="50" charset="-128"/>
-              </a:rPr>
-              <a:t>■依存したウェブコンテンツ技術のリスト</a:t>
-            </a:r>
-            <a:endParaRPr lang="en-US" altLang="ja-JP" sz="1600" b="0" i="0" u="none" strike="noStrike" baseline="0" dirty="0">
-              <a:solidFill>
-                <a:srgbClr val="000000"/>
-              </a:solidFill>
-              <a:latin typeface="メイリオ" panose="020B0604030504040204" pitchFamily="50" charset="-128"/>
-              <a:ea typeface="メイリオ" panose="020B0604030504040204" pitchFamily="50" charset="-128"/>
-            </a:endParaRPr>
-          </a:p>
-          <a:p>
-            <a:pPr>
-              <a:lnSpc>
-                <a:spcPct val="150000"/>
-              </a:lnSpc>
-            </a:pPr>
-            <a:r>
-              <a:rPr lang="en-US" altLang="ja-JP" sz="1400" dirty="0"/>
-              <a:t>HTML5</a:t>
-            </a:r>
-            <a:r>
-              <a:rPr lang="ja-JP" altLang="en-US" sz="1400" dirty="0"/>
-              <a:t>、</a:t>
-            </a:r>
-            <a:r>
-              <a:rPr lang="en-US" altLang="ja-JP" sz="1400" dirty="0"/>
-              <a:t>CSS3</a:t>
-            </a:r>
-            <a:r>
-              <a:rPr lang="ja-JP" altLang="en-US" sz="1400" dirty="0"/>
-              <a:t>、</a:t>
-            </a:r>
-            <a:r>
-              <a:rPr lang="en-US" altLang="ja-JP" sz="1400" dirty="0"/>
-              <a:t>JavaScript</a:t>
-            </a:r>
-          </a:p>
-          <a:p>
-            <a:pPr>
-              <a:lnSpc>
-                <a:spcPct val="150000"/>
-              </a:lnSpc>
-            </a:pPr>
-            <a:endParaRPr lang="en-US" altLang="ja-JP" sz="1400" b="0" i="0" u="none" strike="noStrike" baseline="0" dirty="0">
-              <a:solidFill>
-                <a:srgbClr val="000000"/>
-              </a:solidFill>
-              <a:latin typeface="メイリオ" panose="020B0604030504040204" pitchFamily="50" charset="-128"/>
-              <a:ea typeface="メイリオ" panose="020B0604030504040204" pitchFamily="50" charset="-128"/>
-            </a:endParaRPr>
-          </a:p>
-          <a:p>
-            <a:pPr>
-              <a:lnSpc>
-                <a:spcPct val="150000"/>
-              </a:lnSpc>
-            </a:pPr>
-            <a:r>
-              <a:rPr lang="ja-JP" altLang="en-US" sz="1600" b="0" i="0" u="none" strike="noStrike" baseline="0" dirty="0">
-                <a:solidFill>
-                  <a:srgbClr val="000000"/>
-                </a:solidFill>
-                <a:latin typeface="メイリオ" panose="020B0604030504040204" pitchFamily="50" charset="-128"/>
-                <a:ea typeface="メイリオ" panose="020B0604030504040204" pitchFamily="50" charset="-128"/>
-              </a:rPr>
-              <a:t>■</a:t>
-            </a:r>
-            <a:r>
-              <a:rPr lang="ja-JP" altLang="en-US" sz="1600" dirty="0"/>
-              <a:t>試験対象のウェブページを選択した方法</a:t>
-            </a:r>
-            <a:endParaRPr lang="en-US" altLang="ja-JP" sz="1600" dirty="0"/>
-          </a:p>
-          <a:p>
-            <a:pPr>
-              <a:lnSpc>
-                <a:spcPct val="150000"/>
-              </a:lnSpc>
-            </a:pPr>
-            <a:r>
-              <a:rPr kumimoji="1" lang="ja-JP" altLang="en-US" sz="1400" dirty="0">
+            <a:r>
+              <a:rPr lang="ja-JP" sz="1300">
                 <a:solidFill>
                   <a:sysClr val="windowText" lastClr="000000"/>
                 </a:solidFill>
-                <a:latin typeface="メイリオ" panose="020B0604030504040204" pitchFamily="50" charset="-128"/>
-                <a:ea typeface="メイリオ" panose="020B0604030504040204" pitchFamily="50" charset="-128"/>
-              </a:rPr>
-              <a:t>岩内町移住情報サイト　</a:t>
-            </a:r>
-            <a:r>
-              <a:rPr kumimoji="1" lang="en-US" altLang="ja-JP" sz="1400" dirty="0">
+                <a:ea typeface="+mn-lt"/>
+                <a:cs typeface="+mn-lt"/>
+              </a:rPr>
+              <a:t>L</a:t>
+            </a:r>
+            <a:r>
+              <a:rPr kumimoji="1" lang="en-US" altLang="ja-JP" sz="1300">
                 <a:solidFill>
                   <a:sysClr val="windowText" lastClr="000000"/>
                 </a:solidFill>
-                <a:latin typeface="メイリオ" panose="020B0604030504040204" pitchFamily="50" charset="-128"/>
-                <a:ea typeface="メイリオ" panose="020B0604030504040204" pitchFamily="50" charset="-128"/>
-              </a:rPr>
-              <a:t>IWANAILIFE</a:t>
-            </a:r>
-            <a:r>
-              <a:rPr kumimoji="1" lang="ja-JP" altLang="en-US" sz="1400" dirty="0">
+                <a:ea typeface="+mn-lt"/>
+                <a:cs typeface="+mn-lt"/>
+              </a:rPr>
+              <a:t>INE</a:t>
+            </a:r>
+            <a:r>
+              <a:rPr kumimoji="1" lang="ja-JP" sz="1300">
                 <a:solidFill>
                   <a:sysClr val="windowText" lastClr="000000"/>
                 </a:solidFill>
-                <a:latin typeface="メイリオ" panose="020B0604030504040204" pitchFamily="50" charset="-128"/>
-                <a:ea typeface="メイリオ" panose="020B0604030504040204" pitchFamily="50" charset="-128"/>
-              </a:rPr>
-              <a:t>　</a:t>
-            </a:r>
-            <a:r>
-              <a:rPr kumimoji="1" lang="en-US" altLang="ja-JP" sz="1400" dirty="0">
+                <a:ea typeface="+mn-lt"/>
+                <a:cs typeface="+mn-lt"/>
+              </a:rPr>
+              <a:t>スタンプカードを導入</a:t>
+            </a:r>
+            <a:r>
+              <a:rPr lang="ja-JP" altLang="en-US" sz="1300">
                 <a:solidFill>
                   <a:sysClr val="windowText" lastClr="000000"/>
                 </a:solidFill>
-                <a:latin typeface="メイリオ" panose="020B0604030504040204" pitchFamily="50" charset="-128"/>
-                <a:ea typeface="メイリオ" panose="020B0604030504040204" pitchFamily="50" charset="-128"/>
-                <a:hlinkClick r:id="rId2"/>
-              </a:rPr>
-              <a:t>https://iwanai-iju.jp/</a:t>
-            </a:r>
-            <a:r>
-              <a:rPr kumimoji="1" lang="ja-JP" altLang="en-US" sz="1400" dirty="0">
+                <a:ea typeface="+mn-lt"/>
+                <a:cs typeface="+mn-lt"/>
+              </a:rPr>
+              <a:t>する場合、</a:t>
+            </a:r>
+            <a:r>
+              <a:rPr lang="ja-JP" sz="1300">
                 <a:solidFill>
                   <a:sysClr val="windowText" lastClr="000000"/>
                 </a:solidFill>
-                <a:latin typeface="メイリオ" panose="020B0604030504040204" pitchFamily="50" charset="-128"/>
-                <a:ea typeface="メイリオ" panose="020B0604030504040204" pitchFamily="50" charset="-128"/>
-              </a:rPr>
-              <a:t> の全ページ</a:t>
-            </a:r>
-            <a:endParaRPr kumimoji="1" lang="en-US" altLang="ja-JP" sz="1400" dirty="0">
-              <a:solidFill>
-                <a:sysClr val="windowText" lastClr="000000"/>
-              </a:solidFill>
-              <a:latin typeface="メイリオ" panose="020B0604030504040204" pitchFamily="50" charset="-128"/>
-              <a:ea typeface="メイリオ" panose="020B0604030504040204" pitchFamily="50" charset="-128"/>
-            </a:endParaRPr>
-          </a:p>
-          <a:p>
-            <a:pPr>
-              <a:lnSpc>
-                <a:spcPct val="150000"/>
-              </a:lnSpc>
-            </a:pPr>
-            <a:r>
-              <a:rPr kumimoji="1" lang="en-US" altLang="ja-JP" sz="1400" dirty="0">
+                <a:ea typeface="+mn-lt"/>
+                <a:cs typeface="+mn-lt"/>
+              </a:rPr>
+              <a:t>「ポイント付与用のQRコード」</a:t>
+            </a:r>
+            <a:r>
+              <a:rPr lang="ja-JP" altLang="en-US" sz="1300">
                 <a:solidFill>
                   <a:sysClr val="windowText" lastClr="000000"/>
                 </a:solidFill>
-                <a:latin typeface="メイリオ" panose="020B0604030504040204" pitchFamily="50" charset="-128"/>
-                <a:ea typeface="メイリオ" panose="020B0604030504040204" pitchFamily="50" charset="-128"/>
-              </a:rPr>
-              <a:t>※</a:t>
-            </a:r>
-            <a:r>
-              <a:rPr kumimoji="1" lang="ja-JP" altLang="en-US" sz="1400" dirty="0">
+                <a:ea typeface="+mn-lt"/>
+                <a:cs typeface="+mn-lt"/>
+              </a:rPr>
+              <a:t>も</a:t>
+            </a:r>
+            <a:r>
+              <a:rPr lang="ja-JP" sz="1300">
                 <a:solidFill>
                   <a:sysClr val="windowText" lastClr="000000"/>
                 </a:solidFill>
-                <a:latin typeface="メイリオ" panose="020B0604030504040204" pitchFamily="50" charset="-128"/>
-                <a:ea typeface="メイリオ" panose="020B0604030504040204" pitchFamily="50" charset="-128"/>
-              </a:rPr>
-              <a:t>試験を実施したページは次ページに記載</a:t>
-            </a:r>
-            <a:endParaRPr kumimoji="1" lang="en-US" altLang="ja-JP" sz="1400" dirty="0">
-              <a:solidFill>
-                <a:sysClr val="windowText" lastClr="000000"/>
-              </a:solidFill>
-              <a:latin typeface="メイリオ" panose="020B0604030504040204" pitchFamily="50" charset="-128"/>
-              <a:ea typeface="メイリオ" panose="020B0604030504040204" pitchFamily="50" charset="-128"/>
-            </a:endParaRPr>
-          </a:p>
-          <a:p>
-            <a:pPr>
-              <a:lnSpc>
-                <a:spcPct val="150000"/>
-              </a:lnSpc>
-            </a:pPr>
-            <a:endParaRPr kumimoji="1" lang="en-US" altLang="ja-JP" sz="1400" dirty="0">
-              <a:solidFill>
-                <a:sysClr val="windowText" lastClr="000000"/>
-              </a:solidFill>
-              <a:latin typeface="メイリオ" panose="020B0604030504040204" pitchFamily="50" charset="-128"/>
-              <a:ea typeface="メイリオ" panose="020B0604030504040204" pitchFamily="50" charset="-128"/>
-            </a:endParaRPr>
-          </a:p>
-          <a:p>
-            <a:pPr>
-              <a:lnSpc>
-                <a:spcPct val="150000"/>
-              </a:lnSpc>
-            </a:pPr>
-            <a:r>
-              <a:rPr kumimoji="1" lang="ja-JP" altLang="en-US" sz="1600" dirty="0">
+                <a:ea typeface="+mn-lt"/>
+                <a:cs typeface="+mn-lt"/>
+              </a:rPr>
+              <a:t>必要になります</a:t>
+            </a:r>
+            <a:r>
+              <a:rPr lang="ja-JP" altLang="en-US" sz="1300">
                 <a:solidFill>
                   <a:sysClr val="windowText" lastClr="000000"/>
                 </a:solidFill>
-                <a:latin typeface="メイリオ" panose="020B0604030504040204" pitchFamily="50" charset="-128"/>
-                <a:ea typeface="メイリオ" panose="020B0604030504040204" pitchFamily="50" charset="-128"/>
-              </a:rPr>
-              <a:t>■試験実施期間</a:t>
-            </a:r>
-            <a:endParaRPr kumimoji="1" lang="en-US" altLang="ja-JP" sz="1600" dirty="0">
-              <a:solidFill>
-                <a:sysClr val="windowText" lastClr="000000"/>
-              </a:solidFill>
-              <a:latin typeface="メイリオ" panose="020B0604030504040204" pitchFamily="50" charset="-128"/>
-              <a:ea typeface="メイリオ" panose="020B0604030504040204" pitchFamily="50" charset="-128"/>
-            </a:endParaRPr>
-          </a:p>
-          <a:p>
-            <a:pPr>
-              <a:lnSpc>
-                <a:spcPct val="150000"/>
-              </a:lnSpc>
-            </a:pPr>
-            <a:r>
-              <a:rPr kumimoji="1" lang="en-US" altLang="ja-JP" sz="1400" dirty="0">
+                <a:ea typeface="+mn-lt"/>
+                <a:cs typeface="+mn-lt"/>
+              </a:rPr>
+              <a:t>。</a:t>
+            </a:r>
+            <a:r>
+              <a:rPr lang="en-US" altLang="ja-JP" sz="1300">
                 <a:solidFill>
                   <a:sysClr val="windowText" lastClr="000000"/>
                 </a:solidFill>
-                <a:latin typeface="メイリオ" panose="020B0604030504040204" pitchFamily="50" charset="-128"/>
-                <a:ea typeface="メイリオ" panose="020B0604030504040204" pitchFamily="50" charset="-128"/>
-              </a:rPr>
-              <a:t>2025</a:t>
-            </a:r>
-            <a:r>
-              <a:rPr kumimoji="1" lang="ja-JP" altLang="en-US" sz="1400" dirty="0">
+                <a:ea typeface="+mn-lt"/>
+                <a:cs typeface="+mn-lt"/>
+              </a:rPr>
+              <a:t>QR</a:t>
+            </a:r>
+            <a:r>
+              <a:rPr lang="ja-JP" altLang="en-US" sz="1300">
                 <a:solidFill>
                   <a:sysClr val="windowText" lastClr="000000"/>
                 </a:solidFill>
-                <a:latin typeface="メイリオ" panose="020B0604030504040204" pitchFamily="50" charset="-128"/>
-                <a:ea typeface="メイリオ" panose="020B0604030504040204" pitchFamily="50" charset="-128"/>
-              </a:rPr>
-              <a:t>年</a:t>
-            </a:r>
-            <a:r>
-              <a:rPr kumimoji="1" lang="en-US" altLang="ja-JP" sz="1400" dirty="0">
+                <a:ea typeface="+mn-lt"/>
+                <a:cs typeface="+mn-lt"/>
+              </a:rPr>
+              <a:t>コード</a:t>
+            </a:r>
+            <a:r>
+              <a:rPr lang="ja-JP" sz="1300">
                 <a:solidFill>
                   <a:sysClr val="windowText" lastClr="000000"/>
                 </a:solidFill>
-                <a:latin typeface="メイリオ" panose="020B0604030504040204" pitchFamily="50" charset="-128"/>
-                <a:ea typeface="メイリオ" panose="020B0604030504040204" pitchFamily="50" charset="-128"/>
-              </a:rPr>
-              <a:t>3</a:t>
-            </a:r>
-            <a:r>
-              <a:rPr kumimoji="1" lang="ja-JP" altLang="en-US" sz="1400" dirty="0">
+                <a:ea typeface="+mn-lt"/>
+                <a:cs typeface="+mn-lt"/>
+              </a:rPr>
+              <a:t>の</a:t>
+            </a:r>
+            <a:r>
+              <a:rPr lang="ja-JP" altLang="en-US" sz="1300">
                 <a:solidFill>
                   <a:sysClr val="windowText" lastClr="000000"/>
                 </a:solidFill>
-                <a:latin typeface="メイリオ" panose="020B0604030504040204" pitchFamily="50" charset="-128"/>
-                <a:ea typeface="メイリオ" panose="020B0604030504040204" pitchFamily="50" charset="-128"/>
-              </a:rPr>
-              <a:t>月</a:t>
-            </a:r>
-            <a:r>
-              <a:rPr kumimoji="1" lang="en-US" altLang="ja-JP" sz="1400" dirty="0">
+                <a:ea typeface="+mn-lt"/>
+                <a:cs typeface="+mn-lt"/>
+              </a:rPr>
+              <a:t>保管・提示方法として、</a:t>
+            </a:r>
+            <a:r>
+              <a:rPr lang="ja-JP" sz="1300">
                 <a:solidFill>
                   <a:sysClr val="windowText" lastClr="000000"/>
                 </a:solidFill>
-                <a:latin typeface="メイリオ" panose="020B0604030504040204" pitchFamily="50" charset="-128"/>
-                <a:ea typeface="メイリオ" panose="020B0604030504040204" pitchFamily="50" charset="-128"/>
-              </a:rPr>
-              <a:t>28</a:t>
-            </a:r>
-            <a:r>
-              <a:rPr kumimoji="1" lang="ja-JP" altLang="en-US" sz="1400" dirty="0">
+                <a:ea typeface="+mn-lt"/>
+                <a:cs typeface="+mn-lt"/>
+              </a:rPr>
+              <a:t>以下</a:t>
+            </a:r>
+            <a:r>
+              <a:rPr kumimoji="1" lang="ja-JP" sz="1300">
                 <a:solidFill>
                   <a:sysClr val="windowText" lastClr="000000"/>
                 </a:solidFill>
-                <a:latin typeface="メイリオ" panose="020B0604030504040204" pitchFamily="50" charset="-128"/>
-                <a:ea typeface="メイリオ" panose="020B0604030504040204" pitchFamily="50" charset="-128"/>
-              </a:rPr>
-              <a:t>日～</a:t>
-            </a:r>
-            <a:r>
-              <a:rPr kumimoji="1" lang="en-US" altLang="ja-JP" sz="1400" dirty="0">
+                <a:ea typeface="+mn-lt"/>
+                <a:cs typeface="+mn-lt"/>
+              </a:rPr>
+              <a:t>の</a:t>
+            </a:r>
+            <a:r>
+              <a:rPr kumimoji="1" lang="ja-JP" altLang="en-US" sz="1300">
                 <a:solidFill>
                   <a:sysClr val="windowText" lastClr="000000"/>
                 </a:solidFill>
-                <a:latin typeface="メイリオ" panose="020B0604030504040204" pitchFamily="50" charset="-128"/>
-                <a:ea typeface="メイリオ" panose="020B0604030504040204" pitchFamily="50" charset="-128"/>
-              </a:rPr>
-              <a:t> 2025</a:t>
-            </a:r>
-            <a:r>
-              <a:rPr kumimoji="1" lang="ja-JP" altLang="en-US" sz="1400" dirty="0">
+                <a:ea typeface="+mn-lt"/>
+                <a:cs typeface="+mn-lt"/>
+              </a:rPr>
+              <a:t>ような形は</a:t>
+            </a:r>
+            <a:r>
+              <a:rPr kumimoji="1" lang="ja-JP" sz="1300">
                 <a:solidFill>
                   <a:sysClr val="windowText" lastClr="000000"/>
                 </a:solidFill>
-                <a:latin typeface="メイリオ" panose="020B0604030504040204" pitchFamily="50" charset="-128"/>
-                <a:ea typeface="メイリオ" panose="020B0604030504040204" pitchFamily="50" charset="-128"/>
-              </a:rPr>
-              <a:t>年</a:t>
-            </a:r>
-            <a:r>
-              <a:rPr kumimoji="1" lang="en-US" altLang="ja-JP" sz="1400" dirty="0">
+                <a:ea typeface="+mn-lt"/>
+                <a:cs typeface="+mn-lt"/>
+              </a:rPr>
+              <a:t>い</a:t>
+            </a:r>
+            <a:r>
+              <a:rPr kumimoji="1" lang="ja-JP" altLang="en-US" sz="1300">
                 <a:solidFill>
                   <a:sysClr val="windowText" lastClr="000000"/>
                 </a:solidFill>
-                <a:latin typeface="メイリオ" panose="020B0604030504040204" pitchFamily="50" charset="-128"/>
-                <a:ea typeface="メイリオ" panose="020B0604030504040204" pitchFamily="50" charset="-128"/>
-              </a:rPr>
-              <a:t>3</a:t>
-            </a:r>
-            <a:r>
-              <a:rPr kumimoji="1" lang="ja-JP" altLang="en-US" sz="1400" dirty="0">
+                <a:ea typeface="+mn-lt"/>
+                <a:cs typeface="+mn-lt"/>
+              </a:rPr>
+              <a:t>かがで</a:t>
+            </a:r>
+            <a:r>
+              <a:rPr kumimoji="1" lang="ja-JP" sz="1300">
                 <a:solidFill>
                   <a:sysClr val="windowText" lastClr="000000"/>
                 </a:solidFill>
-                <a:latin typeface="メイリオ" panose="020B0604030504040204" pitchFamily="50" charset="-128"/>
-                <a:ea typeface="メイリオ" panose="020B0604030504040204" pitchFamily="50" charset="-128"/>
-              </a:rPr>
-              <a:t>月</a:t>
-            </a:r>
-            <a:r>
-              <a:rPr kumimoji="1" lang="en-US" altLang="ja-JP" sz="1400" dirty="0">
+                <a:ea typeface="+mn-lt"/>
+                <a:cs typeface="+mn-lt"/>
+              </a:rPr>
+              <a:t>し</a:t>
+            </a:r>
+            <a:r>
+              <a:rPr kumimoji="1" lang="ja-JP" altLang="en-US" sz="1300">
                 <a:solidFill>
                   <a:sysClr val="windowText" lastClr="000000"/>
                 </a:solidFill>
-                <a:latin typeface="メイリオ" panose="020B0604030504040204" pitchFamily="50" charset="-128"/>
-                <a:ea typeface="メイリオ" panose="020B0604030504040204" pitchFamily="50" charset="-128"/>
-              </a:rPr>
-              <a:t>31</a:t>
-            </a:r>
-            <a:r>
-              <a:rPr kumimoji="1" lang="ja-JP" altLang="en-US" sz="1400" dirty="0">
+                <a:ea typeface="+mn-lt"/>
+                <a:cs typeface="+mn-lt"/>
+              </a:rPr>
+              <a:t>ょう</a:t>
+            </a:r>
+            <a:r>
+              <a:rPr kumimoji="1" lang="ja-JP" sz="1300">
                 <a:solidFill>
                   <a:sysClr val="windowText" lastClr="000000"/>
                 </a:solidFill>
-                <a:latin typeface="メイリオ" panose="020B0604030504040204" pitchFamily="50" charset="-128"/>
-                <a:ea typeface="メイリオ" panose="020B0604030504040204" pitchFamily="50" charset="-128"/>
-              </a:rPr>
-              <a:t>日</a:t>
-            </a:r>
-            <a:endParaRPr kumimoji="1" lang="en-US" altLang="ja-JP" sz="1400" dirty="0">
-              <a:solidFill>
-                <a:sysClr val="windowText" lastClr="000000"/>
-              </a:solidFill>
-              <a:latin typeface="メイリオ" panose="020B0604030504040204" pitchFamily="50" charset="-128"/>
-              <a:ea typeface="メイリオ" panose="020B0604030504040204" pitchFamily="50" charset="-128"/>
-            </a:endParaRPr>
+                <a:ea typeface="+mn-lt"/>
+                <a:cs typeface="+mn-lt"/>
+              </a:rPr>
+              <a:t>か？</a:t>
+            </a:r>
+            <a:endParaRPr lang="ja-JP" altLang="en-US"/>
           </a:p>
         </p:txBody>
       </p:sp>
@@ -6687,7 +6299,7 @@
         <p:spPr>
           <a:xfrm>
             <a:off x="227573" y="44659"/>
-            <a:ext cx="2582758" cy="307777"/>
+            <a:ext cx="5415265" cy="307777"/>
           </a:xfrm>
           <a:prstGeom prst="rect">
             <a:avLst/>
@@ -6695,20 +6307,1325 @@
           <a:noFill/>
         </p:spPr>
         <p:txBody>
-          <a:bodyPr wrap="none" rtlCol="0">
+          <a:bodyPr wrap="none" lIns="91440" tIns="45720" rIns="91440" bIns="45720" rtlCol="0" anchor="t">
             <a:spAutoFit/>
           </a:bodyPr>
           <a:lstStyle/>
           <a:p>
             <a:r>
               <a:rPr kumimoji="1" lang="en-US" altLang="ja-JP" sz="1400" b="1" dirty="0"/>
-              <a:t>1. </a:t>
-            </a:r>
-            <a:r>
-              <a:rPr kumimoji="1" lang="ja-JP" altLang="en-US" sz="1400" b="1" dirty="0"/>
-              <a:t>アクセシビリティ診断結果</a:t>
-            </a:r>
-            <a:endParaRPr kumimoji="1" lang="en-US" altLang="ja-JP" sz="1400" b="1" dirty="0"/>
+              <a:t>3. </a:t>
+            </a:r>
+            <a:r>
+              <a:rPr kumimoji="1" lang="ja-JP" altLang="en-US" sz="1400" b="1" dirty="0" err="1">
+                <a:ea typeface="+mn-lt"/>
+                <a:cs typeface="+mn-lt"/>
+              </a:rPr>
+              <a:t>店舗オペレーション（ポイント付与</a:t>
+            </a:r>
+            <a:r>
+              <a:rPr kumimoji="1" lang="en-US" sz="1400" b="1" dirty="0" err="1">
+                <a:ea typeface="+mn-lt"/>
+                <a:cs typeface="+mn-lt"/>
+              </a:rPr>
+              <a:t>QR</a:t>
+            </a:r>
+            <a:r>
+              <a:rPr kumimoji="1" lang="ja-JP" altLang="en-US" sz="1400" b="1" dirty="0" err="1">
+                <a:ea typeface="+mn-lt"/>
+                <a:cs typeface="+mn-lt"/>
+              </a:rPr>
+              <a:t>の管理方法）のご提案</a:t>
+            </a:r>
+            <a:r>
+              <a:rPr kumimoji="1" lang="en-US" sz="1400" b="1" dirty="0">
+                <a:ea typeface="+mn-lt"/>
+                <a:cs typeface="+mn-lt"/>
+              </a:rPr>
+              <a:t> </a:t>
+            </a:r>
+            <a:endParaRPr lang="en-US" sz="1400" b="1" dirty="0">
+              <a:ea typeface="+mn-lt"/>
+              <a:cs typeface="+mn-lt"/>
+            </a:endParaRPr>
+          </a:p>
+        </p:txBody>
+      </p:sp>
+      <p:sp>
+        <p:nvSpPr>
+          <p:cNvPr id="5" name="Rounded Rectangle 13">
+            <a:extLst>
+              <a:ext uri="{FF2B5EF4-FFF2-40B4-BE49-F238E27FC236}">
+                <a16:creationId xmlns:a16="http://schemas.microsoft.com/office/drawing/2014/main" id="{3C9E6AFA-B3D3-B838-8418-C0BF91D48AF1}"/>
+              </a:ext>
+            </a:extLst>
+          </p:cNvPr>
+          <p:cNvSpPr/>
+          <p:nvPr/>
+        </p:nvSpPr>
+        <p:spPr>
+          <a:xfrm>
+            <a:off x="5122879" y="1325236"/>
+            <a:ext cx="4222443" cy="1505792"/>
+          </a:xfrm>
+          <a:prstGeom prst="roundRect">
+            <a:avLst/>
+          </a:prstGeom>
+          <a:solidFill>
+            <a:schemeClr val="bg1">
+              <a:lumMod val="95000"/>
+            </a:schemeClr>
+          </a:solidFill>
+          <a:ln w="12700">
+            <a:solidFill>
+              <a:schemeClr val="tx1"/>
+            </a:solidFill>
+          </a:ln>
+        </p:spPr>
+        <p:style>
+          <a:lnRef idx="1">
+            <a:schemeClr val="accent1"/>
+          </a:lnRef>
+          <a:fillRef idx="3">
+            <a:schemeClr val="accent1"/>
+          </a:fillRef>
+          <a:effectRef idx="2">
+            <a:schemeClr val="accent1"/>
+          </a:effectRef>
+          <a:fontRef idx="minor">
+            <a:schemeClr val="lt1"/>
+          </a:fontRef>
+        </p:style>
+        <p:txBody>
+          <a:bodyPr rtlCol="0" anchor="ctr"/>
+          <a:lstStyle/>
+          <a:p>
+            <a:pPr algn="ctr"/>
+            <a:endParaRPr/>
+          </a:p>
+        </p:txBody>
+      </p:sp>
+      <p:sp>
+        <p:nvSpPr>
+          <p:cNvPr id="7" name="テキスト ボックス 6">
+            <a:extLst>
+              <a:ext uri="{FF2B5EF4-FFF2-40B4-BE49-F238E27FC236}">
+                <a16:creationId xmlns:a16="http://schemas.microsoft.com/office/drawing/2014/main" id="{AC9C06AE-7375-5080-9B5C-BB2CF3EF6AC3}"/>
+              </a:ext>
+            </a:extLst>
+          </p:cNvPr>
+          <p:cNvSpPr txBox="1"/>
+          <p:nvPr/>
+        </p:nvSpPr>
+        <p:spPr>
+          <a:xfrm>
+            <a:off x="5379207" y="1455723"/>
+            <a:ext cx="3769534" cy="1019510"/>
+          </a:xfrm>
+          <a:prstGeom prst="rect">
+            <a:avLst/>
+          </a:prstGeom>
+          <a:noFill/>
+        </p:spPr>
+        <p:txBody>
+          <a:bodyPr wrap="square" lIns="91440" tIns="45720" rIns="91440" bIns="45720" rtlCol="0" anchor="t">
+            <a:spAutoFit/>
+          </a:bodyPr>
+          <a:lstStyle/>
+          <a:p>
+            <a:pPr>
+              <a:lnSpc>
+                <a:spcPct val="150000"/>
+              </a:lnSpc>
+            </a:pPr>
+            <a:r>
+              <a:rPr lang="ja-JP" altLang="en-US" sz="1100" b="1">
+                <a:ea typeface="+mn-lt"/>
+                <a:cs typeface="+mn-lt"/>
+              </a:rPr>
+              <a:t>懸念リスク</a:t>
+            </a:r>
+            <a:r>
+              <a:rPr lang="ja-JP" sz="1100" b="1">
+                <a:ea typeface="+mn-lt"/>
+                <a:cs typeface="+mn-lt"/>
+              </a:rPr>
+              <a:t>②</a:t>
+            </a:r>
+            <a:r>
+              <a:rPr lang="ja-JP" altLang="en-US" sz="1100" b="1">
+                <a:ea typeface="+mn-lt"/>
+                <a:cs typeface="+mn-lt"/>
+              </a:rPr>
+              <a:t>：</a:t>
+            </a:r>
+            <a:r>
+              <a:rPr lang="en-US" altLang="ja-JP" sz="1100" b="1">
+                <a:ea typeface="+mn-lt"/>
+                <a:cs typeface="+mn-lt"/>
+              </a:rPr>
+              <a:t>1</a:t>
+            </a:r>
+            <a:r>
+              <a:rPr lang="ja-JP" sz="1100" b="1">
+                <a:ea typeface="+mn-lt"/>
+                <a:cs typeface="+mn-lt"/>
+              </a:rPr>
+              <a:t>枚の紙に一覧で並べた場合</a:t>
+            </a:r>
+            <a:endParaRPr lang="ja-JP" b="1"/>
+          </a:p>
+          <a:p>
+            <a:pPr>
+              <a:lnSpc>
+                <a:spcPct val="150000"/>
+              </a:lnSpc>
+            </a:pPr>
+            <a:r>
+              <a:rPr lang="en-US" altLang="ja-JP" sz="1000">
+                <a:ea typeface="+mn-lt"/>
+                <a:cs typeface="+mn-lt"/>
+              </a:rPr>
+              <a:t>1pt、2pt、3pt...</a:t>
+            </a:r>
+            <a:r>
+              <a:rPr lang="ja-JP" altLang="en-US" sz="1000">
+                <a:ea typeface="+mn-lt"/>
+                <a:cs typeface="+mn-lt"/>
+              </a:rPr>
+              <a:t>と複数の</a:t>
+            </a:r>
+            <a:r>
+              <a:rPr lang="en-US" altLang="ja-JP" sz="1000">
+                <a:ea typeface="+mn-lt"/>
+                <a:cs typeface="+mn-lt"/>
+              </a:rPr>
+              <a:t>QR</a:t>
+            </a:r>
+            <a:r>
+              <a:rPr lang="ja-JP" altLang="en-US" sz="1000">
+                <a:ea typeface="+mn-lt"/>
+                <a:cs typeface="+mn-lt"/>
+              </a:rPr>
+              <a:t>コードを</a:t>
+            </a:r>
+            <a:r>
+              <a:rPr lang="en-US" altLang="ja-JP" sz="1000">
+                <a:ea typeface="+mn-lt"/>
+                <a:cs typeface="+mn-lt"/>
+              </a:rPr>
+              <a:t>1</a:t>
+            </a:r>
+            <a:r>
+              <a:rPr lang="ja-JP" altLang="en-US" sz="1000">
+                <a:ea typeface="+mn-lt"/>
+                <a:cs typeface="+mn-lt"/>
+              </a:rPr>
+              <a:t>枚のシートに並べて提示すると、スマートフォンのカ</a:t>
+            </a:r>
+            <a:r>
+              <a:rPr lang="ja-JP" sz="1000">
+                <a:ea typeface="+mn-lt"/>
+                <a:cs typeface="+mn-lt"/>
+              </a:rPr>
+              <a:t>メラが隣のポイン</a:t>
+            </a:r>
+            <a:r>
+              <a:rPr lang="ja-JP" altLang="en-US" sz="1000">
+                <a:ea typeface="+mn-lt"/>
+                <a:cs typeface="+mn-lt"/>
+              </a:rPr>
+              <a:t>ト数</a:t>
+            </a:r>
+            <a:r>
+              <a:rPr lang="ja-JP" sz="1000">
+                <a:ea typeface="+mn-lt"/>
+                <a:cs typeface="+mn-lt"/>
+              </a:rPr>
+              <a:t>の</a:t>
+            </a:r>
+            <a:r>
+              <a:rPr lang="en-US" altLang="ja-JP" sz="1000">
+                <a:ea typeface="+mn-lt"/>
+                <a:cs typeface="+mn-lt"/>
+              </a:rPr>
+              <a:t>QR</a:t>
+            </a:r>
+            <a:r>
+              <a:rPr lang="ja-JP" sz="1000">
+                <a:ea typeface="+mn-lt"/>
+                <a:cs typeface="+mn-lt"/>
+              </a:rPr>
+              <a:t>コードを</a:t>
+            </a:r>
+            <a:r>
+              <a:rPr lang="ja-JP" altLang="en-US" sz="1000">
+                <a:ea typeface="+mn-lt"/>
+                <a:cs typeface="+mn-lt"/>
+              </a:rPr>
+              <a:t>誤って読み</a:t>
+            </a:r>
+            <a:r>
+              <a:rPr lang="ja-JP" sz="1000">
+                <a:ea typeface="+mn-lt"/>
+                <a:cs typeface="+mn-lt"/>
+              </a:rPr>
+              <a:t>込んでしまう可能性</a:t>
+            </a:r>
+            <a:r>
+              <a:rPr lang="ja-JP" altLang="en-US" sz="1000">
+                <a:ea typeface="+mn-lt"/>
+                <a:cs typeface="+mn-lt"/>
+              </a:rPr>
+              <a:t>が高</a:t>
+            </a:r>
+            <a:r>
+              <a:rPr lang="ja-JP" sz="1000">
+                <a:ea typeface="+mn-lt"/>
+                <a:cs typeface="+mn-lt"/>
+              </a:rPr>
+              <a:t>く</a:t>
+            </a:r>
+            <a:r>
+              <a:rPr lang="ja-JP" altLang="en-US" sz="1000">
+                <a:ea typeface="+mn-lt"/>
+                <a:cs typeface="+mn-lt"/>
+              </a:rPr>
+              <a:t>な</a:t>
+            </a:r>
+            <a:r>
+              <a:rPr lang="ja-JP" sz="1000">
+                <a:ea typeface="+mn-lt"/>
+                <a:cs typeface="+mn-lt"/>
+              </a:rPr>
+              <a:t>ります。</a:t>
+            </a:r>
+            <a:r>
+              <a:rPr lang="ja-JP" altLang="en-US" sz="1000" dirty="0">
+                <a:ea typeface="+mn-lt"/>
+                <a:cs typeface="+mn-lt"/>
+              </a:rPr>
+              <a:t> </a:t>
+            </a:r>
+            <a:endParaRPr lang="ja-JP" dirty="0"/>
+          </a:p>
+        </p:txBody>
+      </p:sp>
+      <p:sp>
+        <p:nvSpPr>
+          <p:cNvPr id="9" name="Rounded Rectangle 13">
+            <a:extLst>
+              <a:ext uri="{FF2B5EF4-FFF2-40B4-BE49-F238E27FC236}">
+                <a16:creationId xmlns:a16="http://schemas.microsoft.com/office/drawing/2014/main" id="{95D90D95-EB99-F404-5CD8-CE93013B9D79}"/>
+              </a:ext>
+            </a:extLst>
+          </p:cNvPr>
+          <p:cNvSpPr/>
+          <p:nvPr/>
+        </p:nvSpPr>
+        <p:spPr>
+          <a:xfrm>
+            <a:off x="536776" y="1325236"/>
+            <a:ext cx="4144773" cy="1499817"/>
+          </a:xfrm>
+          <a:prstGeom prst="roundRect">
+            <a:avLst/>
+          </a:prstGeom>
+          <a:solidFill>
+            <a:schemeClr val="bg1">
+              <a:lumMod val="95000"/>
+            </a:schemeClr>
+          </a:solidFill>
+          <a:ln w="12700">
+            <a:solidFill>
+              <a:schemeClr val="tx1"/>
+            </a:solidFill>
+          </a:ln>
+        </p:spPr>
+        <p:style>
+          <a:lnRef idx="1">
+            <a:schemeClr val="accent1"/>
+          </a:lnRef>
+          <a:fillRef idx="3">
+            <a:schemeClr val="accent1"/>
+          </a:fillRef>
+          <a:effectRef idx="2">
+            <a:schemeClr val="accent1"/>
+          </a:effectRef>
+          <a:fontRef idx="minor">
+            <a:schemeClr val="lt1"/>
+          </a:fontRef>
+        </p:style>
+        <p:txBody>
+          <a:bodyPr lIns="91440" tIns="45720" rIns="91440" bIns="45720" rtlCol="0" anchor="ctr"/>
+          <a:lstStyle/>
+          <a:p>
+            <a:pPr algn="ctr"/>
+            <a:r>
+              <a:rPr lang="af-ZA"/>
+              <a:t>z</a:t>
+            </a:r>
+            <a:endParaRPr/>
+          </a:p>
+        </p:txBody>
+      </p:sp>
+      <p:sp>
+        <p:nvSpPr>
+          <p:cNvPr id="11" name="テキスト ボックス 10">
+            <a:extLst>
+              <a:ext uri="{FF2B5EF4-FFF2-40B4-BE49-F238E27FC236}">
+                <a16:creationId xmlns:a16="http://schemas.microsoft.com/office/drawing/2014/main" id="{B3724CFA-A050-AD77-2C90-B20E8B1990AC}"/>
+              </a:ext>
+            </a:extLst>
+          </p:cNvPr>
+          <p:cNvSpPr txBox="1"/>
+          <p:nvPr/>
+        </p:nvSpPr>
+        <p:spPr>
+          <a:xfrm>
+            <a:off x="760820" y="1454994"/>
+            <a:ext cx="3769534" cy="1250342"/>
+          </a:xfrm>
+          <a:prstGeom prst="rect">
+            <a:avLst/>
+          </a:prstGeom>
+          <a:noFill/>
+        </p:spPr>
+        <p:txBody>
+          <a:bodyPr wrap="square" lIns="91440" tIns="45720" rIns="91440" bIns="45720" rtlCol="0" anchor="t">
+            <a:spAutoFit/>
+          </a:bodyPr>
+          <a:lstStyle/>
+          <a:p>
+            <a:pPr>
+              <a:lnSpc>
+                <a:spcPct val="150000"/>
+              </a:lnSpc>
+            </a:pPr>
+            <a:r>
+              <a:rPr lang="ja-JP" altLang="en-US" sz="1100" b="1">
+                <a:ea typeface="+mn-lt"/>
+                <a:cs typeface="+mn-lt"/>
+              </a:rPr>
+              <a:t>懸念リスク</a:t>
+            </a:r>
+            <a:r>
+              <a:rPr lang="ja-JP" sz="1100" b="1">
+                <a:ea typeface="+mn-lt"/>
+                <a:cs typeface="+mn-lt"/>
+              </a:rPr>
+              <a:t>①</a:t>
+            </a:r>
+            <a:r>
+              <a:rPr lang="ja-JP" altLang="en-US" sz="1100" b="1">
+                <a:ea typeface="+mn-lt"/>
+                <a:cs typeface="+mn-lt"/>
+              </a:rPr>
+              <a:t>：</a:t>
+            </a:r>
+            <a:r>
+              <a:rPr lang="ja-JP" sz="1100" b="1">
+                <a:ea typeface="+mn-lt"/>
+                <a:cs typeface="+mn-lt"/>
+              </a:rPr>
+              <a:t>レジ横に置きっぱなしにした場合</a:t>
+            </a:r>
+            <a:endParaRPr lang="ja-JP" b="1"/>
+          </a:p>
+          <a:p>
+            <a:pPr>
+              <a:lnSpc>
+                <a:spcPct val="150000"/>
+              </a:lnSpc>
+            </a:pPr>
+            <a:r>
+              <a:rPr lang="ja-JP" sz="1000">
+                <a:ea typeface="+mn-lt"/>
+                <a:cs typeface="+mn-lt"/>
+              </a:rPr>
+              <a:t>ポイント付与用の</a:t>
+            </a:r>
+            <a:r>
+              <a:rPr lang="en-US" altLang="ja-JP" sz="1000">
+                <a:ea typeface="+mn-lt"/>
+                <a:cs typeface="+mn-lt"/>
+              </a:rPr>
+              <a:t>QR</a:t>
+            </a:r>
+            <a:r>
+              <a:rPr lang="ja-JP" sz="1000">
+                <a:ea typeface="+mn-lt"/>
+                <a:cs typeface="+mn-lt"/>
+              </a:rPr>
+              <a:t>コードをレジ横や卓上に常時設置しておくと、お会計をしていないお客様や順番待ちの間に勝手に読み取られてしまい、不正にポイントを貯められてしまうリスクがあります。 </a:t>
+            </a:r>
+            <a:endParaRPr lang="ja-JP">
+              <a:ea typeface="+mn-lt"/>
+              <a:cs typeface="+mn-lt"/>
+            </a:endParaRPr>
+          </a:p>
+        </p:txBody>
+      </p:sp>
+      <p:sp>
+        <p:nvSpPr>
+          <p:cNvPr id="12" name="矢印: 下 11">
+            <a:extLst>
+              <a:ext uri="{FF2B5EF4-FFF2-40B4-BE49-F238E27FC236}">
+                <a16:creationId xmlns:a16="http://schemas.microsoft.com/office/drawing/2014/main" id="{02C384AF-8A8F-5C62-14D0-AF4E1279EC46}"/>
+              </a:ext>
+            </a:extLst>
+          </p:cNvPr>
+          <p:cNvSpPr/>
+          <p:nvPr/>
+        </p:nvSpPr>
+        <p:spPr>
+          <a:xfrm>
+            <a:off x="4639694" y="2958020"/>
+            <a:ext cx="586201" cy="470631"/>
+          </a:xfrm>
+          <a:prstGeom prst="downArrow">
+            <a:avLst/>
+          </a:prstGeom>
+          <a:solidFill>
+            <a:schemeClr val="tx1"/>
+          </a:solidFill>
+        </p:spPr>
+        <p:style>
+          <a:lnRef idx="2">
+            <a:schemeClr val="accent1">
+              <a:shade val="15000"/>
+            </a:schemeClr>
+          </a:lnRef>
+          <a:fillRef idx="1">
+            <a:schemeClr val="accent1"/>
+          </a:fillRef>
+          <a:effectRef idx="0">
+            <a:schemeClr val="accent1"/>
+          </a:effectRef>
+          <a:fontRef idx="minor">
+            <a:schemeClr val="lt1"/>
+          </a:fontRef>
+        </p:style>
+        <p:txBody>
+          <a:bodyPr rtlCol="0" anchor="ctr"/>
+          <a:lstStyle/>
+          <a:p>
+            <a:pPr algn="ctr"/>
+            <a:endParaRPr lang="ja-JP" altLang="en-US"/>
+          </a:p>
+        </p:txBody>
+      </p:sp>
+      <p:sp>
+        <p:nvSpPr>
+          <p:cNvPr id="41" name="Rectangle 11">
+            <a:extLst>
+              <a:ext uri="{FF2B5EF4-FFF2-40B4-BE49-F238E27FC236}">
+                <a16:creationId xmlns:a16="http://schemas.microsoft.com/office/drawing/2014/main" id="{F5E18497-297F-966B-81A6-EE218DDB159F}"/>
+              </a:ext>
+            </a:extLst>
+          </p:cNvPr>
+          <p:cNvSpPr/>
+          <p:nvPr/>
+        </p:nvSpPr>
+        <p:spPr>
+          <a:xfrm>
+            <a:off x="227573" y="3591733"/>
+            <a:ext cx="9406978" cy="486771"/>
+          </a:xfrm>
+          <a:prstGeom prst="rect">
+            <a:avLst/>
+          </a:prstGeom>
+          <a:solidFill>
+            <a:schemeClr val="tx1"/>
+          </a:solidFill>
+          <a:ln>
+            <a:solidFill>
+              <a:schemeClr val="tx1"/>
+            </a:solidFill>
+          </a:ln>
+        </p:spPr>
+        <p:style>
+          <a:lnRef idx="1">
+            <a:schemeClr val="accent1"/>
+          </a:lnRef>
+          <a:fillRef idx="3">
+            <a:schemeClr val="accent1"/>
+          </a:fillRef>
+          <a:effectRef idx="2">
+            <a:schemeClr val="accent1"/>
+          </a:effectRef>
+          <a:fontRef idx="minor">
+            <a:schemeClr val="lt1"/>
+          </a:fontRef>
+        </p:style>
+        <p:txBody>
+          <a:bodyPr lIns="91440" tIns="45720" rIns="91440" bIns="45720" rtlCol="0" anchor="ctr"/>
+          <a:lstStyle/>
+          <a:p>
+            <a:pPr>
+              <a:lnSpc>
+                <a:spcPct val="125000"/>
+              </a:lnSpc>
+              <a:defRPr sz="1400" b="1">
+                <a:solidFill>
+                  <a:srgbClr val="FFFFFF"/>
+                </a:solidFill>
+                <a:latin typeface="Meiryo"/>
+              </a:defRPr>
+            </a:pPr>
+            <a:r>
+              <a:rPr lang="ja-JP">
+                <a:ea typeface="+mn-lt"/>
+                <a:cs typeface="+mn-lt"/>
+              </a:rPr>
+              <a:t>■</a:t>
+            </a:r>
+            <a:r>
+              <a:rPr lang="ja-JP" altLang="en-US">
+                <a:ea typeface="+mn-lt"/>
+                <a:cs typeface="+mn-lt"/>
+              </a:rPr>
+              <a:t>ご提案</a:t>
+            </a:r>
+            <a:r>
+              <a:rPr lang="ja-JP">
+                <a:ea typeface="+mn-lt"/>
+                <a:cs typeface="+mn-lt"/>
+              </a:rPr>
+              <a:t>：</a:t>
+            </a:r>
+            <a:r>
+              <a:rPr lang="en-US" altLang="ja-JP">
+                <a:ea typeface="+mn-lt"/>
+                <a:cs typeface="+mn-lt"/>
+              </a:rPr>
+              <a:t>1</a:t>
+            </a:r>
+            <a:r>
+              <a:rPr lang="ja-JP" altLang="en-US">
+                <a:ea typeface="+mn-lt"/>
+                <a:cs typeface="+mn-lt"/>
+              </a:rPr>
+              <a:t>枚ずつ</a:t>
+            </a:r>
+            <a:r>
+              <a:rPr lang="ja-JP">
+                <a:ea typeface="+mn-lt"/>
+                <a:cs typeface="+mn-lt"/>
+              </a:rPr>
+              <a:t>ラミネート</a:t>
+            </a:r>
+            <a:r>
+              <a:rPr lang="ja-JP" altLang="en-US">
+                <a:ea typeface="+mn-lt"/>
+                <a:cs typeface="+mn-lt"/>
+              </a:rPr>
+              <a:t>し、</a:t>
+            </a:r>
+            <a:r>
+              <a:rPr lang="ja-JP">
+                <a:ea typeface="+mn-lt"/>
+                <a:cs typeface="+mn-lt"/>
+              </a:rPr>
+              <a:t>単語帳</a:t>
+            </a:r>
+            <a:r>
+              <a:rPr lang="ja-JP" altLang="en-US">
+                <a:ea typeface="+mn-lt"/>
+                <a:cs typeface="+mn-lt"/>
+              </a:rPr>
+              <a:t>のように</a:t>
+            </a:r>
+            <a:r>
+              <a:rPr lang="ja-JP">
+                <a:ea typeface="+mn-lt"/>
+                <a:cs typeface="+mn-lt"/>
+              </a:rPr>
+              <a:t>リングで</a:t>
+            </a:r>
+            <a:r>
+              <a:rPr lang="ja-JP" altLang="en-US">
+                <a:ea typeface="+mn-lt"/>
+                <a:cs typeface="+mn-lt"/>
+              </a:rPr>
+              <a:t>まとめて</a:t>
+            </a:r>
+            <a:r>
+              <a:rPr lang="ja-JP">
+                <a:ea typeface="+mn-lt"/>
+                <a:cs typeface="+mn-lt"/>
+              </a:rPr>
+              <a:t>レジ裏</a:t>
+            </a:r>
+            <a:r>
+              <a:rPr lang="ja-JP" altLang="en-US">
+                <a:ea typeface="+mn-lt"/>
+                <a:cs typeface="+mn-lt"/>
+              </a:rPr>
+              <a:t>で</a:t>
+            </a:r>
+            <a:r>
+              <a:rPr lang="ja-JP">
+                <a:ea typeface="+mn-lt"/>
+                <a:cs typeface="+mn-lt"/>
+              </a:rPr>
+              <a:t>保管</a:t>
+            </a:r>
+          </a:p>
+        </p:txBody>
+      </p:sp>
+      <p:sp>
+        <p:nvSpPr>
+          <p:cNvPr id="48" name="正方形/長方形 47">
+            <a:extLst>
+              <a:ext uri="{FF2B5EF4-FFF2-40B4-BE49-F238E27FC236}">
+                <a16:creationId xmlns:a16="http://schemas.microsoft.com/office/drawing/2014/main" id="{3ED82DD1-92F7-97BC-B924-C176C7EA9C6F}"/>
+              </a:ext>
+            </a:extLst>
+          </p:cNvPr>
+          <p:cNvSpPr/>
+          <p:nvPr/>
+        </p:nvSpPr>
+        <p:spPr>
+          <a:xfrm>
+            <a:off x="232107" y="4073412"/>
+            <a:ext cx="9405899" cy="1977525"/>
+          </a:xfrm>
+          <a:prstGeom prst="rect">
+            <a:avLst/>
+          </a:prstGeom>
+          <a:noFill/>
+          <a:ln w="12700">
+            <a:solidFill>
+              <a:schemeClr val="tx1"/>
+            </a:solidFill>
+          </a:ln>
+        </p:spPr>
+        <p:style>
+          <a:lnRef idx="2">
+            <a:schemeClr val="accent1">
+              <a:shade val="15000"/>
+            </a:schemeClr>
+          </a:lnRef>
+          <a:fillRef idx="1">
+            <a:schemeClr val="accent1"/>
+          </a:fillRef>
+          <a:effectRef idx="0">
+            <a:schemeClr val="accent1"/>
+          </a:effectRef>
+          <a:fontRef idx="minor">
+            <a:schemeClr val="lt1"/>
+          </a:fontRef>
+        </p:style>
+        <p:txBody>
+          <a:bodyPr rtlCol="0" anchor="ctr"/>
+          <a:lstStyle/>
+          <a:p>
+            <a:pPr algn="ctr"/>
+            <a:endParaRPr lang="ja-JP" altLang="en-US"/>
+          </a:p>
+        </p:txBody>
+      </p:sp>
+      <p:sp>
+        <p:nvSpPr>
+          <p:cNvPr id="49" name="Rounded Rectangle 13">
+            <a:extLst>
+              <a:ext uri="{FF2B5EF4-FFF2-40B4-BE49-F238E27FC236}">
+                <a16:creationId xmlns:a16="http://schemas.microsoft.com/office/drawing/2014/main" id="{320103A5-6D1C-DAE0-8ABE-3EC0C20E90A6}"/>
+              </a:ext>
+            </a:extLst>
+          </p:cNvPr>
+          <p:cNvSpPr/>
+          <p:nvPr/>
+        </p:nvSpPr>
+        <p:spPr>
+          <a:xfrm>
+            <a:off x="351466" y="4288273"/>
+            <a:ext cx="2991663" cy="1410209"/>
+          </a:xfrm>
+          <a:prstGeom prst="roundRect">
+            <a:avLst/>
+          </a:prstGeom>
+          <a:solidFill>
+            <a:schemeClr val="bg1">
+              <a:lumMod val="95000"/>
+            </a:schemeClr>
+          </a:solidFill>
+          <a:ln w="12700">
+            <a:solidFill>
+              <a:schemeClr val="tx1"/>
+            </a:solidFill>
+          </a:ln>
+        </p:spPr>
+        <p:style>
+          <a:lnRef idx="1">
+            <a:schemeClr val="accent1"/>
+          </a:lnRef>
+          <a:fillRef idx="3">
+            <a:schemeClr val="accent1"/>
+          </a:fillRef>
+          <a:effectRef idx="2">
+            <a:schemeClr val="accent1"/>
+          </a:effectRef>
+          <a:fontRef idx="minor">
+            <a:schemeClr val="lt1"/>
+          </a:fontRef>
+        </p:style>
+        <p:txBody>
+          <a:bodyPr lIns="91440" tIns="45720" rIns="91440" bIns="45720" rtlCol="0" anchor="ctr"/>
+          <a:lstStyle/>
+          <a:p>
+            <a:pPr algn="ctr"/>
+            <a:endParaRPr lang="af-ZA" dirty="0"/>
+          </a:p>
+        </p:txBody>
+      </p:sp>
+      <p:sp>
+        <p:nvSpPr>
+          <p:cNvPr id="50" name="テキスト ボックス 49">
+            <a:extLst>
+              <a:ext uri="{FF2B5EF4-FFF2-40B4-BE49-F238E27FC236}">
+                <a16:creationId xmlns:a16="http://schemas.microsoft.com/office/drawing/2014/main" id="{691CAB2B-481F-B70B-839B-398D12910415}"/>
+              </a:ext>
+            </a:extLst>
+          </p:cNvPr>
+          <p:cNvSpPr txBox="1"/>
+          <p:nvPr/>
+        </p:nvSpPr>
+        <p:spPr>
+          <a:xfrm>
+            <a:off x="509763" y="4370240"/>
+            <a:ext cx="2682144" cy="1250342"/>
+          </a:xfrm>
+          <a:prstGeom prst="rect">
+            <a:avLst/>
+          </a:prstGeom>
+          <a:noFill/>
+        </p:spPr>
+        <p:txBody>
+          <a:bodyPr wrap="square" lIns="91440" tIns="45720" rIns="91440" bIns="45720" rtlCol="0" anchor="t">
+            <a:spAutoFit/>
+          </a:bodyPr>
+          <a:lstStyle/>
+          <a:p>
+            <a:pPr>
+              <a:lnSpc>
+                <a:spcPct val="150000"/>
+              </a:lnSpc>
+            </a:pPr>
+            <a:r>
+              <a:rPr lang="ja-JP" sz="1100" b="1">
+                <a:ea typeface="+mn-lt"/>
+                <a:cs typeface="+mn-lt"/>
+              </a:rPr>
+              <a:t>STEP 1：1枚ずつラミネート加工</a:t>
+            </a:r>
+            <a:endParaRPr lang="ja-JP" altLang="en-US" b="1">
+              <a:ea typeface="+mn-lt"/>
+              <a:cs typeface="+mn-lt"/>
+            </a:endParaRPr>
+          </a:p>
+          <a:p>
+            <a:pPr>
+              <a:lnSpc>
+                <a:spcPct val="150000"/>
+              </a:lnSpc>
+            </a:pPr>
+            <a:r>
+              <a:rPr lang="ja-JP" altLang="en-US" sz="1000">
+                <a:ea typeface="+mn-lt"/>
+                <a:cs typeface="+mn-lt"/>
+              </a:rPr>
+              <a:t>付与</a:t>
+            </a:r>
+            <a:r>
+              <a:rPr lang="ja-JP" sz="1000">
+                <a:ea typeface="+mn-lt"/>
+                <a:cs typeface="+mn-lt"/>
+              </a:rPr>
+              <a:t>ポイント</a:t>
+            </a:r>
+            <a:r>
+              <a:rPr lang="ja-JP" altLang="en-US" sz="1000">
+                <a:ea typeface="+mn-lt"/>
+                <a:cs typeface="+mn-lt"/>
+              </a:rPr>
+              <a:t>ご</a:t>
+            </a:r>
+            <a:r>
+              <a:rPr lang="ja-JP" sz="1000">
+                <a:ea typeface="+mn-lt"/>
+                <a:cs typeface="+mn-lt"/>
+              </a:rPr>
+              <a:t>と（1pt〜5pt等）に</a:t>
+            </a:r>
+            <a:r>
+              <a:rPr lang="ja-JP" altLang="en-US" sz="1000">
+                <a:ea typeface="+mn-lt"/>
+                <a:cs typeface="+mn-lt"/>
+              </a:rPr>
+              <a:t>ハガキサイズ等で「</a:t>
+            </a:r>
+            <a:r>
+              <a:rPr lang="ja-JP" sz="1000">
+                <a:ea typeface="+mn-lt"/>
+                <a:cs typeface="+mn-lt"/>
+              </a:rPr>
+              <a:t>ポイント</a:t>
+            </a:r>
+            <a:r>
+              <a:rPr lang="ja-JP" altLang="en-US" sz="1000">
+                <a:ea typeface="+mn-lt"/>
+                <a:cs typeface="+mn-lt"/>
+              </a:rPr>
+              <a:t>数＋大きな</a:t>
+            </a:r>
+            <a:r>
+              <a:rPr lang="en-US" altLang="ja-JP" sz="1000">
+                <a:ea typeface="+mn-lt"/>
+                <a:cs typeface="+mn-lt"/>
+              </a:rPr>
+              <a:t>QR</a:t>
+            </a:r>
+            <a:r>
+              <a:rPr lang="ja-JP" altLang="en-US" sz="1000">
+                <a:ea typeface="+mn-lt"/>
+                <a:cs typeface="+mn-lt"/>
+              </a:rPr>
+              <a:t>コード」</a:t>
+            </a:r>
+            <a:r>
+              <a:rPr lang="ja-JP" sz="1000">
+                <a:ea typeface="+mn-lt"/>
+                <a:cs typeface="+mn-lt"/>
+              </a:rPr>
+              <a:t>を</a:t>
+            </a:r>
+            <a:r>
+              <a:rPr lang="en-US" altLang="ja-JP" sz="1000">
+                <a:ea typeface="+mn-lt"/>
+                <a:cs typeface="+mn-lt"/>
+              </a:rPr>
+              <a:t>1</a:t>
+            </a:r>
+            <a:r>
+              <a:rPr lang="ja-JP" altLang="en-US" sz="1000">
+                <a:ea typeface="+mn-lt"/>
+                <a:cs typeface="+mn-lt"/>
+              </a:rPr>
+              <a:t>枚ずつ作成し、ラミネート加工</a:t>
+            </a:r>
+            <a:r>
+              <a:rPr lang="ja-JP" sz="1000">
+                <a:ea typeface="+mn-lt"/>
+                <a:cs typeface="+mn-lt"/>
+              </a:rPr>
+              <a:t>します</a:t>
+            </a:r>
+            <a:r>
+              <a:rPr lang="ja-JP" altLang="en-US" sz="1000">
+                <a:ea typeface="+mn-lt"/>
+                <a:cs typeface="+mn-lt"/>
+              </a:rPr>
+              <a:t>。</a:t>
+            </a:r>
+            <a:endParaRPr lang="ja-JP" sz="1000">
+              <a:ea typeface="+mn-lt"/>
+              <a:cs typeface="+mn-lt"/>
+            </a:endParaRPr>
+          </a:p>
+        </p:txBody>
+      </p:sp>
+      <p:sp>
+        <p:nvSpPr>
+          <p:cNvPr id="51" name="Rounded Rectangle 13">
+            <a:extLst>
+              <a:ext uri="{FF2B5EF4-FFF2-40B4-BE49-F238E27FC236}">
+                <a16:creationId xmlns:a16="http://schemas.microsoft.com/office/drawing/2014/main" id="{0882ACC7-D8E6-57DF-BA80-86178B60F22F}"/>
+              </a:ext>
+            </a:extLst>
+          </p:cNvPr>
+          <p:cNvSpPr/>
+          <p:nvPr/>
+        </p:nvSpPr>
+        <p:spPr>
+          <a:xfrm>
+            <a:off x="3458217" y="4288273"/>
+            <a:ext cx="2973739" cy="1428131"/>
+          </a:xfrm>
+          <a:prstGeom prst="roundRect">
+            <a:avLst/>
+          </a:prstGeom>
+          <a:solidFill>
+            <a:schemeClr val="bg1">
+              <a:lumMod val="95000"/>
+            </a:schemeClr>
+          </a:solidFill>
+          <a:ln w="12700">
+            <a:solidFill>
+              <a:schemeClr val="tx1"/>
+            </a:solidFill>
+          </a:ln>
+        </p:spPr>
+        <p:style>
+          <a:lnRef idx="1">
+            <a:schemeClr val="accent1"/>
+          </a:lnRef>
+          <a:fillRef idx="3">
+            <a:schemeClr val="accent1"/>
+          </a:fillRef>
+          <a:effectRef idx="2">
+            <a:schemeClr val="accent1"/>
+          </a:effectRef>
+          <a:fontRef idx="minor">
+            <a:schemeClr val="lt1"/>
+          </a:fontRef>
+        </p:style>
+        <p:txBody>
+          <a:bodyPr lIns="91440" tIns="45720" rIns="91440" bIns="45720" rtlCol="0" anchor="ctr"/>
+          <a:lstStyle/>
+          <a:p>
+            <a:pPr algn="ctr"/>
+            <a:endParaRPr lang="af-ZA" dirty="0"/>
+          </a:p>
+        </p:txBody>
+      </p:sp>
+      <p:sp>
+        <p:nvSpPr>
+          <p:cNvPr id="52" name="テキスト ボックス 51">
+            <a:extLst>
+              <a:ext uri="{FF2B5EF4-FFF2-40B4-BE49-F238E27FC236}">
+                <a16:creationId xmlns:a16="http://schemas.microsoft.com/office/drawing/2014/main" id="{C86C017B-FF77-D6FF-DC94-A8953EC10D1E}"/>
+              </a:ext>
+            </a:extLst>
+          </p:cNvPr>
+          <p:cNvSpPr txBox="1"/>
+          <p:nvPr/>
+        </p:nvSpPr>
+        <p:spPr>
+          <a:xfrm>
+            <a:off x="3610518" y="4370240"/>
+            <a:ext cx="2682144" cy="1250342"/>
+          </a:xfrm>
+          <a:prstGeom prst="rect">
+            <a:avLst/>
+          </a:prstGeom>
+          <a:noFill/>
+        </p:spPr>
+        <p:txBody>
+          <a:bodyPr wrap="square" lIns="91440" tIns="45720" rIns="91440" bIns="45720" rtlCol="0" anchor="t">
+            <a:spAutoFit/>
+          </a:bodyPr>
+          <a:lstStyle/>
+          <a:p>
+            <a:pPr>
+              <a:lnSpc>
+                <a:spcPct val="150000"/>
+              </a:lnSpc>
+            </a:pPr>
+            <a:r>
+              <a:rPr lang="ja-JP" sz="1100" b="1">
+                <a:ea typeface="+mn-lt"/>
+                <a:cs typeface="+mn-lt"/>
+              </a:rPr>
+              <a:t>STEP </a:t>
+            </a:r>
+            <a:r>
+              <a:rPr lang="en-US" altLang="ja-JP" sz="1100" b="1">
+                <a:ea typeface="+mn-lt"/>
+                <a:cs typeface="+mn-lt"/>
+              </a:rPr>
+              <a:t>2</a:t>
+            </a:r>
+            <a:r>
+              <a:rPr lang="ja-JP" sz="1100" b="1">
+                <a:ea typeface="+mn-lt"/>
+                <a:cs typeface="+mn-lt"/>
+              </a:rPr>
+              <a:t>：</a:t>
+            </a:r>
+            <a:r>
+              <a:rPr lang="ja-JP" altLang="en-US" sz="1100" b="1">
+                <a:ea typeface="+mn-lt"/>
+                <a:cs typeface="+mn-lt"/>
+              </a:rPr>
+              <a:t>リングでまとめレジ裏保管 </a:t>
+            </a:r>
+            <a:endParaRPr lang="ja-JP" b="1"/>
+          </a:p>
+          <a:p>
+            <a:pPr>
+              <a:lnSpc>
+                <a:spcPct val="150000"/>
+              </a:lnSpc>
+            </a:pPr>
+            <a:r>
+              <a:rPr lang="ja-JP" sz="1000">
+                <a:ea typeface="+mn-lt"/>
+                <a:cs typeface="+mn-lt"/>
+              </a:rPr>
+              <a:t>穴あ</a:t>
+            </a:r>
+            <a:r>
+              <a:rPr lang="ja-JP" altLang="en-US" sz="1000">
+                <a:ea typeface="+mn-lt"/>
+                <a:cs typeface="+mn-lt"/>
+              </a:rPr>
+              <a:t>けパ</a:t>
+            </a:r>
+            <a:r>
+              <a:rPr lang="ja-JP" sz="1000">
+                <a:ea typeface="+mn-lt"/>
+                <a:cs typeface="+mn-lt"/>
+              </a:rPr>
+              <a:t>ン</a:t>
+            </a:r>
+            <a:r>
+              <a:rPr lang="ja-JP" altLang="en-US" sz="1000">
+                <a:ea typeface="+mn-lt"/>
+                <a:cs typeface="+mn-lt"/>
+              </a:rPr>
+              <a:t>チ</a:t>
+            </a:r>
+            <a:r>
+              <a:rPr lang="ja-JP" sz="1000">
+                <a:ea typeface="+mn-lt"/>
+                <a:cs typeface="+mn-lt"/>
+              </a:rPr>
+              <a:t>で穴を開けて金属リン</a:t>
+            </a:r>
+            <a:r>
+              <a:rPr lang="ja-JP" altLang="en-US" sz="1000">
+                <a:ea typeface="+mn-lt"/>
+                <a:cs typeface="+mn-lt"/>
+              </a:rPr>
+              <a:t>グ</a:t>
+            </a:r>
+            <a:r>
+              <a:rPr lang="ja-JP" sz="1000">
+                <a:ea typeface="+mn-lt"/>
+                <a:cs typeface="+mn-lt"/>
+              </a:rPr>
+              <a:t>を</a:t>
+            </a:r>
+            <a:r>
+              <a:rPr lang="ja-JP" altLang="en-US" sz="1000">
+                <a:ea typeface="+mn-lt"/>
+                <a:cs typeface="+mn-lt"/>
+              </a:rPr>
+              <a:t>通</a:t>
+            </a:r>
+            <a:r>
+              <a:rPr lang="ja-JP" sz="1000">
+                <a:ea typeface="+mn-lt"/>
+                <a:cs typeface="+mn-lt"/>
+              </a:rPr>
+              <a:t>し、単語帳のようにまとめます。普段はレジ裏で保管することで、お客様による勝手な読み取りを</a:t>
+            </a:r>
+            <a:r>
+              <a:rPr lang="ja-JP" sz="1000">
+                <a:latin typeface="Meiryo"/>
+                <a:ea typeface="Meiryo"/>
+                <a:cs typeface="+mn-lt"/>
+              </a:rPr>
+              <a:t>防ぐことができます。</a:t>
+            </a:r>
+          </a:p>
+        </p:txBody>
+      </p:sp>
+      <p:sp>
+        <p:nvSpPr>
+          <p:cNvPr id="53" name="Rounded Rectangle 13">
+            <a:extLst>
+              <a:ext uri="{FF2B5EF4-FFF2-40B4-BE49-F238E27FC236}">
+                <a16:creationId xmlns:a16="http://schemas.microsoft.com/office/drawing/2014/main" id="{41FB58DD-7D1E-C27C-2E2C-50503DA3F874}"/>
+              </a:ext>
+            </a:extLst>
+          </p:cNvPr>
+          <p:cNvSpPr/>
+          <p:nvPr/>
+        </p:nvSpPr>
+        <p:spPr>
+          <a:xfrm>
+            <a:off x="6546621" y="4282298"/>
+            <a:ext cx="2991663" cy="1440080"/>
+          </a:xfrm>
+          <a:prstGeom prst="roundRect">
+            <a:avLst/>
+          </a:prstGeom>
+          <a:solidFill>
+            <a:schemeClr val="bg1">
+              <a:lumMod val="95000"/>
+            </a:schemeClr>
+          </a:solidFill>
+          <a:ln w="12700">
+            <a:solidFill>
+              <a:schemeClr val="tx1"/>
+            </a:solidFill>
+          </a:ln>
+        </p:spPr>
+        <p:style>
+          <a:lnRef idx="1">
+            <a:schemeClr val="accent1"/>
+          </a:lnRef>
+          <a:fillRef idx="3">
+            <a:schemeClr val="accent1"/>
+          </a:fillRef>
+          <a:effectRef idx="2">
+            <a:schemeClr val="accent1"/>
+          </a:effectRef>
+          <a:fontRef idx="minor">
+            <a:schemeClr val="lt1"/>
+          </a:fontRef>
+        </p:style>
+        <p:txBody>
+          <a:bodyPr lIns="91440" tIns="45720" rIns="91440" bIns="45720" rtlCol="0" anchor="ctr"/>
+          <a:lstStyle/>
+          <a:p>
+            <a:pPr algn="ctr"/>
+            <a:endParaRPr lang="af-ZA" dirty="0"/>
+          </a:p>
+        </p:txBody>
+      </p:sp>
+      <p:sp>
+        <p:nvSpPr>
+          <p:cNvPr id="54" name="テキスト ボックス 53">
+            <a:extLst>
+              <a:ext uri="{FF2B5EF4-FFF2-40B4-BE49-F238E27FC236}">
+                <a16:creationId xmlns:a16="http://schemas.microsoft.com/office/drawing/2014/main" id="{E1CFEA11-01EE-542B-9076-0DC13B3ED74A}"/>
+              </a:ext>
+            </a:extLst>
+          </p:cNvPr>
+          <p:cNvSpPr txBox="1"/>
+          <p:nvPr/>
+        </p:nvSpPr>
+        <p:spPr>
+          <a:xfrm>
+            <a:off x="6698902" y="4370238"/>
+            <a:ext cx="2682144" cy="1250342"/>
+          </a:xfrm>
+          <a:prstGeom prst="rect">
+            <a:avLst/>
+          </a:prstGeom>
+          <a:noFill/>
+        </p:spPr>
+        <p:txBody>
+          <a:bodyPr wrap="square" lIns="91440" tIns="45720" rIns="91440" bIns="45720" rtlCol="0" anchor="t">
+            <a:spAutoFit/>
+          </a:bodyPr>
+          <a:lstStyle/>
+          <a:p>
+            <a:pPr>
+              <a:lnSpc>
+                <a:spcPct val="150000"/>
+              </a:lnSpc>
+            </a:pPr>
+            <a:r>
+              <a:rPr lang="ja-JP" sz="1100" b="1">
+                <a:ea typeface="+mn-lt"/>
+                <a:cs typeface="+mn-lt"/>
+              </a:rPr>
+              <a:t>STEP </a:t>
+            </a:r>
+            <a:r>
+              <a:rPr lang="en-US" altLang="ja-JP" sz="1100" b="1">
+                <a:ea typeface="+mn-lt"/>
+                <a:cs typeface="+mn-lt"/>
+              </a:rPr>
+              <a:t>3</a:t>
+            </a:r>
+            <a:r>
+              <a:rPr lang="ja-JP" sz="1100" b="1">
+                <a:ea typeface="+mn-lt"/>
+                <a:cs typeface="+mn-lt"/>
+              </a:rPr>
+              <a:t>：</a:t>
+            </a:r>
+            <a:r>
+              <a:rPr lang="ja-JP" altLang="en-US" sz="1100" b="1">
+                <a:ea typeface="+mn-lt"/>
+                <a:cs typeface="+mn-lt"/>
+              </a:rPr>
+              <a:t>お会計金額に応じて提示 </a:t>
+            </a:r>
+            <a:endParaRPr lang="ja-JP" b="1"/>
+          </a:p>
+          <a:p>
+            <a:pPr>
+              <a:lnSpc>
+                <a:spcPct val="150000"/>
+              </a:lnSpc>
+            </a:pPr>
+            <a:r>
+              <a:rPr lang="ja-JP" sz="1000">
+                <a:ea typeface="+mn-lt"/>
+                <a:cs typeface="+mn-lt"/>
+              </a:rPr>
+              <a:t>1,000円＝1ptとし、お会計</a:t>
+            </a:r>
+            <a:r>
+              <a:rPr lang="en-US" altLang="ja-JP" sz="1000">
+                <a:ea typeface="+mn-lt"/>
+                <a:cs typeface="+mn-lt"/>
+              </a:rPr>
+              <a:t>2,000</a:t>
+            </a:r>
+            <a:r>
+              <a:rPr lang="ja-JP" sz="1000">
+                <a:ea typeface="+mn-lt"/>
+                <a:cs typeface="+mn-lt"/>
+              </a:rPr>
+              <a:t>円なら「</a:t>
+            </a:r>
+            <a:r>
+              <a:rPr lang="en-US" altLang="ja-JP" sz="1000">
+                <a:ea typeface="+mn-lt"/>
+                <a:cs typeface="+mn-lt"/>
+              </a:rPr>
+              <a:t>2pt</a:t>
+            </a:r>
+            <a:r>
+              <a:rPr lang="ja-JP" sz="1000">
+                <a:ea typeface="+mn-lt"/>
+                <a:cs typeface="+mn-lt"/>
+              </a:rPr>
+              <a:t>」、5,000円なら「5pt</a:t>
+            </a:r>
+            <a:r>
+              <a:rPr lang="ja-JP" altLang="en-US" sz="1000">
+                <a:ea typeface="+mn-lt"/>
+                <a:cs typeface="+mn-lt"/>
+              </a:rPr>
+              <a:t>」</a:t>
+            </a:r>
+            <a:r>
+              <a:rPr lang="ja-JP" sz="1000">
+                <a:ea typeface="+mn-lt"/>
+                <a:cs typeface="+mn-lt"/>
+              </a:rPr>
+              <a:t>のカードをスタッフ様がめくって提示</a:t>
+            </a:r>
+            <a:r>
+              <a:rPr lang="ja-JP" altLang="en-US" sz="1000">
+                <a:ea typeface="+mn-lt"/>
+                <a:cs typeface="+mn-lt"/>
+              </a:rPr>
+              <a:t>する</a:t>
+            </a:r>
+            <a:r>
+              <a:rPr lang="ja-JP" sz="1000">
+                <a:ea typeface="+mn-lt"/>
+                <a:cs typeface="+mn-lt"/>
+              </a:rPr>
+              <a:t>形で</a:t>
+            </a:r>
+            <a:r>
+              <a:rPr lang="ja-JP" altLang="en-US" sz="1000">
+                <a:ea typeface="+mn-lt"/>
+                <a:cs typeface="+mn-lt"/>
+              </a:rPr>
+              <a:t>、誤読込も防ぐことができます。</a:t>
+            </a:r>
           </a:p>
         </p:txBody>
       </p:sp>
@@ -6750,10 +7667,10 @@
       </p:grpSpPr>
       <p:sp>
         <p:nvSpPr>
-          <p:cNvPr id="2" name="テキスト ボックス 4">
+          <p:cNvPr id="3" name="テキスト ボックス 2">
             <a:extLst>
               <a:ext uri="{FF2B5EF4-FFF2-40B4-BE49-F238E27FC236}">
-                <a16:creationId xmlns:a16="http://schemas.microsoft.com/office/drawing/2014/main" id="{D4470FDB-81E2-4806-D0BB-30957F999F6E}"/>
+                <a16:creationId xmlns:a16="http://schemas.microsoft.com/office/drawing/2014/main" id="{7232F701-B778-7ABB-27BB-ADA102EEAFEA}"/>
               </a:ext>
             </a:extLst>
           </p:cNvPr>
@@ -6762,8 +7679,8 @@
         </p:nvSpPr>
         <p:spPr>
           <a:xfrm>
-            <a:off x="403412" y="512817"/>
-            <a:ext cx="9099176" cy="5232202"/>
+            <a:off x="227573" y="44659"/>
+            <a:ext cx="5620449" cy="307777"/>
           </a:xfrm>
           <a:prstGeom prst="rect">
             <a:avLst/>
@@ -6771,7 +7688,786 @@
           <a:noFill/>
         </p:spPr>
         <p:txBody>
-          <a:bodyPr wrap="square">
+          <a:bodyPr wrap="none" lIns="91440" tIns="45720" rIns="91440" bIns="45720" rtlCol="0" anchor="t">
+            <a:spAutoFit/>
+          </a:bodyPr>
+          <a:lstStyle/>
+          <a:p>
+            <a:r>
+              <a:rPr kumimoji="1" lang="en-US" altLang="ja-JP" sz="1400" b="1"/>
+              <a:t>4. </a:t>
+            </a:r>
+            <a:r>
+              <a:rPr kumimoji="1" lang="ja-JP" altLang="en-US" sz="1400" b="1">
+                <a:ea typeface="+mn-lt"/>
+                <a:cs typeface="+mn-lt"/>
+              </a:rPr>
+              <a:t>店頭設置用</a:t>
+            </a:r>
+            <a:r>
+              <a:rPr kumimoji="1" lang="en-US" altLang="ja-JP" sz="1400" b="1">
+                <a:ea typeface="+mn-lt"/>
+                <a:cs typeface="+mn-lt"/>
+              </a:rPr>
+              <a:t>POP</a:t>
+            </a:r>
+            <a:r>
+              <a:rPr kumimoji="1" lang="ja-JP" altLang="en-US" sz="1400" b="1">
+                <a:ea typeface="+mn-lt"/>
+                <a:cs typeface="+mn-lt"/>
+              </a:rPr>
+              <a:t>・ショップカードのデザイン案（</a:t>
+            </a:r>
+            <a:r>
+              <a:rPr kumimoji="1" lang="en-US" altLang="ja-JP" sz="1400" b="1">
+                <a:ea typeface="+mn-lt"/>
+                <a:cs typeface="+mn-lt"/>
+              </a:rPr>
+              <a:t>3</a:t>
+            </a:r>
+            <a:r>
+              <a:rPr kumimoji="1" lang="ja-JP" altLang="en-US" sz="1400" b="1">
+                <a:ea typeface="+mn-lt"/>
+                <a:cs typeface="+mn-lt"/>
+              </a:rPr>
+              <a:t>サイズ展開）</a:t>
+            </a:r>
+            <a:r>
+              <a:rPr kumimoji="1" lang="en-US" altLang="ja-JP" sz="1400" b="1" dirty="0">
+                <a:ea typeface="+mn-lt"/>
+                <a:cs typeface="+mn-lt"/>
+              </a:rPr>
+              <a:t> </a:t>
+            </a:r>
+            <a:endParaRPr lang="en-US" altLang="ja-JP" sz="1400" b="1"/>
+          </a:p>
+        </p:txBody>
+      </p:sp>
+      <p:sp>
+        <p:nvSpPr>
+          <p:cNvPr id="5" name="テキスト ボックス 4">
+            <a:extLst>
+              <a:ext uri="{FF2B5EF4-FFF2-40B4-BE49-F238E27FC236}">
+                <a16:creationId xmlns:a16="http://schemas.microsoft.com/office/drawing/2014/main" id="{9C07FCE5-12F4-6F69-F8AA-3647EB8207D7}"/>
+              </a:ext>
+            </a:extLst>
+          </p:cNvPr>
+          <p:cNvSpPr txBox="1"/>
+          <p:nvPr/>
+        </p:nvSpPr>
+        <p:spPr>
+          <a:xfrm>
+            <a:off x="226830" y="499441"/>
+            <a:ext cx="4725427" cy="338554"/>
+          </a:xfrm>
+          <a:prstGeom prst="rect">
+            <a:avLst/>
+          </a:prstGeom>
+          <a:noFill/>
+        </p:spPr>
+        <p:txBody>
+          <a:bodyPr wrap="square" lIns="91440" tIns="45720" rIns="91440" bIns="45720" anchor="t">
+            <a:spAutoFit/>
+          </a:bodyPr>
+          <a:lstStyle/>
+          <a:p>
+            <a:pPr>
+              <a:defRPr sz="1300" b="0">
+                <a:solidFill>
+                  <a:srgbClr val="2B2B2B"/>
+                </a:solidFill>
+                <a:latin typeface="Meiryo"/>
+              </a:defRPr>
+            </a:pPr>
+            <a:r>
+              <a:rPr lang="ja-JP" sz="1600" i="0" u="none" strike="noStrike" baseline="0">
+                <a:ea typeface="+mn-lt"/>
+                <a:cs typeface="+mn-lt"/>
+              </a:rPr>
+              <a:t>■</a:t>
+            </a:r>
+            <a:r>
+              <a:rPr lang="ja-JP" altLang="en-US" sz="1600">
+                <a:ea typeface="+mn-lt"/>
+                <a:cs typeface="+mn-lt"/>
+              </a:rPr>
+              <a:t>設置場所と用途</a:t>
+            </a:r>
+            <a:r>
+              <a:rPr lang="ja-JP" sz="1600">
+                <a:ea typeface="+mn-lt"/>
+                <a:cs typeface="+mn-lt"/>
+              </a:rPr>
+              <a:t>に</a:t>
+            </a:r>
+            <a:r>
+              <a:rPr lang="ja-JP" altLang="en-US" sz="1600">
+                <a:ea typeface="+mn-lt"/>
+                <a:cs typeface="+mn-lt"/>
+              </a:rPr>
+              <a:t>最適化し</a:t>
+            </a:r>
+            <a:r>
+              <a:rPr lang="ja-JP" sz="1600">
+                <a:ea typeface="+mn-lt"/>
+                <a:cs typeface="+mn-lt"/>
+              </a:rPr>
+              <a:t>た</a:t>
+            </a:r>
+            <a:r>
+              <a:rPr lang="en-US" altLang="ja-JP" sz="1600">
+                <a:ea typeface="+mn-lt"/>
+                <a:cs typeface="+mn-lt"/>
+              </a:rPr>
+              <a:t>3</a:t>
+            </a:r>
+            <a:r>
+              <a:rPr lang="ja-JP" altLang="en-US" sz="1600">
+                <a:ea typeface="+mn-lt"/>
+                <a:cs typeface="+mn-lt"/>
+              </a:rPr>
+              <a:t>つのサイズ展開 </a:t>
+            </a:r>
+            <a:endParaRPr lang="ja-JP"/>
+          </a:p>
+        </p:txBody>
+      </p:sp>
+      <p:sp>
+        <p:nvSpPr>
+          <p:cNvPr id="11" name="テキスト ボックス 10">
+            <a:extLst>
+              <a:ext uri="{FF2B5EF4-FFF2-40B4-BE49-F238E27FC236}">
+                <a16:creationId xmlns:a16="http://schemas.microsoft.com/office/drawing/2014/main" id="{C025495C-5C92-B250-E5E6-68F9437BC4C4}"/>
+              </a:ext>
+            </a:extLst>
+          </p:cNvPr>
+          <p:cNvSpPr txBox="1"/>
+          <p:nvPr/>
+        </p:nvSpPr>
+        <p:spPr>
+          <a:xfrm>
+            <a:off x="324669" y="971111"/>
+            <a:ext cx="4169836" cy="879087"/>
+          </a:xfrm>
+          <a:prstGeom prst="rect">
+            <a:avLst/>
+          </a:prstGeom>
+          <a:noFill/>
+        </p:spPr>
+        <p:txBody>
+          <a:bodyPr wrap="square" lIns="91440" tIns="45720" rIns="91440" bIns="45720" rtlCol="0" anchor="t">
+            <a:spAutoFit/>
+          </a:bodyPr>
+          <a:lstStyle/>
+          <a:p>
+            <a:pPr>
+              <a:lnSpc>
+                <a:spcPct val="150000"/>
+              </a:lnSpc>
+            </a:pPr>
+            <a:r>
+              <a:rPr lang="ja-JP" sz="1300" b="1" dirty="0">
+                <a:ea typeface="+mn-lt"/>
+                <a:cs typeface="+mn-lt"/>
+              </a:rPr>
+              <a:t>① </a:t>
+            </a:r>
+            <a:r>
+              <a:rPr lang="en-US" altLang="ja-JP" sz="1300" b="1">
+                <a:ea typeface="+mn-lt"/>
+                <a:cs typeface="+mn-lt"/>
+              </a:rPr>
+              <a:t>A5</a:t>
+            </a:r>
+            <a:r>
+              <a:rPr lang="ja-JP" altLang="en-US" sz="1300" b="1">
+                <a:ea typeface="+mn-lt"/>
+                <a:cs typeface="+mn-lt"/>
+              </a:rPr>
+              <a:t>サイズ</a:t>
+            </a:r>
+            <a:r>
+              <a:rPr lang="en-US" altLang="ja-JP" sz="1300" b="1">
+                <a:ea typeface="+mn-lt"/>
+                <a:cs typeface="+mn-lt"/>
+              </a:rPr>
+              <a:t>【</a:t>
+            </a:r>
+            <a:r>
+              <a:rPr lang="ja-JP" altLang="en-US" sz="1300" b="1">
+                <a:ea typeface="+mn-lt"/>
+                <a:cs typeface="+mn-lt"/>
+              </a:rPr>
+              <a:t>客席テーブル上・店内壁面用</a:t>
+            </a:r>
+            <a:r>
+              <a:rPr lang="en-US" altLang="ja-JP" sz="1300" b="1">
+                <a:ea typeface="+mn-lt"/>
+                <a:cs typeface="+mn-lt"/>
+              </a:rPr>
+              <a:t>】</a:t>
+            </a:r>
+            <a:r>
+              <a:rPr lang="ja-JP" altLang="en-US" sz="1300" b="1" dirty="0">
+                <a:ea typeface="+mn-lt"/>
+                <a:cs typeface="+mn-lt"/>
+              </a:rPr>
+              <a:t> </a:t>
+            </a:r>
+            <a:endParaRPr lang="ja-JP" sz="1300" b="1"/>
+          </a:p>
+          <a:p>
+            <a:pPr>
+              <a:lnSpc>
+                <a:spcPct val="150000"/>
+              </a:lnSpc>
+            </a:pPr>
+            <a:r>
+              <a:rPr lang="ja-JP" altLang="en-US" sz="1100">
+                <a:ea typeface="+mn-lt"/>
+                <a:cs typeface="+mn-lt"/>
+              </a:rPr>
+              <a:t>お食事のテーブルや壁面に置</a:t>
+            </a:r>
+            <a:r>
+              <a:rPr lang="ja-JP" sz="1100">
+                <a:ea typeface="+mn-lt"/>
+                <a:cs typeface="+mn-lt"/>
+              </a:rPr>
+              <a:t>い</a:t>
+            </a:r>
+            <a:r>
+              <a:rPr lang="ja-JP" altLang="en-US" sz="1100">
+                <a:ea typeface="+mn-lt"/>
+                <a:cs typeface="+mn-lt"/>
+              </a:rPr>
+              <a:t>てもメニュー表や調味料</a:t>
+            </a:r>
+            <a:r>
+              <a:rPr lang="ja-JP" sz="1100">
+                <a:ea typeface="+mn-lt"/>
+                <a:cs typeface="+mn-lt"/>
+              </a:rPr>
+              <a:t>に</a:t>
+            </a:r>
+            <a:r>
+              <a:rPr lang="ja-JP" altLang="en-US" sz="1100">
+                <a:ea typeface="+mn-lt"/>
+                <a:cs typeface="+mn-lt"/>
+              </a:rPr>
+              <a:t>埋もれず</a:t>
+            </a:r>
+            <a:r>
+              <a:rPr lang="ja-JP" sz="1100">
+                <a:ea typeface="+mn-lt"/>
+                <a:cs typeface="+mn-lt"/>
+              </a:rPr>
+              <a:t>、</a:t>
+            </a:r>
+            <a:r>
+              <a:rPr lang="ja-JP" altLang="en-US" sz="1100">
+                <a:ea typeface="+mn-lt"/>
+                <a:cs typeface="+mn-lt"/>
+              </a:rPr>
+              <a:t>離れ</a:t>
+            </a:r>
+            <a:r>
+              <a:rPr lang="ja-JP" sz="1100">
+                <a:ea typeface="+mn-lt"/>
+                <a:cs typeface="+mn-lt"/>
+              </a:rPr>
+              <a:t>た</a:t>
+            </a:r>
+            <a:r>
+              <a:rPr lang="ja-JP" altLang="en-US" sz="1100">
+                <a:ea typeface="+mn-lt"/>
+                <a:cs typeface="+mn-lt"/>
+              </a:rPr>
+              <a:t>場所から</a:t>
+            </a:r>
+            <a:r>
+              <a:rPr lang="ja-JP" sz="1100">
+                <a:ea typeface="+mn-lt"/>
+                <a:cs typeface="+mn-lt"/>
+              </a:rPr>
+              <a:t>でも</a:t>
+            </a:r>
+            <a:r>
+              <a:rPr lang="ja-JP" altLang="en-US" sz="1100">
+                <a:ea typeface="+mn-lt"/>
+                <a:cs typeface="+mn-lt"/>
+              </a:rPr>
+              <a:t>しっかり目</a:t>
+            </a:r>
+            <a:r>
+              <a:rPr lang="ja-JP" sz="1100">
+                <a:ea typeface="+mn-lt"/>
+                <a:cs typeface="+mn-lt"/>
+              </a:rPr>
+              <a:t>に</a:t>
+            </a:r>
+            <a:r>
+              <a:rPr lang="ja-JP" altLang="en-US" sz="1100">
+                <a:ea typeface="+mn-lt"/>
+                <a:cs typeface="+mn-lt"/>
+              </a:rPr>
+              <a:t>入るサイズ</a:t>
+            </a:r>
+            <a:r>
+              <a:rPr lang="ja-JP" sz="1100">
+                <a:ea typeface="+mn-lt"/>
+                <a:cs typeface="+mn-lt"/>
+              </a:rPr>
+              <a:t>です。</a:t>
+            </a:r>
+            <a:r>
+              <a:rPr lang="ja-JP" altLang="en-US" sz="1100" dirty="0">
+                <a:ea typeface="+mn-lt"/>
+                <a:cs typeface="+mn-lt"/>
+              </a:rPr>
+              <a:t> </a:t>
+            </a:r>
+            <a:endParaRPr lang="ja-JP" sz="1100"/>
+          </a:p>
+        </p:txBody>
+      </p:sp>
+      <p:sp>
+        <p:nvSpPr>
+          <p:cNvPr id="13" name="テキスト ボックス 12">
+            <a:extLst>
+              <a:ext uri="{FF2B5EF4-FFF2-40B4-BE49-F238E27FC236}">
+                <a16:creationId xmlns:a16="http://schemas.microsoft.com/office/drawing/2014/main" id="{8A8E6F85-BB97-98CD-0E60-E7320552F44A}"/>
+              </a:ext>
+            </a:extLst>
+          </p:cNvPr>
+          <p:cNvSpPr txBox="1"/>
+          <p:nvPr/>
+        </p:nvSpPr>
+        <p:spPr>
+          <a:xfrm>
+            <a:off x="324579" y="1986667"/>
+            <a:ext cx="4181786" cy="625171"/>
+          </a:xfrm>
+          <a:prstGeom prst="rect">
+            <a:avLst/>
+          </a:prstGeom>
+          <a:noFill/>
+        </p:spPr>
+        <p:txBody>
+          <a:bodyPr wrap="square" lIns="91440" tIns="45720" rIns="91440" bIns="45720" rtlCol="0" anchor="t">
+            <a:spAutoFit/>
+          </a:bodyPr>
+          <a:lstStyle/>
+          <a:p>
+            <a:pPr>
+              <a:lnSpc>
+                <a:spcPct val="150000"/>
+              </a:lnSpc>
+            </a:pPr>
+            <a:r>
+              <a:rPr lang="ja-JP" altLang="en-US" sz="1300" b="1">
+                <a:ea typeface="+mn-lt"/>
+                <a:cs typeface="+mn-lt"/>
+              </a:rPr>
+              <a:t>② ハガキ</a:t>
+            </a:r>
+            <a:r>
+              <a:rPr lang="ja-JP" sz="1300" b="1">
+                <a:ea typeface="+mn-lt"/>
+                <a:cs typeface="+mn-lt"/>
+              </a:rPr>
+              <a:t>サイズ【レジ横などの省スペース用</a:t>
+            </a:r>
+            <a:r>
+              <a:rPr lang="en-US" altLang="ja-JP" sz="1300" b="1">
+                <a:ea typeface="+mn-lt"/>
+                <a:cs typeface="+mn-lt"/>
+              </a:rPr>
+              <a:t>】</a:t>
+            </a:r>
+            <a:r>
+              <a:rPr lang="ja-JP" sz="1300" b="1" dirty="0">
+                <a:ea typeface="+mn-lt"/>
+                <a:cs typeface="+mn-lt"/>
+              </a:rPr>
+              <a:t> </a:t>
+            </a:r>
+          </a:p>
+          <a:p>
+            <a:pPr>
+              <a:lnSpc>
+                <a:spcPct val="150000"/>
+              </a:lnSpc>
+            </a:pPr>
+            <a:r>
+              <a:rPr lang="ja-JP" sz="1100">
+                <a:ea typeface="+mn-lt"/>
+                <a:cs typeface="+mn-lt"/>
+              </a:rPr>
+              <a:t>レジ周りの</a:t>
+            </a:r>
+            <a:r>
+              <a:rPr lang="ja-JP" altLang="en-US" sz="1100">
+                <a:ea typeface="+mn-lt"/>
+                <a:cs typeface="+mn-lt"/>
+              </a:rPr>
+              <a:t>狭</a:t>
+            </a:r>
+            <a:r>
+              <a:rPr lang="ja-JP" sz="1100">
+                <a:ea typeface="+mn-lt"/>
+                <a:cs typeface="+mn-lt"/>
+              </a:rPr>
+              <a:t>い場所にも邪魔にならず置けるサイズです。 </a:t>
+            </a:r>
+          </a:p>
+        </p:txBody>
+      </p:sp>
+      <p:sp>
+        <p:nvSpPr>
+          <p:cNvPr id="15" name="テキスト ボックス 14">
+            <a:extLst>
+              <a:ext uri="{FF2B5EF4-FFF2-40B4-BE49-F238E27FC236}">
+                <a16:creationId xmlns:a16="http://schemas.microsoft.com/office/drawing/2014/main" id="{BF5118AA-CB9D-21DC-53CB-4A3F88B9FC82}"/>
+              </a:ext>
+            </a:extLst>
+          </p:cNvPr>
+          <p:cNvSpPr txBox="1"/>
+          <p:nvPr/>
+        </p:nvSpPr>
+        <p:spPr>
+          <a:xfrm>
+            <a:off x="324486" y="2715478"/>
+            <a:ext cx="4187760" cy="1433085"/>
+          </a:xfrm>
+          <a:prstGeom prst="rect">
+            <a:avLst/>
+          </a:prstGeom>
+          <a:noFill/>
+        </p:spPr>
+        <p:txBody>
+          <a:bodyPr wrap="square" lIns="91440" tIns="45720" rIns="91440" bIns="45720" rtlCol="0" anchor="t">
+            <a:spAutoFit/>
+          </a:bodyPr>
+          <a:lstStyle/>
+          <a:p>
+            <a:pPr>
+              <a:lnSpc>
+                <a:spcPct val="150000"/>
+              </a:lnSpc>
+            </a:pPr>
+            <a:r>
+              <a:rPr lang="ja-JP" sz="1300" b="1" dirty="0">
+                <a:ea typeface="+mn-lt"/>
+                <a:cs typeface="+mn-lt"/>
+              </a:rPr>
+              <a:t>③ </a:t>
+            </a:r>
+            <a:r>
+              <a:rPr lang="ja-JP" altLang="en-US" sz="1300" b="1">
+                <a:ea typeface="+mn-lt"/>
+                <a:cs typeface="+mn-lt"/>
+              </a:rPr>
+              <a:t>クレジットカー</a:t>
+            </a:r>
+            <a:r>
+              <a:rPr lang="ja-JP" sz="1300" b="1">
+                <a:ea typeface="+mn-lt"/>
+                <a:cs typeface="+mn-lt"/>
+              </a:rPr>
+              <a:t>ドサイズ</a:t>
+            </a:r>
+            <a:endParaRPr lang="ja-JP" altLang="en-US"/>
+          </a:p>
+          <a:p>
+            <a:pPr>
+              <a:lnSpc>
+                <a:spcPct val="150000"/>
+              </a:lnSpc>
+            </a:pPr>
+            <a:r>
+              <a:rPr lang="en-US" altLang="ja-JP" sz="1300" b="1">
+                <a:ea typeface="+mn-lt"/>
+                <a:cs typeface="+mn-lt"/>
+              </a:rPr>
+              <a:t>【</a:t>
+            </a:r>
+            <a:r>
+              <a:rPr lang="ja-JP" altLang="en-US" sz="1300" b="1">
+                <a:ea typeface="+mn-lt"/>
+                <a:cs typeface="+mn-lt"/>
+              </a:rPr>
+              <a:t>お</a:t>
+            </a:r>
+            <a:r>
+              <a:rPr lang="ja-JP" sz="1300" b="1">
+                <a:ea typeface="+mn-lt"/>
+                <a:cs typeface="+mn-lt"/>
+              </a:rPr>
+              <a:t>持</a:t>
+            </a:r>
+            <a:r>
+              <a:rPr lang="ja-JP" altLang="en-US" sz="1300" b="1">
+                <a:ea typeface="+mn-lt"/>
+                <a:cs typeface="+mn-lt"/>
+              </a:rPr>
+              <a:t>ち帰り用ショップカ</a:t>
+            </a:r>
+            <a:r>
+              <a:rPr lang="ja-JP" sz="1300" b="1">
+                <a:ea typeface="+mn-lt"/>
+                <a:cs typeface="+mn-lt"/>
+              </a:rPr>
+              <a:t>ー</a:t>
+            </a:r>
+            <a:r>
+              <a:rPr lang="ja-JP" altLang="en-US" sz="1300" b="1">
+                <a:ea typeface="+mn-lt"/>
+                <a:cs typeface="+mn-lt"/>
+              </a:rPr>
+              <a:t>ド</a:t>
+            </a:r>
+            <a:r>
+              <a:rPr lang="en-US" altLang="ja-JP" sz="1300" b="1">
+                <a:ea typeface="+mn-lt"/>
+                <a:cs typeface="+mn-lt"/>
+              </a:rPr>
+              <a:t>】</a:t>
+            </a:r>
+            <a:r>
+              <a:rPr lang="ja-JP" sz="1300" b="1" dirty="0">
+                <a:ea typeface="+mn-lt"/>
+                <a:cs typeface="+mn-lt"/>
+              </a:rPr>
+              <a:t> </a:t>
+            </a:r>
+            <a:endParaRPr lang="ja-JP"/>
+          </a:p>
+          <a:p>
+            <a:pPr>
+              <a:lnSpc>
+                <a:spcPct val="150000"/>
+              </a:lnSpc>
+            </a:pPr>
+            <a:r>
+              <a:rPr lang="ja-JP" altLang="en-US" sz="1100">
+                <a:ea typeface="+mn-lt"/>
+                <a:cs typeface="+mn-lt"/>
+              </a:rPr>
+              <a:t>一般的な名刺より一回り小さいクレカ</a:t>
+            </a:r>
+            <a:r>
+              <a:rPr lang="ja-JP" sz="1100">
+                <a:ea typeface="+mn-lt"/>
+                <a:cs typeface="+mn-lt"/>
+              </a:rPr>
+              <a:t>サイズ</a:t>
+            </a:r>
+            <a:r>
+              <a:rPr lang="ja-JP" altLang="en-US" sz="1100">
+                <a:ea typeface="+mn-lt"/>
+                <a:cs typeface="+mn-lt"/>
+              </a:rPr>
+              <a:t>を採用し、お客様のお財布のカードポケットに入るよう設計しました。小さい紙面でも一発で読み取れるよう</a:t>
+            </a:r>
+            <a:r>
+              <a:rPr lang="en-US" altLang="ja-JP" sz="1100">
+                <a:ea typeface="+mn-lt"/>
+                <a:cs typeface="+mn-lt"/>
+              </a:rPr>
+              <a:t>QR</a:t>
+            </a:r>
+            <a:r>
+              <a:rPr lang="ja-JP" altLang="en-US" sz="1100">
+                <a:ea typeface="+mn-lt"/>
+                <a:cs typeface="+mn-lt"/>
+              </a:rPr>
+              <a:t>コードを大き</a:t>
+            </a:r>
+            <a:r>
+              <a:rPr lang="ja-JP" sz="1100">
+                <a:ea typeface="+mn-lt"/>
+                <a:cs typeface="+mn-lt"/>
+              </a:rPr>
+              <a:t>く</a:t>
+            </a:r>
+            <a:r>
+              <a:rPr lang="ja-JP" altLang="en-US" sz="1100">
+                <a:ea typeface="+mn-lt"/>
+                <a:cs typeface="+mn-lt"/>
+              </a:rPr>
+              <a:t>配置して</a:t>
+            </a:r>
+            <a:r>
+              <a:rPr lang="ja-JP" sz="1100">
+                <a:ea typeface="+mn-lt"/>
+                <a:cs typeface="+mn-lt"/>
+              </a:rPr>
+              <a:t>い</a:t>
+            </a:r>
+            <a:r>
+              <a:rPr lang="ja-JP" altLang="en-US" sz="1100">
+                <a:ea typeface="+mn-lt"/>
+                <a:cs typeface="+mn-lt"/>
+              </a:rPr>
+              <a:t>ま</a:t>
+            </a:r>
+            <a:r>
+              <a:rPr lang="ja-JP" sz="1100">
+                <a:ea typeface="+mn-lt"/>
+                <a:cs typeface="+mn-lt"/>
+              </a:rPr>
+              <a:t>す。 </a:t>
+            </a:r>
+            <a:endParaRPr lang="ja-JP" sz="1100"/>
+          </a:p>
+        </p:txBody>
+      </p:sp>
+      <p:sp>
+        <p:nvSpPr>
+          <p:cNvPr id="20" name="Rectangle 11">
+            <a:extLst>
+              <a:ext uri="{FF2B5EF4-FFF2-40B4-BE49-F238E27FC236}">
+                <a16:creationId xmlns:a16="http://schemas.microsoft.com/office/drawing/2014/main" id="{F37AB311-8A9C-1209-265E-16D431DBF81F}"/>
+              </a:ext>
+            </a:extLst>
+          </p:cNvPr>
+          <p:cNvSpPr/>
+          <p:nvPr/>
+        </p:nvSpPr>
+        <p:spPr>
+          <a:xfrm>
+            <a:off x="4716602" y="927391"/>
+            <a:ext cx="4955851" cy="468846"/>
+          </a:xfrm>
+          <a:prstGeom prst="rect">
+            <a:avLst/>
+          </a:prstGeom>
+          <a:solidFill>
+            <a:schemeClr val="tx1"/>
+          </a:solidFill>
+          <a:ln>
+            <a:solidFill>
+              <a:schemeClr val="tx1"/>
+            </a:solidFill>
+          </a:ln>
+        </p:spPr>
+        <p:style>
+          <a:lnRef idx="1">
+            <a:schemeClr val="accent1"/>
+          </a:lnRef>
+          <a:fillRef idx="3">
+            <a:schemeClr val="accent1"/>
+          </a:fillRef>
+          <a:effectRef idx="2">
+            <a:schemeClr val="accent1"/>
+          </a:effectRef>
+          <a:fontRef idx="minor">
+            <a:schemeClr val="lt1"/>
+          </a:fontRef>
+        </p:style>
+        <p:txBody>
+          <a:bodyPr lIns="91440" tIns="45720" rIns="91440" bIns="45720" rtlCol="0" anchor="ctr"/>
+          <a:lstStyle/>
+          <a:p>
+            <a:pPr algn="ctr">
+              <a:lnSpc>
+                <a:spcPct val="125000"/>
+              </a:lnSpc>
+              <a:defRPr sz="1400" b="1">
+                <a:solidFill>
+                  <a:srgbClr val="FFFFFF"/>
+                </a:solidFill>
+                <a:latin typeface="Meiryo"/>
+              </a:defRPr>
+            </a:pPr>
+            <a:r>
+              <a:rPr lang="ja-JP" sz="1600">
+                <a:ea typeface="+mn-lt"/>
+                <a:cs typeface="+mn-lt"/>
+              </a:rPr>
+              <a:t>■作成デザイン プレビュー </a:t>
+            </a:r>
+            <a:endParaRPr lang="ja-JP" sz="1600"/>
+          </a:p>
+        </p:txBody>
+      </p:sp>
+      <p:sp>
+        <p:nvSpPr>
+          <p:cNvPr id="21" name="正方形/長方形 20">
+            <a:extLst>
+              <a:ext uri="{FF2B5EF4-FFF2-40B4-BE49-F238E27FC236}">
+                <a16:creationId xmlns:a16="http://schemas.microsoft.com/office/drawing/2014/main" id="{F4D9B16D-66BC-BEF3-2325-2AC53D742962}"/>
+              </a:ext>
+            </a:extLst>
+          </p:cNvPr>
+          <p:cNvSpPr/>
+          <p:nvPr/>
+        </p:nvSpPr>
+        <p:spPr>
+          <a:xfrm>
+            <a:off x="4721311" y="1397424"/>
+            <a:ext cx="4954230" cy="4673268"/>
+          </a:xfrm>
+          <a:prstGeom prst="rect">
+            <a:avLst/>
+          </a:prstGeom>
+          <a:noFill/>
+          <a:ln w="12700">
+            <a:solidFill>
+              <a:schemeClr val="tx1"/>
+            </a:solidFill>
+          </a:ln>
+        </p:spPr>
+        <p:style>
+          <a:lnRef idx="2">
+            <a:schemeClr val="accent1">
+              <a:shade val="15000"/>
+            </a:schemeClr>
+          </a:lnRef>
+          <a:fillRef idx="1">
+            <a:schemeClr val="accent1"/>
+          </a:fillRef>
+          <a:effectRef idx="0">
+            <a:schemeClr val="accent1"/>
+          </a:effectRef>
+          <a:fontRef idx="minor">
+            <a:schemeClr val="lt1"/>
+          </a:fontRef>
+        </p:style>
+        <p:txBody>
+          <a:bodyPr rtlCol="0" anchor="ctr"/>
+          <a:lstStyle/>
+          <a:p>
+            <a:pPr algn="ctr"/>
+            <a:endParaRPr lang="ja-JP" altLang="en-US"/>
+          </a:p>
+        </p:txBody>
+      </p:sp>
+      <p:sp>
+        <p:nvSpPr>
+          <p:cNvPr id="22" name="TextBox 25">
+            <a:extLst>
+              <a:ext uri="{FF2B5EF4-FFF2-40B4-BE49-F238E27FC236}">
+                <a16:creationId xmlns:a16="http://schemas.microsoft.com/office/drawing/2014/main" id="{82F980CF-3A45-8241-A591-D4B0007F0E5B}"/>
+              </a:ext>
+            </a:extLst>
+          </p:cNvPr>
+          <p:cNvSpPr txBox="1"/>
+          <p:nvPr/>
+        </p:nvSpPr>
+        <p:spPr>
+          <a:xfrm>
+            <a:off x="4723995" y="5274766"/>
+            <a:ext cx="2027518" cy="502920"/>
+          </a:xfrm>
+          <a:prstGeom prst="rect">
+            <a:avLst/>
+          </a:prstGeom>
+          <a:noFill/>
+        </p:spPr>
+        <p:txBody>
+          <a:bodyPr wrap="square" lIns="73152" rIns="73152" anchor="t">
             <a:spAutoFit/>
           </a:bodyPr>
           <a:lstStyle>
@@ -6870,558 +8566,33 @@
             </a:lvl9pPr>
           </a:lstStyle>
           <a:p>
-            <a:pPr>
+            <a:pPr algn="ctr">
               <a:lnSpc>
-                <a:spcPct val="150000"/>
+                <a:spcPct val="120000"/>
               </a:lnSpc>
+              <a:defRPr sz="1100" b="1">
+                <a:solidFill>
+                  <a:srgbClr val="2B2B2B"/>
+                </a:solidFill>
+                <a:latin typeface="Meiryo"/>
+              </a:defRPr>
             </a:pPr>
             <a:r>
-              <a:rPr lang="ja-JP" altLang="en-US" sz="1600" b="0" i="0" u="none" strike="noStrike" baseline="0" dirty="0">
-                <a:solidFill>
-                  <a:srgbClr val="000000"/>
-                </a:solidFill>
-                <a:latin typeface="メイリオ" panose="020B0604030504040204" pitchFamily="50" charset="-128"/>
-                <a:ea typeface="メイリオ" panose="020B0604030504040204" pitchFamily="50" charset="-128"/>
-              </a:rPr>
-              <a:t>■</a:t>
-            </a:r>
-            <a:r>
-              <a:rPr lang="ja-JP" altLang="en-US" sz="1600" dirty="0">
-                <a:solidFill>
-                  <a:srgbClr val="000000"/>
-                </a:solidFill>
-                <a:latin typeface="メイリオ" panose="020B0604030504040204" pitchFamily="50" charset="-128"/>
-                <a:ea typeface="メイリオ" panose="020B0604030504040204" pitchFamily="50" charset="-128"/>
-              </a:rPr>
-              <a:t>診断基準と適合レベル</a:t>
-            </a:r>
-            <a:endParaRPr lang="en-US" altLang="ja-JP" sz="1600" dirty="0">
-              <a:solidFill>
-                <a:srgbClr val="000000"/>
-              </a:solidFill>
-              <a:latin typeface="メイリオ" panose="020B0604030504040204" pitchFamily="50" charset="-128"/>
-              <a:ea typeface="メイリオ" panose="020B0604030504040204" pitchFamily="50" charset="-128"/>
-            </a:endParaRPr>
-          </a:p>
-          <a:p>
-            <a:pPr>
-              <a:lnSpc>
-                <a:spcPct val="150000"/>
-              </a:lnSpc>
-            </a:pPr>
-            <a:r>
-              <a:rPr lang="en-US" altLang="ja-JP" sz="1400" b="0" i="0" u="none" strike="noStrike" baseline="0" dirty="0">
-                <a:solidFill>
-                  <a:srgbClr val="000000"/>
-                </a:solidFill>
-                <a:latin typeface="メイリオ" panose="020B0604030504040204" pitchFamily="50" charset="-128"/>
-                <a:ea typeface="メイリオ" panose="020B0604030504040204" pitchFamily="50" charset="-128"/>
-              </a:rPr>
-              <a:t>WCAG2.2</a:t>
-            </a:r>
-            <a:r>
-              <a:rPr lang="ja-JP" altLang="en-US" sz="1400" dirty="0">
-                <a:solidFill>
-                  <a:srgbClr val="000000"/>
-                </a:solidFill>
-                <a:latin typeface="メイリオ" panose="020B0604030504040204" pitchFamily="50" charset="-128"/>
-                <a:ea typeface="メイリオ" panose="020B0604030504040204" pitchFamily="50" charset="-128"/>
-              </a:rPr>
-              <a:t>　適合レベル</a:t>
-            </a:r>
-            <a:r>
-              <a:rPr lang="en-US" altLang="ja-JP" sz="1400" dirty="0">
-                <a:solidFill>
-                  <a:srgbClr val="000000"/>
-                </a:solidFill>
-                <a:latin typeface="メイリオ" panose="020B0604030504040204" pitchFamily="50" charset="-128"/>
-                <a:ea typeface="メイリオ" panose="020B0604030504040204" pitchFamily="50" charset="-128"/>
-              </a:rPr>
-              <a:t>A</a:t>
-            </a:r>
-            <a:r>
-              <a:rPr lang="ja-JP" altLang="en-US" sz="1400" dirty="0">
-                <a:solidFill>
-                  <a:srgbClr val="000000"/>
-                </a:solidFill>
-                <a:latin typeface="メイリオ" panose="020B0604030504040204" pitchFamily="50" charset="-128"/>
-                <a:ea typeface="メイリオ" panose="020B0604030504040204" pitchFamily="50" charset="-128"/>
-              </a:rPr>
-              <a:t>および</a:t>
-            </a:r>
-            <a:r>
-              <a:rPr lang="en-US" altLang="ja-JP" sz="1400" dirty="0">
-                <a:solidFill>
-                  <a:srgbClr val="000000"/>
-                </a:solidFill>
-                <a:latin typeface="メイリオ" panose="020B0604030504040204" pitchFamily="50" charset="-128"/>
-                <a:ea typeface="メイリオ" panose="020B0604030504040204" pitchFamily="50" charset="-128"/>
-              </a:rPr>
-              <a:t>AA</a:t>
-            </a:r>
-          </a:p>
-          <a:p>
-            <a:pPr>
-              <a:lnSpc>
-                <a:spcPct val="150000"/>
-              </a:lnSpc>
-            </a:pPr>
-            <a:endParaRPr lang="en-US" altLang="ja-JP" sz="1400" b="0" i="0" u="none" strike="noStrike" baseline="0" dirty="0">
-              <a:solidFill>
-                <a:srgbClr val="000000"/>
-              </a:solidFill>
-              <a:latin typeface="メイリオ" panose="020B0604030504040204" pitchFamily="50" charset="-128"/>
-              <a:ea typeface="メイリオ" panose="020B0604030504040204" pitchFamily="50" charset="-128"/>
-            </a:endParaRPr>
-          </a:p>
-          <a:p>
-            <a:pPr>
-              <a:lnSpc>
-                <a:spcPct val="150000"/>
-              </a:lnSpc>
-            </a:pPr>
-            <a:r>
-              <a:rPr lang="ja-JP" altLang="en-US" sz="1600" dirty="0">
-                <a:solidFill>
-                  <a:srgbClr val="000000"/>
-                </a:solidFill>
-                <a:latin typeface="メイリオ" panose="020B0604030504040204" pitchFamily="50" charset="-128"/>
-                <a:ea typeface="メイリオ" panose="020B0604030504040204" pitchFamily="50" charset="-128"/>
-              </a:rPr>
-              <a:t>■満たしている適合レベル</a:t>
-            </a:r>
-            <a:endParaRPr lang="en-US" altLang="ja-JP" sz="1600" dirty="0">
-              <a:solidFill>
-                <a:srgbClr val="000000"/>
-              </a:solidFill>
-              <a:latin typeface="メイリオ" panose="020B0604030504040204" pitchFamily="50" charset="-128"/>
-              <a:ea typeface="メイリオ" panose="020B0604030504040204" pitchFamily="50" charset="-128"/>
-            </a:endParaRPr>
-          </a:p>
-          <a:p>
-            <a:pPr>
-              <a:lnSpc>
-                <a:spcPct val="150000"/>
-              </a:lnSpc>
-            </a:pPr>
-            <a:r>
-              <a:rPr lang="ja-JP" altLang="en-US" sz="1400" b="0" i="0" u="none" strike="noStrike" baseline="0" dirty="0">
-                <a:solidFill>
-                  <a:srgbClr val="000000"/>
-                </a:solidFill>
-                <a:latin typeface="メイリオ" panose="020B0604030504040204" pitchFamily="50" charset="-128"/>
-                <a:ea typeface="メイリオ" panose="020B0604030504040204" pitchFamily="50" charset="-128"/>
-              </a:rPr>
-              <a:t>適合レベル</a:t>
-            </a:r>
-            <a:r>
-              <a:rPr lang="en-US" altLang="ja-JP" sz="1400" b="0" i="0" u="none" strike="noStrike" baseline="0" dirty="0">
-                <a:solidFill>
-                  <a:srgbClr val="000000"/>
-                </a:solidFill>
-                <a:latin typeface="メイリオ" panose="020B0604030504040204" pitchFamily="50" charset="-128"/>
-                <a:ea typeface="メイリオ" panose="020B0604030504040204" pitchFamily="50" charset="-128"/>
-              </a:rPr>
-              <a:t>A</a:t>
-            </a:r>
-            <a:r>
-              <a:rPr lang="ja-JP" altLang="en-US" sz="1400" b="0" i="0" u="none" strike="noStrike" baseline="0" dirty="0">
-                <a:solidFill>
-                  <a:srgbClr val="000000"/>
-                </a:solidFill>
-                <a:latin typeface="メイリオ" panose="020B0604030504040204" pitchFamily="50" charset="-128"/>
-                <a:ea typeface="メイリオ" panose="020B0604030504040204" pitchFamily="50" charset="-128"/>
-              </a:rPr>
-              <a:t>に一部準拠</a:t>
-            </a:r>
-            <a:endParaRPr lang="en-US" altLang="ja-JP" sz="1400" b="0" i="0" u="none" strike="noStrike" baseline="0" dirty="0">
-              <a:solidFill>
-                <a:srgbClr val="000000"/>
-              </a:solidFill>
-              <a:latin typeface="メイリオ" panose="020B0604030504040204" pitchFamily="50" charset="-128"/>
-              <a:ea typeface="メイリオ" panose="020B0604030504040204" pitchFamily="50" charset="-128"/>
-            </a:endParaRPr>
-          </a:p>
-          <a:p>
-            <a:pPr>
-              <a:lnSpc>
-                <a:spcPct val="150000"/>
-              </a:lnSpc>
-            </a:pPr>
-            <a:endParaRPr lang="en-US" altLang="ja-JP" sz="1400" b="0" i="0" u="none" strike="noStrike" baseline="0" dirty="0">
-              <a:solidFill>
-                <a:srgbClr val="000000"/>
-              </a:solidFill>
-              <a:latin typeface="メイリオ" panose="020B0604030504040204" pitchFamily="50" charset="-128"/>
-              <a:ea typeface="メイリオ" panose="020B0604030504040204" pitchFamily="50" charset="-128"/>
-            </a:endParaRPr>
-          </a:p>
-          <a:p>
-            <a:pPr>
-              <a:lnSpc>
-                <a:spcPct val="150000"/>
-              </a:lnSpc>
-            </a:pPr>
-            <a:r>
-              <a:rPr lang="ja-JP" altLang="en-US" sz="1600" dirty="0">
-                <a:solidFill>
-                  <a:srgbClr val="000000"/>
-                </a:solidFill>
-                <a:latin typeface="メイリオ" panose="020B0604030504040204" pitchFamily="50" charset="-128"/>
-                <a:ea typeface="メイリオ" panose="020B0604030504040204" pitchFamily="50" charset="-128"/>
-              </a:rPr>
-              <a:t>■依存したウェブコンテンツ技術のリスト</a:t>
-            </a:r>
-            <a:endParaRPr lang="en-US" altLang="ja-JP" sz="1600" b="0" i="0" u="none" strike="noStrike" baseline="0" dirty="0">
-              <a:solidFill>
-                <a:srgbClr val="000000"/>
-              </a:solidFill>
-              <a:latin typeface="メイリオ" panose="020B0604030504040204" pitchFamily="50" charset="-128"/>
-              <a:ea typeface="メイリオ" panose="020B0604030504040204" pitchFamily="50" charset="-128"/>
-            </a:endParaRPr>
-          </a:p>
-          <a:p>
-            <a:pPr>
-              <a:lnSpc>
-                <a:spcPct val="150000"/>
-              </a:lnSpc>
-            </a:pPr>
-            <a:r>
-              <a:rPr lang="en-US" altLang="ja-JP" sz="1400" dirty="0"/>
-              <a:t>HTML5</a:t>
-            </a:r>
-            <a:r>
-              <a:rPr lang="ja-JP" altLang="en-US" sz="1400" dirty="0"/>
-              <a:t>、</a:t>
-            </a:r>
-            <a:r>
-              <a:rPr lang="en-US" altLang="ja-JP" sz="1400" dirty="0"/>
-              <a:t>CSS3</a:t>
-            </a:r>
-            <a:r>
-              <a:rPr lang="ja-JP" altLang="en-US" sz="1400" dirty="0"/>
-              <a:t>、</a:t>
-            </a:r>
-            <a:r>
-              <a:rPr lang="en-US" altLang="ja-JP" sz="1400" dirty="0"/>
-              <a:t>JavaScript</a:t>
-            </a:r>
-          </a:p>
-          <a:p>
-            <a:pPr>
-              <a:lnSpc>
-                <a:spcPct val="150000"/>
-              </a:lnSpc>
-            </a:pPr>
-            <a:endParaRPr lang="en-US" altLang="ja-JP" sz="1400" b="0" i="0" u="none" strike="noStrike" baseline="0" dirty="0">
-              <a:solidFill>
-                <a:srgbClr val="000000"/>
-              </a:solidFill>
-              <a:latin typeface="メイリオ" panose="020B0604030504040204" pitchFamily="50" charset="-128"/>
-              <a:ea typeface="メイリオ" panose="020B0604030504040204" pitchFamily="50" charset="-128"/>
-            </a:endParaRPr>
-          </a:p>
-          <a:p>
-            <a:pPr>
-              <a:lnSpc>
-                <a:spcPct val="150000"/>
-              </a:lnSpc>
-            </a:pPr>
-            <a:r>
-              <a:rPr lang="ja-JP" altLang="en-US" sz="1600" b="0" i="0" u="none" strike="noStrike" baseline="0" dirty="0">
-                <a:solidFill>
-                  <a:srgbClr val="000000"/>
-                </a:solidFill>
-                <a:latin typeface="メイリオ" panose="020B0604030504040204" pitchFamily="50" charset="-128"/>
-                <a:ea typeface="メイリオ" panose="020B0604030504040204" pitchFamily="50" charset="-128"/>
-              </a:rPr>
-              <a:t>■</a:t>
-            </a:r>
-            <a:r>
-              <a:rPr lang="ja-JP" altLang="en-US" sz="1600" dirty="0"/>
-              <a:t>試験対象のウェブページを選択した方法</a:t>
-            </a:r>
-            <a:endParaRPr lang="en-US" altLang="ja-JP" sz="1600" dirty="0"/>
-          </a:p>
-          <a:p>
-            <a:pPr>
-              <a:lnSpc>
-                <a:spcPct val="150000"/>
-              </a:lnSpc>
-            </a:pPr>
-            <a:r>
-              <a:rPr kumimoji="1" lang="ja-JP" altLang="en-US" sz="1400" dirty="0">
-                <a:solidFill>
-                  <a:sysClr val="windowText" lastClr="000000"/>
-                </a:solidFill>
-                <a:latin typeface="メイリオ" panose="020B0604030504040204" pitchFamily="50" charset="-128"/>
-                <a:ea typeface="メイリオ" panose="020B0604030504040204" pitchFamily="50" charset="-128"/>
-              </a:rPr>
-              <a:t>岩内町移住情報サイト　</a:t>
-            </a:r>
-            <a:r>
-              <a:rPr kumimoji="1" lang="en-US" altLang="ja-JP" sz="1400" dirty="0">
-                <a:solidFill>
-                  <a:sysClr val="windowText" lastClr="000000"/>
-                </a:solidFill>
-                <a:latin typeface="メイリオ" panose="020B0604030504040204" pitchFamily="50" charset="-128"/>
-                <a:ea typeface="メイリオ" panose="020B0604030504040204" pitchFamily="50" charset="-128"/>
-              </a:rPr>
-              <a:t>IWANAILIFE</a:t>
-            </a:r>
-            <a:r>
-              <a:rPr kumimoji="1" lang="ja-JP" altLang="en-US" sz="1400" dirty="0">
-                <a:solidFill>
-                  <a:sysClr val="windowText" lastClr="000000"/>
-                </a:solidFill>
-                <a:latin typeface="メイリオ" panose="020B0604030504040204" pitchFamily="50" charset="-128"/>
-                <a:ea typeface="メイリオ" panose="020B0604030504040204" pitchFamily="50" charset="-128"/>
-              </a:rPr>
-              <a:t>　</a:t>
-            </a:r>
-            <a:r>
-              <a:rPr kumimoji="1" lang="en-US" altLang="ja-JP" sz="1400" dirty="0">
-                <a:solidFill>
-                  <a:sysClr val="windowText" lastClr="000000"/>
-                </a:solidFill>
-                <a:latin typeface="メイリオ" panose="020B0604030504040204" pitchFamily="50" charset="-128"/>
-                <a:ea typeface="メイリオ" panose="020B0604030504040204" pitchFamily="50" charset="-128"/>
-                <a:hlinkClick r:id="rId2"/>
-              </a:rPr>
-              <a:t>https://iwanai-iju.jp/</a:t>
-            </a:r>
-            <a:r>
-              <a:rPr kumimoji="1" lang="ja-JP" altLang="en-US" sz="1400" dirty="0">
-                <a:solidFill>
-                  <a:sysClr val="windowText" lastClr="000000"/>
-                </a:solidFill>
-                <a:latin typeface="メイリオ" panose="020B0604030504040204" pitchFamily="50" charset="-128"/>
-                <a:ea typeface="メイリオ" panose="020B0604030504040204" pitchFamily="50" charset="-128"/>
-              </a:rPr>
-              <a:t> の全ページ</a:t>
-            </a:r>
-            <a:endParaRPr kumimoji="1" lang="en-US" altLang="ja-JP" sz="1400" dirty="0">
-              <a:solidFill>
-                <a:sysClr val="windowText" lastClr="000000"/>
-              </a:solidFill>
-              <a:latin typeface="メイリオ" panose="020B0604030504040204" pitchFamily="50" charset="-128"/>
-              <a:ea typeface="メイリオ" panose="020B0604030504040204" pitchFamily="50" charset="-128"/>
-            </a:endParaRPr>
-          </a:p>
-          <a:p>
-            <a:pPr>
-              <a:lnSpc>
-                <a:spcPct val="150000"/>
-              </a:lnSpc>
-            </a:pPr>
-            <a:r>
-              <a:rPr kumimoji="1" lang="en-US" altLang="ja-JP" sz="1400" dirty="0">
-                <a:solidFill>
-                  <a:sysClr val="windowText" lastClr="000000"/>
-                </a:solidFill>
-                <a:latin typeface="メイリオ" panose="020B0604030504040204" pitchFamily="50" charset="-128"/>
-                <a:ea typeface="メイリオ" panose="020B0604030504040204" pitchFamily="50" charset="-128"/>
-              </a:rPr>
-              <a:t>※</a:t>
-            </a:r>
-            <a:r>
-              <a:rPr kumimoji="1" lang="ja-JP" altLang="en-US" sz="1400" dirty="0">
-                <a:solidFill>
-                  <a:sysClr val="windowText" lastClr="000000"/>
-                </a:solidFill>
-                <a:latin typeface="メイリオ" panose="020B0604030504040204" pitchFamily="50" charset="-128"/>
-                <a:ea typeface="メイリオ" panose="020B0604030504040204" pitchFamily="50" charset="-128"/>
-              </a:rPr>
-              <a:t>試験を実施したページは次ページに記載</a:t>
-            </a:r>
-            <a:endParaRPr kumimoji="1" lang="en-US" altLang="ja-JP" sz="1400" dirty="0">
-              <a:solidFill>
-                <a:sysClr val="windowText" lastClr="000000"/>
-              </a:solidFill>
-              <a:latin typeface="メイリオ" panose="020B0604030504040204" pitchFamily="50" charset="-128"/>
-              <a:ea typeface="メイリオ" panose="020B0604030504040204" pitchFamily="50" charset="-128"/>
-            </a:endParaRPr>
-          </a:p>
-          <a:p>
-            <a:pPr>
-              <a:lnSpc>
-                <a:spcPct val="150000"/>
-              </a:lnSpc>
-            </a:pPr>
-            <a:endParaRPr kumimoji="1" lang="en-US" altLang="ja-JP" sz="1400" dirty="0">
-              <a:solidFill>
-                <a:sysClr val="windowText" lastClr="000000"/>
-              </a:solidFill>
-              <a:latin typeface="メイリオ" panose="020B0604030504040204" pitchFamily="50" charset="-128"/>
-              <a:ea typeface="メイリオ" panose="020B0604030504040204" pitchFamily="50" charset="-128"/>
-            </a:endParaRPr>
-          </a:p>
-          <a:p>
-            <a:pPr>
-              <a:lnSpc>
-                <a:spcPct val="150000"/>
-              </a:lnSpc>
-            </a:pPr>
-            <a:r>
-              <a:rPr kumimoji="1" lang="ja-JP" altLang="en-US" sz="1600" dirty="0">
-                <a:solidFill>
-                  <a:sysClr val="windowText" lastClr="000000"/>
-                </a:solidFill>
-                <a:latin typeface="メイリオ" panose="020B0604030504040204" pitchFamily="50" charset="-128"/>
-                <a:ea typeface="メイリオ" panose="020B0604030504040204" pitchFamily="50" charset="-128"/>
-              </a:rPr>
-              <a:t>■試験実施期間</a:t>
-            </a:r>
-            <a:endParaRPr kumimoji="1" lang="en-US" altLang="ja-JP" sz="1600" dirty="0">
-              <a:solidFill>
-                <a:sysClr val="windowText" lastClr="000000"/>
-              </a:solidFill>
-              <a:latin typeface="メイリオ" panose="020B0604030504040204" pitchFamily="50" charset="-128"/>
-              <a:ea typeface="メイリオ" panose="020B0604030504040204" pitchFamily="50" charset="-128"/>
-            </a:endParaRPr>
-          </a:p>
-          <a:p>
-            <a:pPr>
-              <a:lnSpc>
-                <a:spcPct val="150000"/>
-              </a:lnSpc>
-            </a:pPr>
-            <a:r>
-              <a:rPr kumimoji="1" lang="en-US" altLang="ja-JP" sz="1400" dirty="0">
-                <a:solidFill>
-                  <a:sysClr val="windowText" lastClr="000000"/>
-                </a:solidFill>
-                <a:latin typeface="メイリオ" panose="020B0604030504040204" pitchFamily="50" charset="-128"/>
-                <a:ea typeface="メイリオ" panose="020B0604030504040204" pitchFamily="50" charset="-128"/>
-              </a:rPr>
-              <a:t>2025</a:t>
-            </a:r>
-            <a:r>
-              <a:rPr kumimoji="1" lang="ja-JP" altLang="en-US" sz="1400" dirty="0">
-                <a:solidFill>
-                  <a:sysClr val="windowText" lastClr="000000"/>
-                </a:solidFill>
-                <a:latin typeface="メイリオ" panose="020B0604030504040204" pitchFamily="50" charset="-128"/>
-                <a:ea typeface="メイリオ" panose="020B0604030504040204" pitchFamily="50" charset="-128"/>
-              </a:rPr>
-              <a:t>年</a:t>
-            </a:r>
-            <a:r>
-              <a:rPr kumimoji="1" lang="en-US" altLang="ja-JP" sz="1400" dirty="0">
-                <a:solidFill>
-                  <a:sysClr val="windowText" lastClr="000000"/>
-                </a:solidFill>
-                <a:latin typeface="メイリオ" panose="020B0604030504040204" pitchFamily="50" charset="-128"/>
-                <a:ea typeface="メイリオ" panose="020B0604030504040204" pitchFamily="50" charset="-128"/>
-              </a:rPr>
-              <a:t>3</a:t>
-            </a:r>
-            <a:r>
-              <a:rPr kumimoji="1" lang="ja-JP" altLang="en-US" sz="1400" dirty="0">
-                <a:solidFill>
-                  <a:sysClr val="windowText" lastClr="000000"/>
-                </a:solidFill>
-                <a:latin typeface="メイリオ" panose="020B0604030504040204" pitchFamily="50" charset="-128"/>
-                <a:ea typeface="メイリオ" panose="020B0604030504040204" pitchFamily="50" charset="-128"/>
-              </a:rPr>
-              <a:t>月</a:t>
-            </a:r>
-            <a:r>
-              <a:rPr kumimoji="1" lang="en-US" altLang="ja-JP" sz="1400" dirty="0">
-                <a:solidFill>
-                  <a:sysClr val="windowText" lastClr="000000"/>
-                </a:solidFill>
-                <a:latin typeface="メイリオ" panose="020B0604030504040204" pitchFamily="50" charset="-128"/>
-                <a:ea typeface="メイリオ" panose="020B0604030504040204" pitchFamily="50" charset="-128"/>
-              </a:rPr>
-              <a:t>28</a:t>
-            </a:r>
-            <a:r>
-              <a:rPr kumimoji="1" lang="ja-JP" altLang="en-US" sz="1400" dirty="0">
-                <a:solidFill>
-                  <a:sysClr val="windowText" lastClr="000000"/>
-                </a:solidFill>
-                <a:latin typeface="メイリオ" panose="020B0604030504040204" pitchFamily="50" charset="-128"/>
-                <a:ea typeface="メイリオ" panose="020B0604030504040204" pitchFamily="50" charset="-128"/>
-              </a:rPr>
-              <a:t>日～</a:t>
-            </a:r>
-            <a:r>
-              <a:rPr kumimoji="1" lang="en-US" altLang="ja-JP" sz="1400" dirty="0">
-                <a:solidFill>
-                  <a:sysClr val="windowText" lastClr="000000"/>
-                </a:solidFill>
-                <a:latin typeface="メイリオ" panose="020B0604030504040204" pitchFamily="50" charset="-128"/>
-                <a:ea typeface="メイリオ" panose="020B0604030504040204" pitchFamily="50" charset="-128"/>
-              </a:rPr>
-              <a:t> 2025</a:t>
-            </a:r>
-            <a:r>
-              <a:rPr kumimoji="1" lang="ja-JP" altLang="en-US" sz="1400" dirty="0">
-                <a:solidFill>
-                  <a:sysClr val="windowText" lastClr="000000"/>
-                </a:solidFill>
-                <a:latin typeface="メイリオ" panose="020B0604030504040204" pitchFamily="50" charset="-128"/>
-                <a:ea typeface="メイリオ" panose="020B0604030504040204" pitchFamily="50" charset="-128"/>
-              </a:rPr>
-              <a:t>年</a:t>
-            </a:r>
-            <a:r>
-              <a:rPr kumimoji="1" lang="en-US" altLang="ja-JP" sz="1400" dirty="0">
-                <a:solidFill>
-                  <a:sysClr val="windowText" lastClr="000000"/>
-                </a:solidFill>
-                <a:latin typeface="メイリオ" panose="020B0604030504040204" pitchFamily="50" charset="-128"/>
-                <a:ea typeface="メイリオ" panose="020B0604030504040204" pitchFamily="50" charset="-128"/>
-              </a:rPr>
-              <a:t>3</a:t>
-            </a:r>
-            <a:r>
-              <a:rPr kumimoji="1" lang="ja-JP" altLang="en-US" sz="1400" dirty="0">
-                <a:solidFill>
-                  <a:sysClr val="windowText" lastClr="000000"/>
-                </a:solidFill>
-                <a:latin typeface="メイリオ" panose="020B0604030504040204" pitchFamily="50" charset="-128"/>
-                <a:ea typeface="メイリオ" panose="020B0604030504040204" pitchFamily="50" charset="-128"/>
-              </a:rPr>
-              <a:t>月</a:t>
-            </a:r>
-            <a:r>
-              <a:rPr kumimoji="1" lang="en-US" altLang="ja-JP" sz="1400" dirty="0">
-                <a:solidFill>
-                  <a:sysClr val="windowText" lastClr="000000"/>
-                </a:solidFill>
-                <a:latin typeface="メイリオ" panose="020B0604030504040204" pitchFamily="50" charset="-128"/>
-                <a:ea typeface="メイリオ" panose="020B0604030504040204" pitchFamily="50" charset="-128"/>
-              </a:rPr>
-              <a:t>31</a:t>
-            </a:r>
-            <a:r>
-              <a:rPr kumimoji="1" lang="ja-JP" altLang="en-US" sz="1400" dirty="0">
-                <a:solidFill>
-                  <a:sysClr val="windowText" lastClr="000000"/>
-                </a:solidFill>
-                <a:latin typeface="メイリオ" panose="020B0604030504040204" pitchFamily="50" charset="-128"/>
-                <a:ea typeface="メイリオ" panose="020B0604030504040204" pitchFamily="50" charset="-128"/>
-              </a:rPr>
-              <a:t>日</a:t>
-            </a:r>
-            <a:endParaRPr kumimoji="1" lang="en-US" altLang="ja-JP" sz="1400" dirty="0">
-              <a:solidFill>
-                <a:sysClr val="windowText" lastClr="000000"/>
-              </a:solidFill>
-              <a:latin typeface="メイリオ" panose="020B0604030504040204" pitchFamily="50" charset="-128"/>
-              <a:ea typeface="メイリオ" panose="020B0604030504040204" pitchFamily="50" charset="-128"/>
-            </a:endParaRPr>
-          </a:p>
-        </p:txBody>
-      </p:sp>
-      <p:sp>
-        <p:nvSpPr>
-          <p:cNvPr id="3" name="テキスト ボックス 2">
+              <a:t>▲ A5 / ハガキサイズ</a:t>
+            </a:r>
+            <a:br/>
+            <a:r>
+              <a:t>（卓上・壁面・レジ横POP）</a:t>
+            </a:r>
+          </a:p>
+        </p:txBody>
+      </p:sp>
+      <p:sp>
+        <p:nvSpPr>
+          <p:cNvPr id="24" name="TextBox 28">
             <a:extLst>
               <a:ext uri="{FF2B5EF4-FFF2-40B4-BE49-F238E27FC236}">
-                <a16:creationId xmlns:a16="http://schemas.microsoft.com/office/drawing/2014/main" id="{7232F701-B778-7ABB-27BB-ADA102EEAFEA}"/>
+                <a16:creationId xmlns:a16="http://schemas.microsoft.com/office/drawing/2014/main" id="{8FBE2A92-AEF0-2B30-1EBC-5415326474A7}"/>
               </a:ext>
             </a:extLst>
           </p:cNvPr>
@@ -7430,8 +8601,8 @@
         </p:nvSpPr>
         <p:spPr>
           <a:xfrm>
-            <a:off x="227573" y="44659"/>
-            <a:ext cx="2582758" cy="307777"/>
+            <a:off x="7200519" y="5274876"/>
+            <a:ext cx="2484908" cy="502920"/>
           </a:xfrm>
           <a:prstGeom prst="rect">
             <a:avLst/>
@@ -7439,20 +8610,123 @@
           <a:noFill/>
         </p:spPr>
         <p:txBody>
-          <a:bodyPr wrap="none" rtlCol="0">
+          <a:bodyPr wrap="square" lIns="73152" rIns="73152" anchor="t">
             <a:spAutoFit/>
           </a:bodyPr>
-          <a:lstStyle/>
-          <a:p>
-            <a:r>
-              <a:rPr kumimoji="1" lang="en-US" altLang="ja-JP" sz="1400" b="1" dirty="0"/>
-              <a:t>1. </a:t>
-            </a:r>
-            <a:r>
-              <a:rPr kumimoji="1" lang="ja-JP" altLang="en-US" sz="1400" b="1" dirty="0"/>
-              <a:t>アクセシビリティ診断結果</a:t>
-            </a:r>
-            <a:endParaRPr kumimoji="1" lang="en-US" altLang="ja-JP" sz="1400" b="1" dirty="0"/>
+          <a:lstStyle>
+            <a:defPPr>
+              <a:defRPr lang="en-US"/>
+            </a:defPPr>
+            <a:lvl1pPr marL="0" algn="l" defTabSz="457200" rtl="0" eaLnBrk="1" latinLnBrk="0" hangingPunct="1">
+              <a:defRPr sz="1800" kern="1200">
+                <a:solidFill>
+                  <a:schemeClr val="tx1"/>
+                </a:solidFill>
+                <a:latin typeface="+mn-lt"/>
+                <a:ea typeface="+mn-ea"/>
+                <a:cs typeface="+mn-cs"/>
+              </a:defRPr>
+            </a:lvl1pPr>
+            <a:lvl2pPr marL="457200" algn="l" defTabSz="457200" rtl="0" eaLnBrk="1" latinLnBrk="0" hangingPunct="1">
+              <a:defRPr sz="1800" kern="1200">
+                <a:solidFill>
+                  <a:schemeClr val="tx1"/>
+                </a:solidFill>
+                <a:latin typeface="+mn-lt"/>
+                <a:ea typeface="+mn-ea"/>
+                <a:cs typeface="+mn-cs"/>
+              </a:defRPr>
+            </a:lvl2pPr>
+            <a:lvl3pPr marL="914400" algn="l" defTabSz="457200" rtl="0" eaLnBrk="1" latinLnBrk="0" hangingPunct="1">
+              <a:defRPr sz="1800" kern="1200">
+                <a:solidFill>
+                  <a:schemeClr val="tx1"/>
+                </a:solidFill>
+                <a:latin typeface="+mn-lt"/>
+                <a:ea typeface="+mn-ea"/>
+                <a:cs typeface="+mn-cs"/>
+              </a:defRPr>
+            </a:lvl3pPr>
+            <a:lvl4pPr marL="1371600" algn="l" defTabSz="457200" rtl="0" eaLnBrk="1" latinLnBrk="0" hangingPunct="1">
+              <a:defRPr sz="1800" kern="1200">
+                <a:solidFill>
+                  <a:schemeClr val="tx1"/>
+                </a:solidFill>
+                <a:latin typeface="+mn-lt"/>
+                <a:ea typeface="+mn-ea"/>
+                <a:cs typeface="+mn-cs"/>
+              </a:defRPr>
+            </a:lvl4pPr>
+            <a:lvl5pPr marL="1828800" algn="l" defTabSz="457200" rtl="0" eaLnBrk="1" latinLnBrk="0" hangingPunct="1">
+              <a:defRPr sz="1800" kern="1200">
+                <a:solidFill>
+                  <a:schemeClr val="tx1"/>
+                </a:solidFill>
+                <a:latin typeface="+mn-lt"/>
+                <a:ea typeface="+mn-ea"/>
+                <a:cs typeface="+mn-cs"/>
+              </a:defRPr>
+            </a:lvl5pPr>
+            <a:lvl6pPr marL="2286000" algn="l" defTabSz="457200" rtl="0" eaLnBrk="1" latinLnBrk="0" hangingPunct="1">
+              <a:defRPr sz="1800" kern="1200">
+                <a:solidFill>
+                  <a:schemeClr val="tx1"/>
+                </a:solidFill>
+                <a:latin typeface="+mn-lt"/>
+                <a:ea typeface="+mn-ea"/>
+                <a:cs typeface="+mn-cs"/>
+              </a:defRPr>
+            </a:lvl6pPr>
+            <a:lvl7pPr marL="2743200" algn="l" defTabSz="457200" rtl="0" eaLnBrk="1" latinLnBrk="0" hangingPunct="1">
+              <a:defRPr sz="1800" kern="1200">
+                <a:solidFill>
+                  <a:schemeClr val="tx1"/>
+                </a:solidFill>
+                <a:latin typeface="+mn-lt"/>
+                <a:ea typeface="+mn-ea"/>
+                <a:cs typeface="+mn-cs"/>
+              </a:defRPr>
+            </a:lvl7pPr>
+            <a:lvl8pPr marL="3200400" algn="l" defTabSz="457200" rtl="0" eaLnBrk="1" latinLnBrk="0" hangingPunct="1">
+              <a:defRPr sz="1800" kern="1200">
+                <a:solidFill>
+                  <a:schemeClr val="tx1"/>
+                </a:solidFill>
+                <a:latin typeface="+mn-lt"/>
+                <a:ea typeface="+mn-ea"/>
+                <a:cs typeface="+mn-cs"/>
+              </a:defRPr>
+            </a:lvl8pPr>
+            <a:lvl9pPr marL="3657600" algn="l" defTabSz="457200" rtl="0" eaLnBrk="1" latinLnBrk="0" hangingPunct="1">
+              <a:defRPr sz="1800" kern="1200">
+                <a:solidFill>
+                  <a:schemeClr val="tx1"/>
+                </a:solidFill>
+                <a:latin typeface="+mn-lt"/>
+                <a:ea typeface="+mn-ea"/>
+                <a:cs typeface="+mn-cs"/>
+              </a:defRPr>
+            </a:lvl9pPr>
+          </a:lstStyle>
+          <a:p>
+            <a:pPr algn="ctr">
+              <a:lnSpc>
+                <a:spcPct val="120000"/>
+              </a:lnSpc>
+              <a:defRPr sz="1100" b="1">
+                <a:solidFill>
+                  <a:srgbClr val="2B2B2B"/>
+                </a:solidFill>
+                <a:latin typeface="Meiryo"/>
+              </a:defRPr>
+            </a:pPr>
+            <a:r>
+              <a:t>▲ クレジットカードサイズ</a:t>
+            </a:r>
+            <a:br/>
+            <a:r>
+              <a:t>（お持ち帰り用ショップカード）</a:t>
+            </a:r>
           </a:p>
         </p:txBody>
       </p:sp>
